--- a/0_wbs/도서검색웹_SB_2026_08_05.pptx
+++ b/0_wbs/도서검색웹_SB_2026_08_05.pptx
@@ -237,7 +237,7 @@
           <a:p>
             <a:fld id="{999972AA-FE3A-41E8-94D7-0A348C1614D1}" type="datetimeFigureOut">
               <a:rPr lang="ko-KR" altLang="en-US" smtClean="0"/>
-              <a:t>2026-08-05</a:t>
+              <a:t>2026-08-06</a:t>
             </a:fld>
             <a:endParaRPr lang="ko-KR" altLang="en-US"/>
           </a:p>
@@ -402,7 +402,7 @@
           <a:p>
             <a:fld id="{CB25E66B-2806-4CC0-B543-C1F698B8CB0C}" type="datetimeFigureOut">
               <a:rPr lang="ko-KR" altLang="en-US" smtClean="0"/>
-              <a:t>2026-08-05</a:t>
+              <a:t>2026-08-06</a:t>
             </a:fld>
             <a:endParaRPr lang="ko-KR" altLang="en-US"/>
           </a:p>
@@ -14754,6 +14754,52 @@
           <a:chExt cx="0" cy="0"/>
         </a:xfrm>
       </p:grpSpPr>
+      <p:cxnSp>
+        <p:nvCxnSpPr>
+          <p:cNvPr id="115" name="꺾인 연결선 51">
+            <a:extLst>
+              <a:ext uri="{FF2B5EF4-FFF2-40B4-BE49-F238E27FC236}">
+                <a16:creationId xmlns:a16="http://schemas.microsoft.com/office/drawing/2014/main" id="{E058C9CE-AAAC-4953-B0FC-38ECCF00F223}"/>
+              </a:ext>
+            </a:extLst>
+          </p:cNvPr>
+          <p:cNvCxnSpPr>
+            <a:cxnSpLocks/>
+          </p:cNvCxnSpPr>
+          <p:nvPr/>
+        </p:nvCxnSpPr>
+        <p:spPr>
+          <a:xfrm rot="10800000">
+            <a:off x="2799220" y="2060367"/>
+            <a:ext cx="1341725" cy="638404"/>
+          </a:xfrm>
+          <a:prstGeom prst="bentConnector3">
+            <a:avLst>
+              <a:gd name="adj1" fmla="val 50000"/>
+            </a:avLst>
+          </a:prstGeom>
+          <a:ln>
+            <a:solidFill>
+              <a:srgbClr val="FF0000"/>
+            </a:solidFill>
+            <a:tailEnd type="arrow" w="sm" len="sm"/>
+          </a:ln>
+        </p:spPr>
+        <p:style>
+          <a:lnRef idx="1">
+            <a:schemeClr val="accent1"/>
+          </a:lnRef>
+          <a:fillRef idx="0">
+            <a:schemeClr val="accent1"/>
+          </a:fillRef>
+          <a:effectRef idx="0">
+            <a:schemeClr val="accent1"/>
+          </a:effectRef>
+          <a:fontRef idx="minor">
+            <a:schemeClr val="tx1"/>
+          </a:fontRef>
+        </p:style>
+      </p:cxnSp>
       <p:sp>
         <p:nvSpPr>
           <p:cNvPr id="56" name="평행 사변형 55">
@@ -14879,7 +14925,7 @@
                 <a:latin typeface="나눔고딕" panose="020D0604000000000000" pitchFamily="50" charset="-127"/>
                 <a:ea typeface="나눔고딕" panose="020D0604000000000000" pitchFamily="50" charset="-127"/>
               </a:rPr>
-              <a:t>클라이언트 유저 플로우</a:t>
+              <a:t>책 상세 정보 조회 플로우</a:t>
             </a:r>
           </a:p>
         </p:txBody>
@@ -14898,7 +14944,7 @@
         </p:nvSpPr>
         <p:spPr>
           <a:xfrm>
-            <a:off x="815023" y="721536"/>
+            <a:off x="1775635" y="721536"/>
             <a:ext cx="849068" cy="338400"/>
           </a:xfrm>
           <a:prstGeom prst="roundRect">
@@ -14970,7 +15016,7 @@
         </p:nvSpPr>
         <p:spPr>
           <a:xfrm>
-            <a:off x="823585" y="1396994"/>
+            <a:off x="1784197" y="1396994"/>
             <a:ext cx="840506" cy="338554"/>
           </a:xfrm>
           <a:prstGeom prst="rect">
@@ -15020,7 +15066,7 @@
                 <a:ea typeface="나눔고딕" panose="020D0604000000000000" pitchFamily="50" charset="-127"/>
                 <a:cs typeface="Segoe UI" panose="020B0502040204020203" pitchFamily="34" charset="0"/>
               </a:rPr>
-              <a:t>프로젝트 등록</a:t>
+              <a:t>책 제목 검색</a:t>
             </a:r>
           </a:p>
         </p:txBody>
@@ -15039,7 +15085,7 @@
         </p:nvSpPr>
         <p:spPr>
           <a:xfrm>
-            <a:off x="735923" y="1989782"/>
+            <a:off x="1696534" y="2539285"/>
             <a:ext cx="1015830" cy="338554"/>
           </a:xfrm>
           <a:prstGeom prst="flowChartDecision">
@@ -15090,7 +15136,7 @@
                 <a:ea typeface="나눔고딕" panose="020D0604000000000000" pitchFamily="50" charset="-127"/>
                 <a:cs typeface="Segoe UI" panose="020B0502040204020203" pitchFamily="34" charset="0"/>
               </a:rPr>
-              <a:t>계정이</a:t>
+              <a:t>결과에 책이</a:t>
             </a:r>
             <a:endParaRPr lang="en-US" altLang="ko-KR" sz="750" dirty="0">
               <a:solidFill>
@@ -15164,7 +15210,7 @@
         </p:nvCxnSpPr>
         <p:spPr>
           <a:xfrm>
-            <a:off x="1242411" y="1773182"/>
+            <a:off x="2203023" y="1773182"/>
             <a:ext cx="2854" cy="159304"/>
           </a:xfrm>
           <a:prstGeom prst="straightConnector1">
@@ -15212,7 +15258,7 @@
         </p:nvCxnSpPr>
         <p:spPr>
           <a:xfrm>
-            <a:off x="1827294" y="2159059"/>
+            <a:off x="2794958" y="2713484"/>
             <a:ext cx="261402" cy="0"/>
           </a:xfrm>
           <a:prstGeom prst="straightConnector1">
@@ -15255,7 +15301,197 @@
         </p:nvSpPr>
         <p:spPr>
           <a:xfrm>
-            <a:off x="2163068" y="1983422"/>
+            <a:off x="3130731" y="2575565"/>
+            <a:ext cx="1153237" cy="338554"/>
+          </a:xfrm>
+          <a:prstGeom prst="rect">
+            <a:avLst/>
+          </a:prstGeom>
+          <a:solidFill>
+            <a:schemeClr val="bg1"/>
+          </a:solidFill>
+          <a:ln w="3175">
+            <a:solidFill>
+              <a:schemeClr val="tx1">
+                <a:lumMod val="50000"/>
+                <a:lumOff val="50000"/>
+              </a:schemeClr>
+            </a:solidFill>
+          </a:ln>
+        </p:spPr>
+        <p:style>
+          <a:lnRef idx="2">
+            <a:schemeClr val="accent1">
+              <a:shade val="50000"/>
+            </a:schemeClr>
+          </a:lnRef>
+          <a:fillRef idx="1">
+            <a:schemeClr val="accent1"/>
+          </a:fillRef>
+          <a:effectRef idx="0">
+            <a:schemeClr val="accent1"/>
+          </a:effectRef>
+          <a:fontRef idx="minor">
+            <a:schemeClr val="lt1"/>
+          </a:fontRef>
+        </p:style>
+        <p:txBody>
+          <a:bodyPr wrap="none" lIns="0" tIns="0" rIns="0" bIns="0" rtlCol="0" anchor="ctr">
+            <a:normAutofit/>
+          </a:bodyPr>
+          <a:lstStyle/>
+          <a:p>
+            <a:pPr algn="ctr"/>
+            <a:r>
+              <a:rPr lang="ko-KR" altLang="en-US" sz="750" dirty="0">
+                <a:solidFill>
+                  <a:srgbClr val="000000"/>
+                </a:solidFill>
+                <a:highlight>
+                  <a:srgbClr val="F9F9F9"/>
+                </a:highlight>
+                <a:latin typeface="나눔고딕" panose="020D0604000000000000" pitchFamily="50" charset="-127"/>
+                <a:ea typeface="나눔고딕" panose="020D0604000000000000" pitchFamily="50" charset="-127"/>
+                <a:cs typeface="Segoe UI" panose="020B0502040204020203" pitchFamily="34" charset="0"/>
+              </a:rPr>
+              <a:t>검색 결과 없음 </a:t>
+            </a:r>
+            <a:r>
+              <a:rPr lang="ko-KR" altLang="en-US" sz="750" dirty="0" err="1">
+                <a:solidFill>
+                  <a:srgbClr val="000000"/>
+                </a:solidFill>
+                <a:highlight>
+                  <a:srgbClr val="F9F9F9"/>
+                </a:highlight>
+                <a:latin typeface="나눔고딕" panose="020D0604000000000000" pitchFamily="50" charset="-127"/>
+                <a:ea typeface="나눔고딕" panose="020D0604000000000000" pitchFamily="50" charset="-127"/>
+                <a:cs typeface="Segoe UI" panose="020B0502040204020203" pitchFamily="34" charset="0"/>
+              </a:rPr>
+              <a:t>메세지</a:t>
+            </a:r>
+            <a:endParaRPr lang="ko-KR" altLang="en-US" sz="750" dirty="0">
+              <a:solidFill>
+                <a:srgbClr val="000000"/>
+              </a:solidFill>
+              <a:highlight>
+                <a:srgbClr val="F9F9F9"/>
+              </a:highlight>
+              <a:latin typeface="나눔고딕" panose="020D0604000000000000" pitchFamily="50" charset="-127"/>
+              <a:ea typeface="나눔고딕" panose="020D0604000000000000" pitchFamily="50" charset="-127"/>
+              <a:cs typeface="Segoe UI" panose="020B0502040204020203" pitchFamily="34" charset="0"/>
+            </a:endParaRPr>
+          </a:p>
+        </p:txBody>
+      </p:sp>
+      <p:sp>
+        <p:nvSpPr>
+          <p:cNvPr id="68" name="TextBox 67">
+            <a:extLst>
+              <a:ext uri="{FF2B5EF4-FFF2-40B4-BE49-F238E27FC236}">
+                <a16:creationId xmlns:a16="http://schemas.microsoft.com/office/drawing/2014/main" id="{3CEB3E6C-6E2D-4BD1-8D6A-2260E4C1472B}"/>
+              </a:ext>
+            </a:extLst>
+          </p:cNvPr>
+          <p:cNvSpPr txBox="1"/>
+          <p:nvPr/>
+        </p:nvSpPr>
+        <p:spPr>
+          <a:xfrm>
+            <a:off x="2254821" y="2867025"/>
+            <a:ext cx="322524" cy="184666"/>
+          </a:xfrm>
+          <a:prstGeom prst="rect">
+            <a:avLst/>
+          </a:prstGeom>
+          <a:noFill/>
+        </p:spPr>
+        <p:txBody>
+          <a:bodyPr wrap="none" rtlCol="0">
+            <a:spAutoFit/>
+          </a:bodyPr>
+          <a:lstStyle/>
+          <a:p>
+            <a:r>
+              <a:rPr lang="en-US" altLang="ko-KR" sz="600" b="1" dirty="0">
+                <a:solidFill>
+                  <a:srgbClr val="0078D7"/>
+                </a:solidFill>
+                <a:latin typeface="나눔고딕" panose="020D0604000000000000" pitchFamily="50" charset="-127"/>
+                <a:ea typeface="나눔고딕" panose="020D0604000000000000" pitchFamily="50" charset="-127"/>
+              </a:rPr>
+              <a:t>YES</a:t>
+            </a:r>
+            <a:endParaRPr lang="ko-KR" altLang="en-US" sz="600" b="1" dirty="0">
+              <a:solidFill>
+                <a:srgbClr val="0078D7"/>
+              </a:solidFill>
+              <a:latin typeface="나눔고딕" panose="020D0604000000000000" pitchFamily="50" charset="-127"/>
+              <a:ea typeface="나눔고딕" panose="020D0604000000000000" pitchFamily="50" charset="-127"/>
+            </a:endParaRPr>
+          </a:p>
+        </p:txBody>
+      </p:sp>
+      <p:cxnSp>
+        <p:nvCxnSpPr>
+          <p:cNvPr id="69" name="직선 화살표 연결선 68">
+            <a:extLst>
+              <a:ext uri="{FF2B5EF4-FFF2-40B4-BE49-F238E27FC236}">
+                <a16:creationId xmlns:a16="http://schemas.microsoft.com/office/drawing/2014/main" id="{9032F5B2-C1EB-4A39-9F1F-854135E61A81}"/>
+              </a:ext>
+            </a:extLst>
+          </p:cNvPr>
+          <p:cNvCxnSpPr>
+            <a:cxnSpLocks/>
+          </p:cNvCxnSpPr>
+          <p:nvPr/>
+        </p:nvCxnSpPr>
+        <p:spPr>
+          <a:xfrm>
+            <a:off x="2210075" y="2881523"/>
+            <a:ext cx="2854" cy="159304"/>
+          </a:xfrm>
+          <a:prstGeom prst="straightConnector1">
+            <a:avLst/>
+          </a:prstGeom>
+          <a:ln>
+            <a:solidFill>
+              <a:srgbClr val="0078D7"/>
+            </a:solidFill>
+            <a:headEnd w="sm" len="sm"/>
+            <a:tailEnd type="arrow" w="sm" len="sm"/>
+          </a:ln>
+        </p:spPr>
+        <p:style>
+          <a:lnRef idx="1">
+            <a:schemeClr val="accent1"/>
+          </a:lnRef>
+          <a:fillRef idx="0">
+            <a:schemeClr val="accent1"/>
+          </a:fillRef>
+          <a:effectRef idx="0">
+            <a:schemeClr val="accent1"/>
+          </a:effectRef>
+          <a:fontRef idx="minor">
+            <a:schemeClr val="tx1"/>
+          </a:fontRef>
+        </p:style>
+      </p:cxnSp>
+      <p:sp>
+        <p:nvSpPr>
+          <p:cNvPr id="70" name="직사각형 69">
+            <a:extLst>
+              <a:ext uri="{FF2B5EF4-FFF2-40B4-BE49-F238E27FC236}">
+                <a16:creationId xmlns:a16="http://schemas.microsoft.com/office/drawing/2014/main" id="{89CC2D7F-214E-4B0B-8ABC-11BD0A62FCD6}"/>
+              </a:ext>
+            </a:extLst>
+          </p:cNvPr>
+          <p:cNvSpPr/>
+          <p:nvPr/>
+        </p:nvSpPr>
+        <p:spPr>
+          <a:xfrm>
+            <a:off x="1791249" y="3106177"/>
             <a:ext cx="840506" cy="338554"/>
           </a:xfrm>
           <a:prstGeom prst="rect">
@@ -15305,17 +15541,65 @@
                 <a:ea typeface="나눔고딕" panose="020D0604000000000000" pitchFamily="50" charset="-127"/>
                 <a:cs typeface="Segoe UI" panose="020B0502040204020203" pitchFamily="34" charset="0"/>
               </a:rPr>
-              <a:t>회원가입</a:t>
+              <a:t>책 클릭</a:t>
             </a:r>
           </a:p>
         </p:txBody>
       </p:sp>
+      <p:cxnSp>
+        <p:nvCxnSpPr>
+          <p:cNvPr id="75" name="직선 화살표 연결선 74">
+            <a:extLst>
+              <a:ext uri="{FF2B5EF4-FFF2-40B4-BE49-F238E27FC236}">
+                <a16:creationId xmlns:a16="http://schemas.microsoft.com/office/drawing/2014/main" id="{533E5E80-71B6-475A-8D64-B6453E05E45D}"/>
+              </a:ext>
+            </a:extLst>
+          </p:cNvPr>
+          <p:cNvCxnSpPr>
+            <a:cxnSpLocks/>
+          </p:cNvCxnSpPr>
+          <p:nvPr/>
+        </p:nvCxnSpPr>
+        <p:spPr>
+          <a:xfrm>
+            <a:off x="2210075" y="3490284"/>
+            <a:ext cx="2854" cy="159304"/>
+          </a:xfrm>
+          <a:prstGeom prst="straightConnector1">
+            <a:avLst/>
+          </a:prstGeom>
+          <a:ln>
+            <a:solidFill>
+              <a:schemeClr val="tx1">
+                <a:lumMod val="75000"/>
+                <a:lumOff val="25000"/>
+              </a:schemeClr>
+            </a:solidFill>
+            <a:headEnd w="sm" len="sm"/>
+            <a:tailEnd type="arrow" w="sm" len="sm"/>
+          </a:ln>
+        </p:spPr>
+        <p:style>
+          <a:lnRef idx="1">
+            <a:schemeClr val="accent1"/>
+          </a:lnRef>
+          <a:fillRef idx="0">
+            <a:schemeClr val="accent1"/>
+          </a:fillRef>
+          <a:effectRef idx="0">
+            <a:schemeClr val="accent1"/>
+          </a:effectRef>
+          <a:fontRef idx="minor">
+            <a:schemeClr val="tx1"/>
+          </a:fontRef>
+        </p:style>
+      </p:cxnSp>
       <p:sp>
         <p:nvSpPr>
-          <p:cNvPr id="65" name="직사각형 64">
+          <p:cNvPr id="78" name="직사각형 77">
             <a:extLst>
               <a:ext uri="{FF2B5EF4-FFF2-40B4-BE49-F238E27FC236}">
-                <a16:creationId xmlns:a16="http://schemas.microsoft.com/office/drawing/2014/main" id="{32F5B678-F2CC-46B2-B2E4-700C73B56179}"/>
+                <a16:creationId xmlns:a16="http://schemas.microsoft.com/office/drawing/2014/main" id="{BD74F3AF-FEA8-4D6C-AB73-E6B431ED7C92}"/>
               </a:ext>
             </a:extLst>
           </p:cNvPr>
@@ -15324,8 +15608,8 @@
         </p:nvSpPr>
         <p:spPr>
           <a:xfrm>
-            <a:off x="3315162" y="1983422"/>
-            <a:ext cx="967661" cy="338554"/>
+            <a:off x="1250511" y="3736786"/>
+            <a:ext cx="1910732" cy="997298"/>
           </a:xfrm>
           <a:prstGeom prst="rect">
             <a:avLst/>
@@ -15374,787 +15658,7 @@
                 <a:ea typeface="나눔고딕" panose="020D0604000000000000" pitchFamily="50" charset="-127"/>
                 <a:cs typeface="Segoe UI" panose="020B0502040204020203" pitchFamily="34" charset="0"/>
               </a:rPr>
-              <a:t>회원가입 정보입력</a:t>
-            </a:r>
-          </a:p>
-        </p:txBody>
-      </p:sp>
-      <p:cxnSp>
-        <p:nvCxnSpPr>
-          <p:cNvPr id="66" name="직선 화살표 연결선 65">
-            <a:extLst>
-              <a:ext uri="{FF2B5EF4-FFF2-40B4-BE49-F238E27FC236}">
-                <a16:creationId xmlns:a16="http://schemas.microsoft.com/office/drawing/2014/main" id="{4AE10EF0-EFF4-4B57-BB93-C11870971DA4}"/>
-              </a:ext>
-            </a:extLst>
-          </p:cNvPr>
-          <p:cNvCxnSpPr>
-            <a:cxnSpLocks/>
-          </p:cNvCxnSpPr>
-          <p:nvPr/>
-        </p:nvCxnSpPr>
-        <p:spPr>
-          <a:xfrm>
-            <a:off x="3070066" y="2159059"/>
-            <a:ext cx="178604" cy="0"/>
-          </a:xfrm>
-          <a:prstGeom prst="straightConnector1">
-            <a:avLst/>
-          </a:prstGeom>
-          <a:ln>
-            <a:solidFill>
-              <a:schemeClr val="tx1">
-                <a:lumMod val="75000"/>
-                <a:lumOff val="25000"/>
-              </a:schemeClr>
-            </a:solidFill>
-            <a:headEnd w="sm" len="sm"/>
-            <a:tailEnd type="arrow" w="sm" len="sm"/>
-          </a:ln>
-        </p:spPr>
-        <p:style>
-          <a:lnRef idx="1">
-            <a:schemeClr val="accent1"/>
-          </a:lnRef>
-          <a:fillRef idx="0">
-            <a:schemeClr val="accent1"/>
-          </a:fillRef>
-          <a:effectRef idx="0">
-            <a:schemeClr val="accent1"/>
-          </a:effectRef>
-          <a:fontRef idx="minor">
-            <a:schemeClr val="tx1"/>
-          </a:fontRef>
-        </p:style>
-      </p:cxnSp>
-      <p:sp>
-        <p:nvSpPr>
-          <p:cNvPr id="67" name="TextBox 66">
-            <a:extLst>
-              <a:ext uri="{FF2B5EF4-FFF2-40B4-BE49-F238E27FC236}">
-                <a16:creationId xmlns:a16="http://schemas.microsoft.com/office/drawing/2014/main" id="{1E5A8530-79EE-4D6C-9101-FD119E2EF8FE}"/>
-              </a:ext>
-            </a:extLst>
-          </p:cNvPr>
-          <p:cNvSpPr txBox="1"/>
-          <p:nvPr/>
-        </p:nvSpPr>
-        <p:spPr>
-          <a:xfrm>
-            <a:off x="1791286" y="1968033"/>
-            <a:ext cx="303288" cy="184666"/>
-          </a:xfrm>
-          <a:prstGeom prst="rect">
-            <a:avLst/>
-          </a:prstGeom>
-          <a:noFill/>
-        </p:spPr>
-        <p:txBody>
-          <a:bodyPr wrap="none" rtlCol="0">
-            <a:spAutoFit/>
-          </a:bodyPr>
-          <a:lstStyle/>
-          <a:p>
-            <a:r>
-              <a:rPr lang="en-US" altLang="ko-KR" sz="600" b="1" dirty="0">
-                <a:solidFill>
-                  <a:srgbClr val="FF0000"/>
-                </a:solidFill>
-                <a:latin typeface="나눔고딕" panose="020D0604000000000000" pitchFamily="50" charset="-127"/>
-                <a:ea typeface="나눔고딕" panose="020D0604000000000000" pitchFamily="50" charset="-127"/>
-              </a:rPr>
-              <a:t>NO</a:t>
-            </a:r>
-            <a:endParaRPr lang="ko-KR" altLang="en-US" sz="600" b="1" dirty="0">
-              <a:solidFill>
-                <a:srgbClr val="FF0000"/>
-              </a:solidFill>
-              <a:latin typeface="나눔고딕" panose="020D0604000000000000" pitchFamily="50" charset="-127"/>
-              <a:ea typeface="나눔고딕" panose="020D0604000000000000" pitchFamily="50" charset="-127"/>
-            </a:endParaRPr>
-          </a:p>
-        </p:txBody>
-      </p:sp>
-      <p:sp>
-        <p:nvSpPr>
-          <p:cNvPr id="68" name="TextBox 67">
-            <a:extLst>
-              <a:ext uri="{FF2B5EF4-FFF2-40B4-BE49-F238E27FC236}">
-                <a16:creationId xmlns:a16="http://schemas.microsoft.com/office/drawing/2014/main" id="{3CEB3E6C-6E2D-4BD1-8D6A-2260E4C1472B}"/>
-              </a:ext>
-            </a:extLst>
-          </p:cNvPr>
-          <p:cNvSpPr txBox="1"/>
-          <p:nvPr/>
-        </p:nvSpPr>
-        <p:spPr>
-          <a:xfrm>
-            <a:off x="1287157" y="2377042"/>
-            <a:ext cx="322524" cy="184666"/>
-          </a:xfrm>
-          <a:prstGeom prst="rect">
-            <a:avLst/>
-          </a:prstGeom>
-          <a:noFill/>
-        </p:spPr>
-        <p:txBody>
-          <a:bodyPr wrap="none" rtlCol="0">
-            <a:spAutoFit/>
-          </a:bodyPr>
-          <a:lstStyle/>
-          <a:p>
-            <a:r>
-              <a:rPr lang="en-US" altLang="ko-KR" sz="600" b="1" dirty="0">
-                <a:solidFill>
-                  <a:srgbClr val="0078D7"/>
-                </a:solidFill>
-                <a:latin typeface="나눔고딕" panose="020D0604000000000000" pitchFamily="50" charset="-127"/>
-                <a:ea typeface="나눔고딕" panose="020D0604000000000000" pitchFamily="50" charset="-127"/>
-              </a:rPr>
-              <a:t>YES</a:t>
-            </a:r>
-            <a:endParaRPr lang="ko-KR" altLang="en-US" sz="600" b="1" dirty="0">
-              <a:solidFill>
-                <a:srgbClr val="0078D7"/>
-              </a:solidFill>
-              <a:latin typeface="나눔고딕" panose="020D0604000000000000" pitchFamily="50" charset="-127"/>
-              <a:ea typeface="나눔고딕" panose="020D0604000000000000" pitchFamily="50" charset="-127"/>
-            </a:endParaRPr>
-          </a:p>
-        </p:txBody>
-      </p:sp>
-      <p:cxnSp>
-        <p:nvCxnSpPr>
-          <p:cNvPr id="69" name="직선 화살표 연결선 68">
-            <a:extLst>
-              <a:ext uri="{FF2B5EF4-FFF2-40B4-BE49-F238E27FC236}">
-                <a16:creationId xmlns:a16="http://schemas.microsoft.com/office/drawing/2014/main" id="{9032F5B2-C1EB-4A39-9F1F-854135E61A81}"/>
-              </a:ext>
-            </a:extLst>
-          </p:cNvPr>
-          <p:cNvCxnSpPr>
-            <a:cxnSpLocks/>
-          </p:cNvCxnSpPr>
-          <p:nvPr/>
-        </p:nvCxnSpPr>
-        <p:spPr>
-          <a:xfrm>
-            <a:off x="1242411" y="2391540"/>
-            <a:ext cx="2854" cy="159304"/>
-          </a:xfrm>
-          <a:prstGeom prst="straightConnector1">
-            <a:avLst/>
-          </a:prstGeom>
-          <a:ln>
-            <a:solidFill>
-              <a:srgbClr val="0078D7"/>
-            </a:solidFill>
-            <a:headEnd w="sm" len="sm"/>
-            <a:tailEnd type="arrow" w="sm" len="sm"/>
-          </a:ln>
-        </p:spPr>
-        <p:style>
-          <a:lnRef idx="1">
-            <a:schemeClr val="accent1"/>
-          </a:lnRef>
-          <a:fillRef idx="0">
-            <a:schemeClr val="accent1"/>
-          </a:fillRef>
-          <a:effectRef idx="0">
-            <a:schemeClr val="accent1"/>
-          </a:effectRef>
-          <a:fontRef idx="minor">
-            <a:schemeClr val="tx1"/>
-          </a:fontRef>
-        </p:style>
-      </p:cxnSp>
-      <p:sp>
-        <p:nvSpPr>
-          <p:cNvPr id="70" name="직사각형 69">
-            <a:extLst>
-              <a:ext uri="{FF2B5EF4-FFF2-40B4-BE49-F238E27FC236}">
-                <a16:creationId xmlns:a16="http://schemas.microsoft.com/office/drawing/2014/main" id="{89CC2D7F-214E-4B0B-8ABC-11BD0A62FCD6}"/>
-              </a:ext>
-            </a:extLst>
-          </p:cNvPr>
-          <p:cNvSpPr/>
-          <p:nvPr/>
-        </p:nvSpPr>
-        <p:spPr>
-          <a:xfrm>
-            <a:off x="823585" y="2616194"/>
-            <a:ext cx="840506" cy="338554"/>
-          </a:xfrm>
-          <a:prstGeom prst="rect">
-            <a:avLst/>
-          </a:prstGeom>
-          <a:solidFill>
-            <a:schemeClr val="bg1"/>
-          </a:solidFill>
-          <a:ln w="3175">
-            <a:solidFill>
-              <a:schemeClr val="tx1">
-                <a:lumMod val="50000"/>
-                <a:lumOff val="50000"/>
-              </a:schemeClr>
-            </a:solidFill>
-          </a:ln>
-        </p:spPr>
-        <p:style>
-          <a:lnRef idx="2">
-            <a:schemeClr val="accent1">
-              <a:shade val="50000"/>
-            </a:schemeClr>
-          </a:lnRef>
-          <a:fillRef idx="1">
-            <a:schemeClr val="accent1"/>
-          </a:fillRef>
-          <a:effectRef idx="0">
-            <a:schemeClr val="accent1"/>
-          </a:effectRef>
-          <a:fontRef idx="minor">
-            <a:schemeClr val="lt1"/>
-          </a:fontRef>
-        </p:style>
-        <p:txBody>
-          <a:bodyPr wrap="none" lIns="0" tIns="0" rIns="0" bIns="0" rtlCol="0" anchor="ctr">
-            <a:normAutofit/>
-          </a:bodyPr>
-          <a:lstStyle/>
-          <a:p>
-            <a:pPr algn="ctr"/>
-            <a:r>
-              <a:rPr lang="ko-KR" altLang="en-US" sz="750" dirty="0">
-                <a:solidFill>
-                  <a:srgbClr val="000000"/>
-                </a:solidFill>
-                <a:latin typeface="나눔고딕" panose="020D0604000000000000" pitchFamily="50" charset="-127"/>
-                <a:ea typeface="나눔고딕" panose="020D0604000000000000" pitchFamily="50" charset="-127"/>
-                <a:cs typeface="Segoe UI" panose="020B0502040204020203" pitchFamily="34" charset="0"/>
-              </a:rPr>
-              <a:t>지원자 모집</a:t>
-            </a:r>
-          </a:p>
-        </p:txBody>
-      </p:sp>
-      <p:cxnSp>
-        <p:nvCxnSpPr>
-          <p:cNvPr id="71" name="직선 화살표 연결선 70">
-            <a:extLst>
-              <a:ext uri="{FF2B5EF4-FFF2-40B4-BE49-F238E27FC236}">
-                <a16:creationId xmlns:a16="http://schemas.microsoft.com/office/drawing/2014/main" id="{C1253F8B-1C71-4B58-BF86-9D16259CD052}"/>
-              </a:ext>
-            </a:extLst>
-          </p:cNvPr>
-          <p:cNvCxnSpPr>
-            <a:cxnSpLocks/>
-          </p:cNvCxnSpPr>
-          <p:nvPr/>
-        </p:nvCxnSpPr>
-        <p:spPr>
-          <a:xfrm>
-            <a:off x="3819548" y="2377042"/>
-            <a:ext cx="2854" cy="159304"/>
-          </a:xfrm>
-          <a:prstGeom prst="straightConnector1">
-            <a:avLst/>
-          </a:prstGeom>
-          <a:ln>
-            <a:solidFill>
-              <a:schemeClr val="tx1">
-                <a:lumMod val="75000"/>
-                <a:lumOff val="25000"/>
-              </a:schemeClr>
-            </a:solidFill>
-            <a:headEnd w="sm" len="sm"/>
-            <a:tailEnd type="arrow" w="sm" len="sm"/>
-          </a:ln>
-        </p:spPr>
-        <p:style>
-          <a:lnRef idx="1">
-            <a:schemeClr val="accent1"/>
-          </a:lnRef>
-          <a:fillRef idx="0">
-            <a:schemeClr val="accent1"/>
-          </a:fillRef>
-          <a:effectRef idx="0">
-            <a:schemeClr val="accent1"/>
-          </a:effectRef>
-          <a:fontRef idx="minor">
-            <a:schemeClr val="tx1"/>
-          </a:fontRef>
-        </p:style>
-      </p:cxnSp>
-      <p:sp>
-        <p:nvSpPr>
-          <p:cNvPr id="72" name="직사각형 71">
-            <a:extLst>
-              <a:ext uri="{FF2B5EF4-FFF2-40B4-BE49-F238E27FC236}">
-                <a16:creationId xmlns:a16="http://schemas.microsoft.com/office/drawing/2014/main" id="{16817555-B28A-435A-AE5D-375CAAD988F6}"/>
-              </a:ext>
-            </a:extLst>
-          </p:cNvPr>
-          <p:cNvSpPr/>
-          <p:nvPr/>
-        </p:nvSpPr>
-        <p:spPr>
-          <a:xfrm>
-            <a:off x="3316307" y="2606212"/>
-            <a:ext cx="967661" cy="338554"/>
-          </a:xfrm>
-          <a:prstGeom prst="rect">
-            <a:avLst/>
-          </a:prstGeom>
-          <a:solidFill>
-            <a:schemeClr val="bg1"/>
-          </a:solidFill>
-          <a:ln w="3175">
-            <a:solidFill>
-              <a:schemeClr val="tx1">
-                <a:lumMod val="50000"/>
-                <a:lumOff val="50000"/>
-              </a:schemeClr>
-            </a:solidFill>
-          </a:ln>
-        </p:spPr>
-        <p:style>
-          <a:lnRef idx="2">
-            <a:schemeClr val="accent1">
-              <a:shade val="50000"/>
-            </a:schemeClr>
-          </a:lnRef>
-          <a:fillRef idx="1">
-            <a:schemeClr val="accent1"/>
-          </a:fillRef>
-          <a:effectRef idx="0">
-            <a:schemeClr val="accent1"/>
-          </a:effectRef>
-          <a:fontRef idx="minor">
-            <a:schemeClr val="lt1"/>
-          </a:fontRef>
-        </p:style>
-        <p:txBody>
-          <a:bodyPr wrap="none" lIns="0" tIns="0" rIns="0" bIns="0" rtlCol="0" anchor="ctr">
-            <a:normAutofit/>
-          </a:bodyPr>
-          <a:lstStyle/>
-          <a:p>
-            <a:pPr algn="ctr"/>
-            <a:r>
-              <a:rPr lang="ko-KR" altLang="en-US" sz="750" dirty="0">
-                <a:solidFill>
-                  <a:srgbClr val="000000"/>
-                </a:solidFill>
-                <a:latin typeface="나눔고딕" panose="020D0604000000000000" pitchFamily="50" charset="-127"/>
-                <a:ea typeface="나눔고딕" panose="020D0604000000000000" pitchFamily="50" charset="-127"/>
-                <a:cs typeface="Segoe UI" panose="020B0502040204020203" pitchFamily="34" charset="0"/>
-              </a:rPr>
-              <a:t>가입완료</a:t>
-            </a:r>
-          </a:p>
-        </p:txBody>
-      </p:sp>
-      <p:cxnSp>
-        <p:nvCxnSpPr>
-          <p:cNvPr id="73" name="직선 화살표 연결선 72">
-            <a:extLst>
-              <a:ext uri="{FF2B5EF4-FFF2-40B4-BE49-F238E27FC236}">
-                <a16:creationId xmlns:a16="http://schemas.microsoft.com/office/drawing/2014/main" id="{BADFF599-A2F1-4343-81F9-375953B67182}"/>
-              </a:ext>
-            </a:extLst>
-          </p:cNvPr>
-          <p:cNvCxnSpPr>
-            <a:cxnSpLocks/>
-          </p:cNvCxnSpPr>
-          <p:nvPr/>
-        </p:nvCxnSpPr>
-        <p:spPr>
-          <a:xfrm flipH="1">
-            <a:off x="1744497" y="2785471"/>
-            <a:ext cx="1496916" cy="0"/>
-          </a:xfrm>
-          <a:prstGeom prst="straightConnector1">
-            <a:avLst/>
-          </a:prstGeom>
-          <a:ln>
-            <a:solidFill>
-              <a:schemeClr val="tx1">
-                <a:lumMod val="75000"/>
-                <a:lumOff val="25000"/>
-              </a:schemeClr>
-            </a:solidFill>
-            <a:headEnd w="sm" len="sm"/>
-            <a:tailEnd type="arrow" w="sm" len="sm"/>
-          </a:ln>
-        </p:spPr>
-        <p:style>
-          <a:lnRef idx="1">
-            <a:schemeClr val="accent1"/>
-          </a:lnRef>
-          <a:fillRef idx="0">
-            <a:schemeClr val="accent1"/>
-          </a:fillRef>
-          <a:effectRef idx="0">
-            <a:schemeClr val="accent1"/>
-          </a:effectRef>
-          <a:fontRef idx="minor">
-            <a:schemeClr val="tx1"/>
-          </a:fontRef>
-        </p:style>
-      </p:cxnSp>
-      <p:sp>
-        <p:nvSpPr>
-          <p:cNvPr id="74" name="직사각형 73">
-            <a:extLst>
-              <a:ext uri="{FF2B5EF4-FFF2-40B4-BE49-F238E27FC236}">
-                <a16:creationId xmlns:a16="http://schemas.microsoft.com/office/drawing/2014/main" id="{8167ADC0-B21B-4B98-8893-32A4F42C8195}"/>
-              </a:ext>
-            </a:extLst>
-          </p:cNvPr>
-          <p:cNvSpPr/>
-          <p:nvPr/>
-        </p:nvSpPr>
-        <p:spPr>
-          <a:xfrm>
-            <a:off x="823585" y="3202934"/>
-            <a:ext cx="840506" cy="338554"/>
-          </a:xfrm>
-          <a:prstGeom prst="rect">
-            <a:avLst/>
-          </a:prstGeom>
-          <a:solidFill>
-            <a:schemeClr val="bg1"/>
-          </a:solidFill>
-          <a:ln w="3175">
-            <a:solidFill>
-              <a:schemeClr val="tx1">
-                <a:lumMod val="50000"/>
-                <a:lumOff val="50000"/>
-              </a:schemeClr>
-            </a:solidFill>
-          </a:ln>
-        </p:spPr>
-        <p:style>
-          <a:lnRef idx="2">
-            <a:schemeClr val="accent1">
-              <a:shade val="50000"/>
-            </a:schemeClr>
-          </a:lnRef>
-          <a:fillRef idx="1">
-            <a:schemeClr val="accent1"/>
-          </a:fillRef>
-          <a:effectRef idx="0">
-            <a:schemeClr val="accent1"/>
-          </a:effectRef>
-          <a:fontRef idx="minor">
-            <a:schemeClr val="lt1"/>
-          </a:fontRef>
-        </p:style>
-        <p:txBody>
-          <a:bodyPr wrap="none" lIns="0" tIns="0" rIns="0" bIns="0" rtlCol="0" anchor="ctr">
-            <a:normAutofit/>
-          </a:bodyPr>
-          <a:lstStyle/>
-          <a:p>
-            <a:pPr algn="ctr"/>
-            <a:r>
-              <a:rPr lang="ko-KR" altLang="en-US" sz="750" dirty="0">
-                <a:solidFill>
-                  <a:srgbClr val="000000"/>
-                </a:solidFill>
-                <a:latin typeface="나눔고딕" panose="020D0604000000000000" pitchFamily="50" charset="-127"/>
-                <a:ea typeface="나눔고딕" panose="020D0604000000000000" pitchFamily="50" charset="-127"/>
-                <a:cs typeface="Segoe UI" panose="020B0502040204020203" pitchFamily="34" charset="0"/>
-              </a:rPr>
-              <a:t>미팅신청</a:t>
-            </a:r>
-          </a:p>
-        </p:txBody>
-      </p:sp>
-      <p:cxnSp>
-        <p:nvCxnSpPr>
-          <p:cNvPr id="75" name="직선 화살표 연결선 74">
-            <a:extLst>
-              <a:ext uri="{FF2B5EF4-FFF2-40B4-BE49-F238E27FC236}">
-                <a16:creationId xmlns:a16="http://schemas.microsoft.com/office/drawing/2014/main" id="{533E5E80-71B6-475A-8D64-B6453E05E45D}"/>
-              </a:ext>
-            </a:extLst>
-          </p:cNvPr>
-          <p:cNvCxnSpPr>
-            <a:cxnSpLocks/>
-          </p:cNvCxnSpPr>
-          <p:nvPr/>
-        </p:nvCxnSpPr>
-        <p:spPr>
-          <a:xfrm>
-            <a:off x="1242411" y="3000301"/>
-            <a:ext cx="2854" cy="159304"/>
-          </a:xfrm>
-          <a:prstGeom prst="straightConnector1">
-            <a:avLst/>
-          </a:prstGeom>
-          <a:ln>
-            <a:solidFill>
-              <a:schemeClr val="tx1">
-                <a:lumMod val="75000"/>
-                <a:lumOff val="25000"/>
-              </a:schemeClr>
-            </a:solidFill>
-            <a:headEnd w="sm" len="sm"/>
-            <a:tailEnd type="arrow" w="sm" len="sm"/>
-          </a:ln>
-        </p:spPr>
-        <p:style>
-          <a:lnRef idx="1">
-            <a:schemeClr val="accent1"/>
-          </a:lnRef>
-          <a:fillRef idx="0">
-            <a:schemeClr val="accent1"/>
-          </a:fillRef>
-          <a:effectRef idx="0">
-            <a:schemeClr val="accent1"/>
-          </a:effectRef>
-          <a:fontRef idx="minor">
-            <a:schemeClr val="tx1"/>
-          </a:fontRef>
-        </p:style>
-      </p:cxnSp>
-      <p:cxnSp>
-        <p:nvCxnSpPr>
-          <p:cNvPr id="76" name="직선 화살표 연결선 75">
-            <a:extLst>
-              <a:ext uri="{FF2B5EF4-FFF2-40B4-BE49-F238E27FC236}">
-                <a16:creationId xmlns:a16="http://schemas.microsoft.com/office/drawing/2014/main" id="{28D2397D-465C-4CBB-8180-C8ABFAEECAA4}"/>
-              </a:ext>
-            </a:extLst>
-          </p:cNvPr>
-          <p:cNvCxnSpPr>
-            <a:cxnSpLocks/>
-          </p:cNvCxnSpPr>
-          <p:nvPr/>
-        </p:nvCxnSpPr>
-        <p:spPr>
-          <a:xfrm>
-            <a:off x="1242411" y="3579122"/>
-            <a:ext cx="2854" cy="159304"/>
-          </a:xfrm>
-          <a:prstGeom prst="straightConnector1">
-            <a:avLst/>
-          </a:prstGeom>
-          <a:ln>
-            <a:solidFill>
-              <a:schemeClr val="tx1">
-                <a:lumMod val="75000"/>
-                <a:lumOff val="25000"/>
-              </a:schemeClr>
-            </a:solidFill>
-            <a:headEnd w="sm" len="sm"/>
-            <a:tailEnd type="arrow" w="sm" len="sm"/>
-          </a:ln>
-        </p:spPr>
-        <p:style>
-          <a:lnRef idx="1">
-            <a:schemeClr val="accent1"/>
-          </a:lnRef>
-          <a:fillRef idx="0">
-            <a:schemeClr val="accent1"/>
-          </a:fillRef>
-          <a:effectRef idx="0">
-            <a:schemeClr val="accent1"/>
-          </a:effectRef>
-          <a:fontRef idx="minor">
-            <a:schemeClr val="tx1"/>
-          </a:fontRef>
-        </p:style>
-      </p:cxnSp>
-      <p:sp>
-        <p:nvSpPr>
-          <p:cNvPr id="77" name="사각형: 둥근 모서리 76">
-            <a:extLst>
-              <a:ext uri="{FF2B5EF4-FFF2-40B4-BE49-F238E27FC236}">
-                <a16:creationId xmlns:a16="http://schemas.microsoft.com/office/drawing/2014/main" id="{B93D3515-2B26-4526-938A-3EF31B6C7B6B}"/>
-              </a:ext>
-            </a:extLst>
-          </p:cNvPr>
-          <p:cNvSpPr/>
-          <p:nvPr/>
-        </p:nvSpPr>
-        <p:spPr>
-          <a:xfrm>
-            <a:off x="536559" y="3789674"/>
-            <a:ext cx="1421436" cy="338554"/>
-          </a:xfrm>
-          <a:prstGeom prst="flowChartDecision">
-            <a:avLst/>
-          </a:prstGeom>
-          <a:solidFill>
-            <a:schemeClr val="bg1"/>
-          </a:solidFill>
-          <a:ln w="3175">
-            <a:solidFill>
-              <a:schemeClr val="tx1">
-                <a:lumMod val="50000"/>
-                <a:lumOff val="50000"/>
-              </a:schemeClr>
-            </a:solidFill>
-          </a:ln>
-        </p:spPr>
-        <p:style>
-          <a:lnRef idx="2">
-            <a:schemeClr val="accent1">
-              <a:shade val="50000"/>
-            </a:schemeClr>
-          </a:lnRef>
-          <a:fillRef idx="1">
-            <a:schemeClr val="accent1"/>
-          </a:fillRef>
-          <a:effectRef idx="0">
-            <a:schemeClr val="accent1"/>
-          </a:effectRef>
-          <a:fontRef idx="minor">
-            <a:schemeClr val="lt1"/>
-          </a:fontRef>
-        </p:style>
-        <p:txBody>
-          <a:bodyPr wrap="none" rtlCol="0" anchor="ctr"/>
-          <a:lstStyle/>
-          <a:p>
-            <a:pPr algn="ctr"/>
-            <a:r>
-              <a:rPr lang="ko-KR" altLang="en-US" sz="750" dirty="0">
-                <a:solidFill>
-                  <a:schemeClr val="tx1">
-                    <a:lumMod val="95000"/>
-                    <a:lumOff val="5000"/>
-                  </a:schemeClr>
-                </a:solidFill>
-                <a:latin typeface="나눔고딕" panose="020D0604000000000000" pitchFamily="50" charset="-127"/>
-                <a:ea typeface="나눔고딕" panose="020D0604000000000000" pitchFamily="50" charset="-127"/>
-                <a:cs typeface="Segoe UI" panose="020B0502040204020203" pitchFamily="34" charset="0"/>
-              </a:rPr>
-              <a:t>계약대상을</a:t>
-            </a:r>
-            <a:endParaRPr lang="en-US" altLang="ko-KR" sz="750" dirty="0">
-              <a:solidFill>
-                <a:schemeClr val="tx1">
-                  <a:lumMod val="95000"/>
-                  <a:lumOff val="5000"/>
-                </a:schemeClr>
-              </a:solidFill>
-              <a:latin typeface="나눔고딕" panose="020D0604000000000000" pitchFamily="50" charset="-127"/>
-              <a:ea typeface="나눔고딕" panose="020D0604000000000000" pitchFamily="50" charset="-127"/>
-              <a:cs typeface="Segoe UI" panose="020B0502040204020203" pitchFamily="34" charset="0"/>
-            </a:endParaRPr>
-          </a:p>
-          <a:p>
-            <a:pPr algn="ctr"/>
-            <a:r>
-              <a:rPr lang="ko-KR" altLang="en-US" sz="750" dirty="0">
-                <a:solidFill>
-                  <a:schemeClr val="tx1">
-                    <a:lumMod val="95000"/>
-                    <a:lumOff val="5000"/>
-                  </a:schemeClr>
-                </a:solidFill>
-                <a:latin typeface="나눔고딕" panose="020D0604000000000000" pitchFamily="50" charset="-127"/>
-                <a:ea typeface="나눔고딕" panose="020D0604000000000000" pitchFamily="50" charset="-127"/>
-                <a:cs typeface="Segoe UI" panose="020B0502040204020203" pitchFamily="34" charset="0"/>
-              </a:rPr>
-              <a:t>선택하였습니까</a:t>
-            </a:r>
-            <a:r>
-              <a:rPr lang="en-US" altLang="ko-KR" sz="750" dirty="0">
-                <a:solidFill>
-                  <a:schemeClr val="tx1">
-                    <a:lumMod val="95000"/>
-                    <a:lumOff val="5000"/>
-                  </a:schemeClr>
-                </a:solidFill>
-                <a:latin typeface="나눔고딕" panose="020D0604000000000000" pitchFamily="50" charset="-127"/>
-                <a:ea typeface="나눔고딕" panose="020D0604000000000000" pitchFamily="50" charset="-127"/>
-                <a:cs typeface="Segoe UI" panose="020B0502040204020203" pitchFamily="34" charset="0"/>
-              </a:rPr>
-              <a:t>?</a:t>
-            </a:r>
-            <a:endParaRPr lang="ko-KR" altLang="en-US" sz="750" dirty="0">
-              <a:solidFill>
-                <a:schemeClr val="tx1">
-                  <a:lumMod val="95000"/>
-                  <a:lumOff val="5000"/>
-                </a:schemeClr>
-              </a:solidFill>
-              <a:latin typeface="나눔고딕" panose="020D0604000000000000" pitchFamily="50" charset="-127"/>
-              <a:ea typeface="나눔고딕" panose="020D0604000000000000" pitchFamily="50" charset="-127"/>
-              <a:cs typeface="Segoe UI" panose="020B0502040204020203" pitchFamily="34" charset="0"/>
-            </a:endParaRPr>
-          </a:p>
-        </p:txBody>
-      </p:sp>
-      <p:sp>
-        <p:nvSpPr>
-          <p:cNvPr id="78" name="직사각형 77">
-            <a:extLst>
-              <a:ext uri="{FF2B5EF4-FFF2-40B4-BE49-F238E27FC236}">
-                <a16:creationId xmlns:a16="http://schemas.microsoft.com/office/drawing/2014/main" id="{BD74F3AF-FEA8-4D6C-AB73-E6B431ED7C92}"/>
-              </a:ext>
-            </a:extLst>
-          </p:cNvPr>
-          <p:cNvSpPr/>
-          <p:nvPr/>
-        </p:nvSpPr>
-        <p:spPr>
-          <a:xfrm>
-            <a:off x="823585" y="4397748"/>
-            <a:ext cx="840506" cy="338554"/>
-          </a:xfrm>
-          <a:prstGeom prst="rect">
-            <a:avLst/>
-          </a:prstGeom>
-          <a:solidFill>
-            <a:schemeClr val="bg1"/>
-          </a:solidFill>
-          <a:ln w="3175">
-            <a:solidFill>
-              <a:schemeClr val="tx1">
-                <a:lumMod val="50000"/>
-                <a:lumOff val="50000"/>
-              </a:schemeClr>
-            </a:solidFill>
-          </a:ln>
-        </p:spPr>
-        <p:style>
-          <a:lnRef idx="2">
-            <a:schemeClr val="accent1">
-              <a:shade val="50000"/>
-            </a:schemeClr>
-          </a:lnRef>
-          <a:fillRef idx="1">
-            <a:schemeClr val="accent1"/>
-          </a:fillRef>
-          <a:effectRef idx="0">
-            <a:schemeClr val="accent1"/>
-          </a:effectRef>
-          <a:fontRef idx="minor">
-            <a:schemeClr val="lt1"/>
-          </a:fontRef>
-        </p:style>
-        <p:txBody>
-          <a:bodyPr wrap="none" lIns="0" tIns="0" rIns="0" bIns="0" rtlCol="0" anchor="ctr">
-            <a:normAutofit/>
-          </a:bodyPr>
-          <a:lstStyle/>
-          <a:p>
-            <a:pPr algn="ctr"/>
-            <a:r>
-              <a:rPr lang="ko-KR" altLang="en-US" sz="750" dirty="0">
-                <a:solidFill>
-                  <a:srgbClr val="000000"/>
-                </a:solidFill>
-                <a:latin typeface="나눔고딕" panose="020D0604000000000000" pitchFamily="50" charset="-127"/>
-                <a:ea typeface="나눔고딕" panose="020D0604000000000000" pitchFamily="50" charset="-127"/>
-                <a:cs typeface="Segoe UI" panose="020B0502040204020203" pitchFamily="34" charset="0"/>
-              </a:rPr>
-              <a:t>계약서 날인</a:t>
+              <a:t>책 상세 페이지 노출</a:t>
             </a:r>
           </a:p>
         </p:txBody>
@@ -16173,7 +15677,7 @@
         </p:nvSpPr>
         <p:spPr>
           <a:xfrm>
-            <a:off x="823585" y="4986118"/>
+            <a:off x="1784197" y="4986118"/>
             <a:ext cx="840506" cy="338400"/>
           </a:xfrm>
           <a:prstGeom prst="roundRect">
@@ -16247,7 +15751,7 @@
         </p:nvCxnSpPr>
         <p:spPr>
           <a:xfrm>
-            <a:off x="1236382" y="4800113"/>
+            <a:off x="2196994" y="4800113"/>
             <a:ext cx="0" cy="144404"/>
           </a:xfrm>
           <a:prstGeom prst="straightConnector1">
@@ -16259,193 +15763,6 @@
             </a:solidFill>
             <a:headEnd w="sm" len="sm"/>
             <a:tailEnd type="triangle" w="med" len="sm"/>
-          </a:ln>
-        </p:spPr>
-        <p:style>
-          <a:lnRef idx="1">
-            <a:schemeClr val="accent1"/>
-          </a:lnRef>
-          <a:fillRef idx="0">
-            <a:schemeClr val="accent1"/>
-          </a:fillRef>
-          <a:effectRef idx="0">
-            <a:schemeClr val="accent1"/>
-          </a:effectRef>
-          <a:fontRef idx="minor">
-            <a:schemeClr val="tx1"/>
-          </a:fontRef>
-        </p:style>
-      </p:cxnSp>
-      <p:cxnSp>
-        <p:nvCxnSpPr>
-          <p:cNvPr id="81" name="꺾인 연결선 51">
-            <a:extLst>
-              <a:ext uri="{FF2B5EF4-FFF2-40B4-BE49-F238E27FC236}">
-                <a16:creationId xmlns:a16="http://schemas.microsoft.com/office/drawing/2014/main" id="{D7968543-166F-478D-BFD4-B78208D06262}"/>
-              </a:ext>
-            </a:extLst>
-          </p:cNvPr>
-          <p:cNvCxnSpPr>
-            <a:cxnSpLocks/>
-          </p:cNvCxnSpPr>
-          <p:nvPr/>
-        </p:nvCxnSpPr>
-        <p:spPr>
-          <a:xfrm rot="10800000">
-            <a:off x="444564" y="2763669"/>
-            <a:ext cx="12700" cy="1217083"/>
-          </a:xfrm>
-          <a:prstGeom prst="bentConnector3">
-            <a:avLst>
-              <a:gd name="adj1" fmla="val 1390976"/>
-            </a:avLst>
-          </a:prstGeom>
-          <a:ln>
-            <a:solidFill>
-              <a:srgbClr val="FF0000"/>
-            </a:solidFill>
-            <a:tailEnd type="arrow" w="sm" len="sm"/>
-          </a:ln>
-        </p:spPr>
-        <p:style>
-          <a:lnRef idx="1">
-            <a:schemeClr val="accent1"/>
-          </a:lnRef>
-          <a:fillRef idx="0">
-            <a:schemeClr val="accent1"/>
-          </a:fillRef>
-          <a:effectRef idx="0">
-            <a:schemeClr val="accent1"/>
-          </a:effectRef>
-          <a:fontRef idx="minor">
-            <a:schemeClr val="tx1"/>
-          </a:fontRef>
-        </p:style>
-      </p:cxnSp>
-      <p:sp>
-        <p:nvSpPr>
-          <p:cNvPr id="82" name="TextBox 81">
-            <a:extLst>
-              <a:ext uri="{FF2B5EF4-FFF2-40B4-BE49-F238E27FC236}">
-                <a16:creationId xmlns:a16="http://schemas.microsoft.com/office/drawing/2014/main" id="{F7C88897-D3F6-41E7-AF44-C7949EB6E12D}"/>
-              </a:ext>
-            </a:extLst>
-          </p:cNvPr>
-          <p:cNvSpPr txBox="1"/>
-          <p:nvPr/>
-        </p:nvSpPr>
-        <p:spPr>
-          <a:xfrm>
-            <a:off x="442241" y="2683156"/>
-            <a:ext cx="303288" cy="184666"/>
-          </a:xfrm>
-          <a:prstGeom prst="rect">
-            <a:avLst/>
-          </a:prstGeom>
-          <a:noFill/>
-        </p:spPr>
-        <p:txBody>
-          <a:bodyPr wrap="none" rtlCol="0">
-            <a:spAutoFit/>
-          </a:bodyPr>
-          <a:lstStyle/>
-          <a:p>
-            <a:r>
-              <a:rPr lang="en-US" altLang="ko-KR" sz="600" b="1" dirty="0">
-                <a:solidFill>
-                  <a:srgbClr val="FF0000"/>
-                </a:solidFill>
-                <a:latin typeface="나눔고딕" panose="020D0604000000000000" pitchFamily="50" charset="-127"/>
-                <a:ea typeface="나눔고딕" panose="020D0604000000000000" pitchFamily="50" charset="-127"/>
-              </a:rPr>
-              <a:t>NO</a:t>
-            </a:r>
-            <a:endParaRPr lang="ko-KR" altLang="en-US" sz="600" b="1" dirty="0">
-              <a:solidFill>
-                <a:srgbClr val="FF0000"/>
-              </a:solidFill>
-              <a:latin typeface="나눔고딕" panose="020D0604000000000000" pitchFamily="50" charset="-127"/>
-              <a:ea typeface="나눔고딕" panose="020D0604000000000000" pitchFamily="50" charset="-127"/>
-            </a:endParaRPr>
-          </a:p>
-        </p:txBody>
-      </p:sp>
-      <p:sp>
-        <p:nvSpPr>
-          <p:cNvPr id="83" name="TextBox 82">
-            <a:extLst>
-              <a:ext uri="{FF2B5EF4-FFF2-40B4-BE49-F238E27FC236}">
-                <a16:creationId xmlns:a16="http://schemas.microsoft.com/office/drawing/2014/main" id="{2CBA3C6A-B568-4923-98F4-C19EAC4292F8}"/>
-              </a:ext>
-            </a:extLst>
-          </p:cNvPr>
-          <p:cNvSpPr txBox="1"/>
-          <p:nvPr/>
-        </p:nvSpPr>
-        <p:spPr>
-          <a:xfrm>
-            <a:off x="1287157" y="4162802"/>
-            <a:ext cx="322524" cy="184666"/>
-          </a:xfrm>
-          <a:prstGeom prst="rect">
-            <a:avLst/>
-          </a:prstGeom>
-          <a:noFill/>
-        </p:spPr>
-        <p:txBody>
-          <a:bodyPr wrap="none" rtlCol="0">
-            <a:spAutoFit/>
-          </a:bodyPr>
-          <a:lstStyle/>
-          <a:p>
-            <a:r>
-              <a:rPr lang="en-US" altLang="ko-KR" sz="600" b="1" dirty="0">
-                <a:solidFill>
-                  <a:srgbClr val="0078D7"/>
-                </a:solidFill>
-                <a:latin typeface="나눔고딕" panose="020D0604000000000000" pitchFamily="50" charset="-127"/>
-                <a:ea typeface="나눔고딕" panose="020D0604000000000000" pitchFamily="50" charset="-127"/>
-              </a:rPr>
-              <a:t>YES</a:t>
-            </a:r>
-            <a:endParaRPr lang="ko-KR" altLang="en-US" sz="600" b="1" dirty="0">
-              <a:solidFill>
-                <a:srgbClr val="0078D7"/>
-              </a:solidFill>
-              <a:latin typeface="나눔고딕" panose="020D0604000000000000" pitchFamily="50" charset="-127"/>
-              <a:ea typeface="나눔고딕" panose="020D0604000000000000" pitchFamily="50" charset="-127"/>
-            </a:endParaRPr>
-          </a:p>
-        </p:txBody>
-      </p:sp>
-      <p:cxnSp>
-        <p:nvCxnSpPr>
-          <p:cNvPr id="84" name="직선 화살표 연결선 83">
-            <a:extLst>
-              <a:ext uri="{FF2B5EF4-FFF2-40B4-BE49-F238E27FC236}">
-                <a16:creationId xmlns:a16="http://schemas.microsoft.com/office/drawing/2014/main" id="{360231A5-AA22-49C6-B887-72E670AB7586}"/>
-              </a:ext>
-            </a:extLst>
-          </p:cNvPr>
-          <p:cNvCxnSpPr>
-            <a:cxnSpLocks/>
-          </p:cNvCxnSpPr>
-          <p:nvPr/>
-        </p:nvCxnSpPr>
-        <p:spPr>
-          <a:xfrm>
-            <a:off x="1242411" y="4177300"/>
-            <a:ext cx="2854" cy="159304"/>
-          </a:xfrm>
-          <a:prstGeom prst="straightConnector1">
-            <a:avLst/>
-          </a:prstGeom>
-          <a:ln>
-            <a:solidFill>
-              <a:srgbClr val="0078D7"/>
-            </a:solidFill>
-            <a:headEnd w="sm" len="sm"/>
-            <a:tailEnd type="arrow" w="sm" len="sm"/>
           </a:ln>
         </p:spPr>
         <p:style>
@@ -18126,7 +17443,7 @@
                 <a:latin typeface="나눔고딕" panose="020D0604000000000000" pitchFamily="50" charset="-127"/>
                 <a:ea typeface="나눔고딕" panose="020D0604000000000000" pitchFamily="50" charset="-127"/>
               </a:rPr>
-              <a:t>로그인 프로세스</a:t>
+              <a:t>장바구니 추가 프로세스</a:t>
             </a:r>
           </a:p>
         </p:txBody>
@@ -18190,7 +17507,7 @@
         </p:nvCxnSpPr>
         <p:spPr>
           <a:xfrm>
-            <a:off x="1242411" y="1163482"/>
+            <a:off x="2203023" y="1163482"/>
             <a:ext cx="2854" cy="159304"/>
           </a:xfrm>
           <a:prstGeom prst="straightConnector1">
@@ -18270,6 +17587,171 @@
           </a:fontRef>
         </p:style>
       </p:cxnSp>
+      <p:sp>
+        <p:nvSpPr>
+          <p:cNvPr id="60" name="직사각형 59">
+            <a:extLst>
+              <a:ext uri="{FF2B5EF4-FFF2-40B4-BE49-F238E27FC236}">
+                <a16:creationId xmlns:a16="http://schemas.microsoft.com/office/drawing/2014/main" id="{E93F3C58-8001-408C-AC06-DBCAA001A696}"/>
+              </a:ext>
+            </a:extLst>
+          </p:cNvPr>
+          <p:cNvSpPr/>
+          <p:nvPr/>
+        </p:nvSpPr>
+        <p:spPr>
+          <a:xfrm>
+            <a:off x="1627831" y="1942382"/>
+            <a:ext cx="1153237" cy="338554"/>
+          </a:xfrm>
+          <a:prstGeom prst="rect">
+            <a:avLst/>
+          </a:prstGeom>
+          <a:solidFill>
+            <a:schemeClr val="bg1"/>
+          </a:solidFill>
+          <a:ln w="3175">
+            <a:solidFill>
+              <a:schemeClr val="tx1">
+                <a:lumMod val="50000"/>
+                <a:lumOff val="50000"/>
+              </a:schemeClr>
+            </a:solidFill>
+          </a:ln>
+        </p:spPr>
+        <p:style>
+          <a:lnRef idx="2">
+            <a:schemeClr val="accent1">
+              <a:shade val="50000"/>
+            </a:schemeClr>
+          </a:lnRef>
+          <a:fillRef idx="1">
+            <a:schemeClr val="accent1"/>
+          </a:fillRef>
+          <a:effectRef idx="0">
+            <a:schemeClr val="accent1"/>
+          </a:effectRef>
+          <a:fontRef idx="minor">
+            <a:schemeClr val="lt1"/>
+          </a:fontRef>
+        </p:style>
+        <p:txBody>
+          <a:bodyPr wrap="none" lIns="0" tIns="0" rIns="0" bIns="0" rtlCol="0" anchor="ctr">
+            <a:normAutofit/>
+          </a:bodyPr>
+          <a:lstStyle/>
+          <a:p>
+            <a:pPr algn="ctr"/>
+            <a:r>
+              <a:rPr lang="ko-KR" altLang="en-US" sz="750" dirty="0">
+                <a:solidFill>
+                  <a:srgbClr val="000000"/>
+                </a:solidFill>
+                <a:latin typeface="나눔고딕" panose="020D0604000000000000" pitchFamily="50" charset="-127"/>
+                <a:ea typeface="나눔고딕" panose="020D0604000000000000" pitchFamily="50" charset="-127"/>
+                <a:cs typeface="Segoe UI" panose="020B0502040204020203" pitchFamily="34" charset="0"/>
+              </a:rPr>
+              <a:t>검색 결과 목록 노출</a:t>
+            </a:r>
+          </a:p>
+        </p:txBody>
+      </p:sp>
+      <p:cxnSp>
+        <p:nvCxnSpPr>
+          <p:cNvPr id="87" name="직선 화살표 연결선 86">
+            <a:extLst>
+              <a:ext uri="{FF2B5EF4-FFF2-40B4-BE49-F238E27FC236}">
+                <a16:creationId xmlns:a16="http://schemas.microsoft.com/office/drawing/2014/main" id="{8D4146B0-36E7-4B7A-8831-D1B418EB2CB4}"/>
+              </a:ext>
+            </a:extLst>
+          </p:cNvPr>
+          <p:cNvCxnSpPr>
+            <a:cxnSpLocks/>
+          </p:cNvCxnSpPr>
+          <p:nvPr/>
+        </p:nvCxnSpPr>
+        <p:spPr>
+          <a:xfrm>
+            <a:off x="2204449" y="2304169"/>
+            <a:ext cx="2854" cy="159304"/>
+          </a:xfrm>
+          <a:prstGeom prst="straightConnector1">
+            <a:avLst/>
+          </a:prstGeom>
+          <a:ln>
+            <a:solidFill>
+              <a:schemeClr val="tx1">
+                <a:lumMod val="75000"/>
+                <a:lumOff val="25000"/>
+              </a:schemeClr>
+            </a:solidFill>
+            <a:headEnd w="sm" len="sm"/>
+            <a:tailEnd type="arrow" w="sm" len="sm"/>
+          </a:ln>
+        </p:spPr>
+        <p:style>
+          <a:lnRef idx="1">
+            <a:schemeClr val="accent1"/>
+          </a:lnRef>
+          <a:fillRef idx="0">
+            <a:schemeClr val="accent1"/>
+          </a:fillRef>
+          <a:effectRef idx="0">
+            <a:schemeClr val="accent1"/>
+          </a:effectRef>
+          <a:fontRef idx="minor">
+            <a:schemeClr val="tx1"/>
+          </a:fontRef>
+        </p:style>
+      </p:cxnSp>
+      <p:sp>
+        <p:nvSpPr>
+          <p:cNvPr id="114" name="TextBox 113">
+            <a:extLst>
+              <a:ext uri="{FF2B5EF4-FFF2-40B4-BE49-F238E27FC236}">
+                <a16:creationId xmlns:a16="http://schemas.microsoft.com/office/drawing/2014/main" id="{53710725-5F51-4DE8-B4B8-15D2F9DE7525}"/>
+              </a:ext>
+            </a:extLst>
+          </p:cNvPr>
+          <p:cNvSpPr txBox="1"/>
+          <p:nvPr/>
+        </p:nvSpPr>
+        <p:spPr>
+          <a:xfrm>
+            <a:off x="2753072" y="2528818"/>
+            <a:ext cx="303288" cy="184666"/>
+          </a:xfrm>
+          <a:prstGeom prst="rect">
+            <a:avLst/>
+          </a:prstGeom>
+          <a:noFill/>
+        </p:spPr>
+        <p:txBody>
+          <a:bodyPr wrap="none" rtlCol="0">
+            <a:spAutoFit/>
+          </a:bodyPr>
+          <a:lstStyle/>
+          <a:p>
+            <a:r>
+              <a:rPr lang="en-US" altLang="ko-KR" sz="600" b="1" dirty="0">
+                <a:solidFill>
+                  <a:srgbClr val="FF0000"/>
+                </a:solidFill>
+                <a:latin typeface="나눔고딕" panose="020D0604000000000000" pitchFamily="50" charset="-127"/>
+                <a:ea typeface="나눔고딕" panose="020D0604000000000000" pitchFamily="50" charset="-127"/>
+              </a:rPr>
+              <a:t>NO</a:t>
+            </a:r>
+            <a:endParaRPr lang="ko-KR" altLang="en-US" sz="600" b="1" dirty="0">
+              <a:solidFill>
+                <a:srgbClr val="FF0000"/>
+              </a:solidFill>
+              <a:latin typeface="나눔고딕" panose="020D0604000000000000" pitchFamily="50" charset="-127"/>
+              <a:ea typeface="나눔고딕" panose="020D0604000000000000" pitchFamily="50" charset="-127"/>
+            </a:endParaRPr>
+          </a:p>
+        </p:txBody>
+      </p:sp>
     </p:spTree>
     <p:extLst>
       <p:ext uri="{BB962C8B-B14F-4D97-AF65-F5344CB8AC3E}">

--- a/0_wbs/도서검색웹_SB_2026_08_05.pptx
+++ b/0_wbs/도서검색웹_SB_2026_08_05.pptx
@@ -6,10 +6,10 @@
     <p:sldMasterId id="2147483673" r:id="rId2"/>
   </p:sldMasterIdLst>
   <p:notesMasterIdLst>
-    <p:notesMasterId r:id="rId9"/>
+    <p:notesMasterId r:id="rId10"/>
   </p:notesMasterIdLst>
   <p:handoutMasterIdLst>
-    <p:handoutMasterId r:id="rId10"/>
+    <p:handoutMasterId r:id="rId11"/>
   </p:handoutMasterIdLst>
   <p:sldIdLst>
     <p:sldId id="398" r:id="rId3"/>
@@ -17,7 +17,8 @@
     <p:sldId id="403" r:id="rId5"/>
     <p:sldId id="404" r:id="rId6"/>
     <p:sldId id="412" r:id="rId7"/>
-    <p:sldId id="406" r:id="rId8"/>
+    <p:sldId id="413" r:id="rId8"/>
+    <p:sldId id="406" r:id="rId9"/>
   </p:sldIdLst>
   <p:sldSz cx="9144000" cy="5715000" type="screen16x10"/>
   <p:notesSz cx="6735763" cy="9866313"/>
@@ -237,7 +238,7 @@
           <a:p>
             <a:fld id="{999972AA-FE3A-41E8-94D7-0A348C1614D1}" type="datetimeFigureOut">
               <a:rPr lang="ko-KR" altLang="en-US" smtClean="0"/>
-              <a:t>2026-08-06</a:t>
+              <a:t>2026-08-10</a:t>
             </a:fld>
             <a:endParaRPr lang="ko-KR" altLang="en-US"/>
           </a:p>
@@ -402,7 +403,7 @@
           <a:p>
             <a:fld id="{CB25E66B-2806-4CC0-B543-C1F698B8CB0C}" type="datetimeFigureOut">
               <a:rPr lang="ko-KR" altLang="en-US" smtClean="0"/>
-              <a:t>2026-08-06</a:t>
+              <a:t>2026-08-10</a:t>
             </a:fld>
             <a:endParaRPr lang="ko-KR" altLang="en-US"/>
           </a:p>
@@ -902,7 +903,7 @@
           <a:p>
             <a:fld id="{AC76DB6A-589F-43F9-84B6-ACD2F062FABB}" type="slidenum">
               <a:rPr lang="ko-KR" altLang="en-US" smtClean="0"/>
-              <a:t>6</a:t>
+              <a:t>7</a:t>
             </a:fld>
             <a:endParaRPr lang="ko-KR" altLang="en-US"/>
           </a:p>
@@ -24372,6 +24373,3853 @@
       </p:grpSpPr>
       <p:graphicFrame>
         <p:nvGraphicFramePr>
+          <p:cNvPr id="58" name="표 57"/>
+          <p:cNvGraphicFramePr>
+            <a:graphicFrameLocks noGrp="1"/>
+          </p:cNvGraphicFramePr>
+          <p:nvPr>
+            <p:extLst>
+              <p:ext uri="{D42A27DB-BD31-4B8C-83A1-F6EECF244321}">
+                <p14:modId xmlns:p14="http://schemas.microsoft.com/office/powerpoint/2010/main" val="2179690665"/>
+              </p:ext>
+            </p:extLst>
+          </p:nvPr>
+        </p:nvGraphicFramePr>
+        <p:xfrm>
+          <a:off x="6979021" y="0"/>
+          <a:ext cx="2164979" cy="2547022"/>
+        </p:xfrm>
+        <a:graphic>
+          <a:graphicData uri="http://schemas.openxmlformats.org/drawingml/2006/table">
+            <a:tbl>
+              <a:tblPr firstRow="1" bandRow="1">
+                <a:tableStyleId>{5C22544A-7EE6-4342-B048-85BDC9FD1C3A}</a:tableStyleId>
+              </a:tblPr>
+              <a:tblGrid>
+                <a:gridCol w="241973">
+                  <a:extLst>
+                    <a:ext uri="{9D8B030D-6E8A-4147-A177-3AD203B41FA5}">
+                      <a16:colId xmlns:a16="http://schemas.microsoft.com/office/drawing/2014/main" val="20000"/>
+                    </a:ext>
+                  </a:extLst>
+                </a:gridCol>
+                <a:gridCol w="1923006">
+                  <a:extLst>
+                    <a:ext uri="{9D8B030D-6E8A-4147-A177-3AD203B41FA5}">
+                      <a16:colId xmlns:a16="http://schemas.microsoft.com/office/drawing/2014/main" val="20001"/>
+                    </a:ext>
+                  </a:extLst>
+                </a:gridCol>
+              </a:tblGrid>
+              <a:tr h="193204">
+                <a:tc gridSpan="2">
+                  <a:txBody>
+                    <a:bodyPr/>
+                    <a:lstStyle/>
+                    <a:p>
+                      <a:pPr algn="ctr" latinLnBrk="1">
+                        <a:lnSpc>
+                          <a:spcPct val="150000"/>
+                        </a:lnSpc>
+                      </a:pPr>
+                      <a:r>
+                        <a:rPr lang="en-US" altLang="ko-KR" sz="600" b="0" dirty="0">
+                          <a:solidFill>
+                            <a:schemeClr val="tx1">
+                              <a:lumMod val="50000"/>
+                              <a:lumOff val="50000"/>
+                            </a:schemeClr>
+                          </a:solidFill>
+                          <a:latin typeface="나눔고딕" panose="020D0604000000000000" pitchFamily="50" charset="-127"/>
+                          <a:ea typeface="나눔고딕" panose="020D0604000000000000" pitchFamily="50" charset="-127"/>
+                        </a:rPr>
+                        <a:t>DEVELOP</a:t>
+                      </a:r>
+                      <a:r>
+                        <a:rPr lang="en-US" altLang="ko-KR" sz="600" b="0" baseline="0" dirty="0">
+                          <a:solidFill>
+                            <a:schemeClr val="tx1">
+                              <a:lumMod val="50000"/>
+                              <a:lumOff val="50000"/>
+                            </a:schemeClr>
+                          </a:solidFill>
+                          <a:latin typeface="나눔고딕" panose="020D0604000000000000" pitchFamily="50" charset="-127"/>
+                          <a:ea typeface="나눔고딕" panose="020D0604000000000000" pitchFamily="50" charset="-127"/>
+                        </a:rPr>
+                        <a:t> Description</a:t>
+                      </a:r>
+                      <a:endParaRPr lang="ko-KR" altLang="en-US" sz="600" b="0" dirty="0">
+                        <a:solidFill>
+                          <a:schemeClr val="tx1">
+                            <a:lumMod val="50000"/>
+                            <a:lumOff val="50000"/>
+                          </a:schemeClr>
+                        </a:solidFill>
+                        <a:latin typeface="나눔고딕" panose="020D0604000000000000" pitchFamily="50" charset="-127"/>
+                        <a:ea typeface="나눔고딕" panose="020D0604000000000000" pitchFamily="50" charset="-127"/>
+                      </a:endParaRPr>
+                    </a:p>
+                  </a:txBody>
+                  <a:tcPr marT="0" marB="0" anchor="ctr">
+                    <a:lnL w="3175" cap="flat" cmpd="sng" algn="ctr">
+                      <a:noFill/>
+                      <a:prstDash val="solid"/>
+                      <a:round/>
+                      <a:headEnd type="none" w="med" len="med"/>
+                      <a:tailEnd type="none" w="med" len="med"/>
+                    </a:lnL>
+                    <a:lnR w="3175" cap="flat" cmpd="sng" algn="ctr">
+                      <a:noFill/>
+                      <a:prstDash val="solid"/>
+                      <a:round/>
+                      <a:headEnd type="none" w="med" len="med"/>
+                      <a:tailEnd type="none" w="med" len="med"/>
+                    </a:lnR>
+                    <a:lnT w="3175" cap="flat" cmpd="sng" algn="ctr">
+                      <a:noFill/>
+                      <a:prstDash val="solid"/>
+                      <a:round/>
+                      <a:headEnd type="none" w="med" len="med"/>
+                      <a:tailEnd type="none" w="med" len="med"/>
+                    </a:lnT>
+                    <a:lnB w="3175" cap="flat" cmpd="sng" algn="ctr">
+                      <a:solidFill>
+                        <a:schemeClr val="bg1">
+                          <a:lumMod val="75000"/>
+                        </a:schemeClr>
+                      </a:solidFill>
+                      <a:prstDash val="solid"/>
+                      <a:round/>
+                      <a:headEnd type="none" w="med" len="med"/>
+                      <a:tailEnd type="none" w="med" len="med"/>
+                    </a:lnB>
+                    <a:lnTlToBr w="12700" cmpd="sng">
+                      <a:noFill/>
+                      <a:prstDash val="solid"/>
+                    </a:lnTlToBr>
+                    <a:lnBlToTr w="12700" cmpd="sng">
+                      <a:noFill/>
+                      <a:prstDash val="solid"/>
+                    </a:lnBlToTr>
+                    <a:solidFill>
+                      <a:schemeClr val="bg1">
+                        <a:lumMod val="95000"/>
+                      </a:schemeClr>
+                    </a:solidFill>
+                  </a:tcPr>
+                </a:tc>
+                <a:tc hMerge="1">
+                  <a:txBody>
+                    <a:bodyPr/>
+                    <a:lstStyle/>
+                    <a:p>
+                      <a:pPr latinLnBrk="1">
+                        <a:lnSpc>
+                          <a:spcPct val="150000"/>
+                        </a:lnSpc>
+                      </a:pPr>
+                      <a:endParaRPr lang="ko-KR" altLang="en-US" sz="700" b="0" dirty="0">
+                        <a:solidFill>
+                          <a:schemeClr val="tx1">
+                            <a:lumMod val="50000"/>
+                            <a:lumOff val="50000"/>
+                          </a:schemeClr>
+                        </a:solidFill>
+                        <a:latin typeface="나눔고딕" panose="020D0604000000000000" pitchFamily="50" charset="-127"/>
+                        <a:ea typeface="나눔고딕" panose="020D0604000000000000" pitchFamily="50" charset="-127"/>
+                      </a:endParaRPr>
+                    </a:p>
+                  </a:txBody>
+                  <a:tcPr anchor="ctr">
+                    <a:lnL w="3175" cap="flat" cmpd="sng" algn="ctr">
+                      <a:solidFill>
+                        <a:schemeClr val="bg1">
+                          <a:lumMod val="50000"/>
+                        </a:schemeClr>
+                      </a:solidFill>
+                      <a:prstDash val="solid"/>
+                      <a:round/>
+                      <a:headEnd type="none" w="med" len="med"/>
+                      <a:tailEnd type="none" w="med" len="med"/>
+                    </a:lnL>
+                    <a:lnR w="3175" cap="flat" cmpd="sng" algn="ctr">
+                      <a:solidFill>
+                        <a:schemeClr val="bg1">
+                          <a:lumMod val="50000"/>
+                        </a:schemeClr>
+                      </a:solidFill>
+                      <a:prstDash val="solid"/>
+                      <a:round/>
+                      <a:headEnd type="none" w="med" len="med"/>
+                      <a:tailEnd type="none" w="med" len="med"/>
+                    </a:lnR>
+                    <a:lnT w="3175" cap="flat" cmpd="sng" algn="ctr">
+                      <a:solidFill>
+                        <a:schemeClr val="bg1">
+                          <a:lumMod val="50000"/>
+                        </a:schemeClr>
+                      </a:solidFill>
+                      <a:prstDash val="solid"/>
+                      <a:round/>
+                      <a:headEnd type="none" w="med" len="med"/>
+                      <a:tailEnd type="none" w="med" len="med"/>
+                    </a:lnT>
+                    <a:lnB w="3175" cap="flat" cmpd="sng" algn="ctr">
+                      <a:solidFill>
+                        <a:schemeClr val="bg1">
+                          <a:lumMod val="50000"/>
+                        </a:schemeClr>
+                      </a:solidFill>
+                      <a:prstDash val="solid"/>
+                      <a:round/>
+                      <a:headEnd type="none" w="med" len="med"/>
+                      <a:tailEnd type="none" w="med" len="med"/>
+                    </a:lnB>
+                    <a:lnTlToBr w="12700" cmpd="sng">
+                      <a:noFill/>
+                      <a:prstDash val="solid"/>
+                    </a:lnTlToBr>
+                    <a:lnBlToTr w="12700" cmpd="sng">
+                      <a:noFill/>
+                      <a:prstDash val="solid"/>
+                    </a:lnBlToTr>
+                    <a:solidFill>
+                      <a:srgbClr val="C7A1E3"/>
+                    </a:solidFill>
+                  </a:tcPr>
+                </a:tc>
+                <a:extLst>
+                  <a:ext uri="{0D108BD9-81ED-4DB2-BD59-A6C34878D82A}">
+                    <a16:rowId xmlns:a16="http://schemas.microsoft.com/office/drawing/2014/main" val="10000"/>
+                  </a:ext>
+                </a:extLst>
+              </a:tr>
+              <a:tr h="391795">
+                <a:tc>
+                  <a:txBody>
+                    <a:bodyPr/>
+                    <a:lstStyle/>
+                    <a:p>
+                      <a:pPr algn="ctr" latinLnBrk="1">
+                        <a:lnSpc>
+                          <a:spcPct val="150000"/>
+                        </a:lnSpc>
+                      </a:pPr>
+                      <a:r>
+                        <a:rPr lang="en-US" altLang="ko-KR" sz="700" b="0" dirty="0">
+                          <a:solidFill>
+                            <a:schemeClr val="tx1">
+                              <a:lumMod val="50000"/>
+                              <a:lumOff val="50000"/>
+                            </a:schemeClr>
+                          </a:solidFill>
+                          <a:latin typeface="나눔고딕" panose="020D0604000000000000" pitchFamily="50" charset="-127"/>
+                          <a:ea typeface="나눔고딕" panose="020D0604000000000000" pitchFamily="50" charset="-127"/>
+                        </a:rPr>
+                        <a:t>1</a:t>
+                      </a:r>
+                      <a:endParaRPr lang="ko-KR" altLang="en-US" sz="700" b="0" dirty="0">
+                        <a:solidFill>
+                          <a:schemeClr val="tx1">
+                            <a:lumMod val="50000"/>
+                            <a:lumOff val="50000"/>
+                          </a:schemeClr>
+                        </a:solidFill>
+                        <a:latin typeface="나눔고딕" panose="020D0604000000000000" pitchFamily="50" charset="-127"/>
+                        <a:ea typeface="나눔고딕" panose="020D0604000000000000" pitchFamily="50" charset="-127"/>
+                      </a:endParaRPr>
+                    </a:p>
+                  </a:txBody>
+                  <a:tcPr anchor="ctr">
+                    <a:lnL w="3175" cap="flat" cmpd="sng" algn="ctr">
+                      <a:noFill/>
+                      <a:prstDash val="solid"/>
+                      <a:round/>
+                      <a:headEnd type="none" w="med" len="med"/>
+                      <a:tailEnd type="none" w="med" len="med"/>
+                    </a:lnL>
+                    <a:lnR w="3175" cap="flat" cmpd="sng" algn="ctr">
+                      <a:solidFill>
+                        <a:schemeClr val="bg1">
+                          <a:lumMod val="75000"/>
+                        </a:schemeClr>
+                      </a:solidFill>
+                      <a:prstDash val="solid"/>
+                      <a:round/>
+                      <a:headEnd type="none" w="med" len="med"/>
+                      <a:tailEnd type="none" w="med" len="med"/>
+                    </a:lnR>
+                    <a:lnT w="3175" cap="flat" cmpd="sng" algn="ctr">
+                      <a:solidFill>
+                        <a:schemeClr val="bg1">
+                          <a:lumMod val="75000"/>
+                        </a:schemeClr>
+                      </a:solidFill>
+                      <a:prstDash val="solid"/>
+                      <a:round/>
+                      <a:headEnd type="none" w="med" len="med"/>
+                      <a:tailEnd type="none" w="med" len="med"/>
+                    </a:lnT>
+                    <a:lnB w="3175" cap="flat" cmpd="sng" algn="ctr">
+                      <a:solidFill>
+                        <a:schemeClr val="bg1">
+                          <a:lumMod val="75000"/>
+                        </a:schemeClr>
+                      </a:solidFill>
+                      <a:prstDash val="solid"/>
+                      <a:round/>
+                      <a:headEnd type="none" w="med" len="med"/>
+                      <a:tailEnd type="none" w="med" len="med"/>
+                    </a:lnB>
+                    <a:lnTlToBr w="12700" cmpd="sng">
+                      <a:noFill/>
+                      <a:prstDash val="solid"/>
+                    </a:lnTlToBr>
+                    <a:lnBlToTr w="12700" cmpd="sng">
+                      <a:noFill/>
+                      <a:prstDash val="solid"/>
+                    </a:lnBlToTr>
+                    <a:noFill/>
+                  </a:tcPr>
+                </a:tc>
+                <a:tc>
+                  <a:txBody>
+                    <a:bodyPr/>
+                    <a:lstStyle/>
+                    <a:p>
+                      <a:pPr marL="0" indent="0">
+                        <a:lnSpc>
+                          <a:spcPct val="150000"/>
+                        </a:lnSpc>
+                        <a:buClr>
+                          <a:srgbClr val="FF0000"/>
+                        </a:buClr>
+                        <a:buFont typeface="+mj-ea"/>
+                        <a:buNone/>
+                      </a:pPr>
+                      <a:r>
+                        <a:rPr lang="ko-KR" altLang="en-US" sz="700" dirty="0" err="1">
+                          <a:solidFill>
+                            <a:schemeClr val="tx1">
+                              <a:lumMod val="50000"/>
+                              <a:lumOff val="50000"/>
+                            </a:schemeClr>
+                          </a:solidFill>
+                          <a:latin typeface="나눔고딕" panose="020D0604000000000000" pitchFamily="50" charset="-127"/>
+                          <a:ea typeface="나눔고딕" panose="020D0604000000000000" pitchFamily="50" charset="-127"/>
+                          <a:sym typeface="Wingdings" panose="05000000000000000000" pitchFamily="2" charset="2"/>
+                        </a:rPr>
+                        <a:t>토글</a:t>
+                      </a:r>
+                      <a:r>
+                        <a:rPr lang="ko-KR" altLang="en-US" sz="700" dirty="0">
+                          <a:solidFill>
+                            <a:schemeClr val="tx1">
+                              <a:lumMod val="50000"/>
+                              <a:lumOff val="50000"/>
+                            </a:schemeClr>
+                          </a:solidFill>
+                          <a:latin typeface="나눔고딕" panose="020D0604000000000000" pitchFamily="50" charset="-127"/>
+                          <a:ea typeface="나눔고딕" panose="020D0604000000000000" pitchFamily="50" charset="-127"/>
+                          <a:sym typeface="Wingdings" panose="05000000000000000000" pitchFamily="2" charset="2"/>
+                        </a:rPr>
+                        <a:t> 메뉴 </a:t>
+                      </a:r>
+                      <a:r>
+                        <a:rPr lang="ko-KR" altLang="en-US" sz="700" dirty="0" err="1">
+                          <a:solidFill>
+                            <a:schemeClr val="tx1">
+                              <a:lumMod val="50000"/>
+                              <a:lumOff val="50000"/>
+                            </a:schemeClr>
+                          </a:solidFill>
+                          <a:latin typeface="나눔고딕" panose="020D0604000000000000" pitchFamily="50" charset="-127"/>
+                          <a:ea typeface="나눔고딕" panose="020D0604000000000000" pitchFamily="50" charset="-127"/>
+                          <a:sym typeface="Wingdings" panose="05000000000000000000" pitchFamily="2" charset="2"/>
+                        </a:rPr>
+                        <a:t>클릭시</a:t>
+                      </a:r>
+                      <a:r>
+                        <a:rPr lang="ko-KR" altLang="en-US" sz="700" dirty="0">
+                          <a:solidFill>
+                            <a:schemeClr val="tx1">
+                              <a:lumMod val="50000"/>
+                              <a:lumOff val="50000"/>
+                            </a:schemeClr>
+                          </a:solidFill>
+                          <a:latin typeface="나눔고딕" panose="020D0604000000000000" pitchFamily="50" charset="-127"/>
+                          <a:ea typeface="나눔고딕" panose="020D0604000000000000" pitchFamily="50" charset="-127"/>
+                          <a:sym typeface="Wingdings" panose="05000000000000000000" pitchFamily="2" charset="2"/>
+                        </a:rPr>
+                        <a:t> 슬라이드 로딩으로</a:t>
+                      </a:r>
+                      <a:br>
+                        <a:rPr lang="en-US" altLang="ko-KR" sz="700" dirty="0">
+                          <a:solidFill>
+                            <a:schemeClr val="tx1">
+                              <a:lumMod val="50000"/>
+                              <a:lumOff val="50000"/>
+                            </a:schemeClr>
+                          </a:solidFill>
+                          <a:latin typeface="나눔고딕" panose="020D0604000000000000" pitchFamily="50" charset="-127"/>
+                          <a:ea typeface="나눔고딕" panose="020D0604000000000000" pitchFamily="50" charset="-127"/>
+                          <a:sym typeface="Wingdings" panose="05000000000000000000" pitchFamily="2" charset="2"/>
+                        </a:rPr>
+                      </a:br>
+                      <a:r>
+                        <a:rPr lang="ko-KR" altLang="en-US" sz="700" dirty="0" err="1">
+                          <a:solidFill>
+                            <a:schemeClr val="tx1">
+                              <a:lumMod val="50000"/>
+                              <a:lumOff val="50000"/>
+                            </a:schemeClr>
+                          </a:solidFill>
+                          <a:latin typeface="나눔고딕" panose="020D0604000000000000" pitchFamily="50" charset="-127"/>
+                          <a:ea typeface="나눔고딕" panose="020D0604000000000000" pitchFamily="50" charset="-127"/>
+                          <a:sym typeface="Wingdings" panose="05000000000000000000" pitchFamily="2" charset="2"/>
+                        </a:rPr>
+                        <a:t>서븐메뉴가</a:t>
+                      </a:r>
+                      <a:r>
+                        <a:rPr lang="ko-KR" altLang="en-US" sz="700" dirty="0">
+                          <a:solidFill>
+                            <a:schemeClr val="tx1">
+                              <a:lumMod val="50000"/>
+                              <a:lumOff val="50000"/>
+                            </a:schemeClr>
+                          </a:solidFill>
+                          <a:latin typeface="나눔고딕" panose="020D0604000000000000" pitchFamily="50" charset="-127"/>
+                          <a:ea typeface="나눔고딕" panose="020D0604000000000000" pitchFamily="50" charset="-127"/>
+                          <a:sym typeface="Wingdings" panose="05000000000000000000" pitchFamily="2" charset="2"/>
+                        </a:rPr>
+                        <a:t> 나온다</a:t>
+                      </a:r>
+                      <a:endParaRPr lang="en-US" altLang="ko-KR" sz="700" dirty="0">
+                        <a:solidFill>
+                          <a:schemeClr val="tx1">
+                            <a:lumMod val="50000"/>
+                            <a:lumOff val="50000"/>
+                          </a:schemeClr>
+                        </a:solidFill>
+                        <a:latin typeface="나눔고딕" panose="020D0604000000000000" pitchFamily="50" charset="-127"/>
+                        <a:ea typeface="나눔고딕" panose="020D0604000000000000" pitchFamily="50" charset="-127"/>
+                        <a:sym typeface="Wingdings" panose="05000000000000000000" pitchFamily="2" charset="2"/>
+                      </a:endParaRPr>
+                    </a:p>
+                  </a:txBody>
+                  <a:tcPr anchor="ctr">
+                    <a:lnL w="3175" cap="flat" cmpd="sng" algn="ctr">
+                      <a:solidFill>
+                        <a:schemeClr val="bg1">
+                          <a:lumMod val="75000"/>
+                        </a:schemeClr>
+                      </a:solidFill>
+                      <a:prstDash val="solid"/>
+                      <a:round/>
+                      <a:headEnd type="none" w="med" len="med"/>
+                      <a:tailEnd type="none" w="med" len="med"/>
+                    </a:lnL>
+                    <a:lnR w="3175" cap="flat" cmpd="sng" algn="ctr">
+                      <a:noFill/>
+                      <a:prstDash val="solid"/>
+                      <a:round/>
+                      <a:headEnd type="none" w="med" len="med"/>
+                      <a:tailEnd type="none" w="med" len="med"/>
+                    </a:lnR>
+                    <a:lnT w="3175" cap="flat" cmpd="sng" algn="ctr">
+                      <a:solidFill>
+                        <a:schemeClr val="bg1">
+                          <a:lumMod val="75000"/>
+                        </a:schemeClr>
+                      </a:solidFill>
+                      <a:prstDash val="solid"/>
+                      <a:round/>
+                      <a:headEnd type="none" w="med" len="med"/>
+                      <a:tailEnd type="none" w="med" len="med"/>
+                    </a:lnT>
+                    <a:lnB w="3175" cap="flat" cmpd="sng" algn="ctr">
+                      <a:solidFill>
+                        <a:schemeClr val="bg1">
+                          <a:lumMod val="75000"/>
+                        </a:schemeClr>
+                      </a:solidFill>
+                      <a:prstDash val="solid"/>
+                      <a:round/>
+                      <a:headEnd type="none" w="med" len="med"/>
+                      <a:tailEnd type="none" w="med" len="med"/>
+                    </a:lnB>
+                    <a:lnTlToBr w="12700" cmpd="sng">
+                      <a:noFill/>
+                      <a:prstDash val="solid"/>
+                    </a:lnTlToBr>
+                    <a:lnBlToTr w="12700" cmpd="sng">
+                      <a:noFill/>
+                      <a:prstDash val="solid"/>
+                    </a:lnBlToTr>
+                    <a:noFill/>
+                  </a:tcPr>
+                </a:tc>
+                <a:extLst>
+                  <a:ext uri="{0D108BD9-81ED-4DB2-BD59-A6C34878D82A}">
+                    <a16:rowId xmlns:a16="http://schemas.microsoft.com/office/drawing/2014/main" val="10001"/>
+                  </a:ext>
+                </a:extLst>
+              </a:tr>
+              <a:tr h="391795">
+                <a:tc>
+                  <a:txBody>
+                    <a:bodyPr/>
+                    <a:lstStyle/>
+                    <a:p>
+                      <a:pPr algn="ctr" latinLnBrk="1">
+                        <a:lnSpc>
+                          <a:spcPct val="150000"/>
+                        </a:lnSpc>
+                      </a:pPr>
+                      <a:r>
+                        <a:rPr lang="en-US" altLang="ko-KR" sz="700" b="0" dirty="0">
+                          <a:solidFill>
+                            <a:schemeClr val="tx1">
+                              <a:lumMod val="50000"/>
+                              <a:lumOff val="50000"/>
+                            </a:schemeClr>
+                          </a:solidFill>
+                          <a:latin typeface="나눔고딕" panose="020D0604000000000000" pitchFamily="50" charset="-127"/>
+                          <a:ea typeface="나눔고딕" panose="020D0604000000000000" pitchFamily="50" charset="-127"/>
+                        </a:rPr>
+                        <a:t>2</a:t>
+                      </a:r>
+                      <a:endParaRPr lang="ko-KR" altLang="en-US" sz="700" b="0" dirty="0">
+                        <a:solidFill>
+                          <a:schemeClr val="tx1">
+                            <a:lumMod val="50000"/>
+                            <a:lumOff val="50000"/>
+                          </a:schemeClr>
+                        </a:solidFill>
+                        <a:latin typeface="나눔고딕" panose="020D0604000000000000" pitchFamily="50" charset="-127"/>
+                        <a:ea typeface="나눔고딕" panose="020D0604000000000000" pitchFamily="50" charset="-127"/>
+                      </a:endParaRPr>
+                    </a:p>
+                  </a:txBody>
+                  <a:tcPr anchor="ctr">
+                    <a:lnL w="3175" cap="flat" cmpd="sng" algn="ctr">
+                      <a:noFill/>
+                      <a:prstDash val="solid"/>
+                      <a:round/>
+                      <a:headEnd type="none" w="med" len="med"/>
+                      <a:tailEnd type="none" w="med" len="med"/>
+                    </a:lnL>
+                    <a:lnR w="3175" cap="flat" cmpd="sng" algn="ctr">
+                      <a:solidFill>
+                        <a:schemeClr val="bg1">
+                          <a:lumMod val="75000"/>
+                        </a:schemeClr>
+                      </a:solidFill>
+                      <a:prstDash val="solid"/>
+                      <a:round/>
+                      <a:headEnd type="none" w="med" len="med"/>
+                      <a:tailEnd type="none" w="med" len="med"/>
+                    </a:lnR>
+                    <a:lnT w="3175" cap="flat" cmpd="sng" algn="ctr">
+                      <a:solidFill>
+                        <a:schemeClr val="bg1">
+                          <a:lumMod val="75000"/>
+                        </a:schemeClr>
+                      </a:solidFill>
+                      <a:prstDash val="solid"/>
+                      <a:round/>
+                      <a:headEnd type="none" w="med" len="med"/>
+                      <a:tailEnd type="none" w="med" len="med"/>
+                    </a:lnT>
+                    <a:lnB w="3175" cap="flat" cmpd="sng" algn="ctr">
+                      <a:solidFill>
+                        <a:schemeClr val="bg1">
+                          <a:lumMod val="75000"/>
+                        </a:schemeClr>
+                      </a:solidFill>
+                      <a:prstDash val="solid"/>
+                      <a:round/>
+                      <a:headEnd type="none" w="med" len="med"/>
+                      <a:tailEnd type="none" w="med" len="med"/>
+                    </a:lnB>
+                    <a:lnTlToBr w="12700" cmpd="sng">
+                      <a:noFill/>
+                      <a:prstDash val="solid"/>
+                    </a:lnTlToBr>
+                    <a:lnBlToTr w="12700" cmpd="sng">
+                      <a:noFill/>
+                      <a:prstDash val="solid"/>
+                    </a:lnBlToTr>
+                    <a:noFill/>
+                  </a:tcPr>
+                </a:tc>
+                <a:tc>
+                  <a:txBody>
+                    <a:bodyPr/>
+                    <a:lstStyle/>
+                    <a:p>
+                      <a:pPr latinLnBrk="1">
+                        <a:lnSpc>
+                          <a:spcPct val="150000"/>
+                        </a:lnSpc>
+                      </a:pPr>
+                      <a:r>
+                        <a:rPr lang="en-US" altLang="ko-KR" sz="700" dirty="0">
+                          <a:solidFill>
+                            <a:schemeClr val="tx1">
+                              <a:lumMod val="50000"/>
+                              <a:lumOff val="50000"/>
+                            </a:schemeClr>
+                          </a:solidFill>
+                          <a:latin typeface="나눔고딕" panose="020D0604000000000000" pitchFamily="50" charset="-127"/>
+                          <a:ea typeface="나눔고딕" panose="020D0604000000000000" pitchFamily="50" charset="-127"/>
+                        </a:rPr>
+                        <a:t> </a:t>
+                      </a:r>
+                      <a:r>
+                        <a:rPr lang="ko-KR" altLang="en-US" sz="700" dirty="0" err="1">
+                          <a:solidFill>
+                            <a:schemeClr val="tx1">
+                              <a:lumMod val="50000"/>
+                              <a:lumOff val="50000"/>
+                            </a:schemeClr>
+                          </a:solidFill>
+                          <a:latin typeface="나눔고딕" panose="020D0604000000000000" pitchFamily="50" charset="-127"/>
+                          <a:ea typeface="나눔고딕" panose="020D0604000000000000" pitchFamily="50" charset="-127"/>
+                        </a:rPr>
+                        <a:t>캐러셀</a:t>
+                      </a:r>
+                      <a:r>
+                        <a:rPr lang="ko-KR" altLang="en-US" sz="700" dirty="0">
+                          <a:solidFill>
+                            <a:schemeClr val="tx1">
+                              <a:lumMod val="50000"/>
+                              <a:lumOff val="50000"/>
+                            </a:schemeClr>
+                          </a:solidFill>
+                          <a:latin typeface="나눔고딕" panose="020D0604000000000000" pitchFamily="50" charset="-127"/>
+                          <a:ea typeface="나눔고딕" panose="020D0604000000000000" pitchFamily="50" charset="-127"/>
+                        </a:rPr>
+                        <a:t> 이미지</a:t>
+                      </a:r>
+                      <a:endParaRPr lang="en-US" altLang="ko-KR" sz="700" dirty="0">
+                        <a:solidFill>
+                          <a:schemeClr val="tx1">
+                            <a:lumMod val="50000"/>
+                            <a:lumOff val="50000"/>
+                          </a:schemeClr>
+                        </a:solidFill>
+                        <a:latin typeface="나눔고딕" panose="020D0604000000000000" pitchFamily="50" charset="-127"/>
+                        <a:ea typeface="나눔고딕" panose="020D0604000000000000" pitchFamily="50" charset="-127"/>
+                      </a:endParaRPr>
+                    </a:p>
+                    <a:p>
+                      <a:pPr latinLnBrk="1">
+                        <a:lnSpc>
+                          <a:spcPct val="150000"/>
+                        </a:lnSpc>
+                      </a:pPr>
+                      <a:r>
+                        <a:rPr lang="ko-KR" altLang="en-US" sz="700" dirty="0" err="1">
+                          <a:solidFill>
+                            <a:schemeClr val="tx1">
+                              <a:lumMod val="50000"/>
+                              <a:lumOff val="50000"/>
+                            </a:schemeClr>
+                          </a:solidFill>
+                          <a:latin typeface="나눔고딕" panose="020D0604000000000000" pitchFamily="50" charset="-127"/>
+                          <a:ea typeface="나눔고딕" panose="020D0604000000000000" pitchFamily="50" charset="-127"/>
+                        </a:rPr>
+                        <a:t>몇모마다</a:t>
+                      </a:r>
+                      <a:r>
+                        <a:rPr lang="ko-KR" altLang="en-US" sz="700" dirty="0">
+                          <a:solidFill>
+                            <a:schemeClr val="tx1">
+                              <a:lumMod val="50000"/>
+                              <a:lumOff val="50000"/>
+                            </a:schemeClr>
+                          </a:solidFill>
+                          <a:latin typeface="나눔고딕" panose="020D0604000000000000" pitchFamily="50" charset="-127"/>
+                          <a:ea typeface="나눔고딕" panose="020D0604000000000000" pitchFamily="50" charset="-127"/>
+                        </a:rPr>
+                        <a:t> 한번씩 돌아간다</a:t>
+                      </a:r>
+                    </a:p>
+                  </a:txBody>
+                  <a:tcPr anchor="ctr">
+                    <a:lnL w="3175" cap="flat" cmpd="sng" algn="ctr">
+                      <a:solidFill>
+                        <a:schemeClr val="bg1">
+                          <a:lumMod val="75000"/>
+                        </a:schemeClr>
+                      </a:solidFill>
+                      <a:prstDash val="solid"/>
+                      <a:round/>
+                      <a:headEnd type="none" w="med" len="med"/>
+                      <a:tailEnd type="none" w="med" len="med"/>
+                    </a:lnL>
+                    <a:lnR w="3175" cap="flat" cmpd="sng" algn="ctr">
+                      <a:noFill/>
+                      <a:prstDash val="solid"/>
+                      <a:round/>
+                      <a:headEnd type="none" w="med" len="med"/>
+                      <a:tailEnd type="none" w="med" len="med"/>
+                    </a:lnR>
+                    <a:lnT w="3175" cap="flat" cmpd="sng" algn="ctr">
+                      <a:solidFill>
+                        <a:schemeClr val="bg1">
+                          <a:lumMod val="75000"/>
+                        </a:schemeClr>
+                      </a:solidFill>
+                      <a:prstDash val="solid"/>
+                      <a:round/>
+                      <a:headEnd type="none" w="med" len="med"/>
+                      <a:tailEnd type="none" w="med" len="med"/>
+                    </a:lnT>
+                    <a:lnB w="3175" cap="flat" cmpd="sng" algn="ctr">
+                      <a:solidFill>
+                        <a:schemeClr val="bg1">
+                          <a:lumMod val="75000"/>
+                        </a:schemeClr>
+                      </a:solidFill>
+                      <a:prstDash val="solid"/>
+                      <a:round/>
+                      <a:headEnd type="none" w="med" len="med"/>
+                      <a:tailEnd type="none" w="med" len="med"/>
+                    </a:lnB>
+                    <a:lnTlToBr w="12700" cmpd="sng">
+                      <a:noFill/>
+                      <a:prstDash val="solid"/>
+                    </a:lnTlToBr>
+                    <a:lnBlToTr w="12700" cmpd="sng">
+                      <a:noFill/>
+                      <a:prstDash val="solid"/>
+                    </a:lnBlToTr>
+                    <a:noFill/>
+                  </a:tcPr>
+                </a:tc>
+                <a:extLst>
+                  <a:ext uri="{0D108BD9-81ED-4DB2-BD59-A6C34878D82A}">
+                    <a16:rowId xmlns:a16="http://schemas.microsoft.com/office/drawing/2014/main" val="10002"/>
+                  </a:ext>
+                </a:extLst>
+              </a:tr>
+              <a:tr h="391795">
+                <a:tc>
+                  <a:txBody>
+                    <a:bodyPr/>
+                    <a:lstStyle/>
+                    <a:p>
+                      <a:pPr algn="ctr" latinLnBrk="1">
+                        <a:lnSpc>
+                          <a:spcPct val="150000"/>
+                        </a:lnSpc>
+                      </a:pPr>
+                      <a:r>
+                        <a:rPr lang="en-US" altLang="ko-KR" sz="700" b="0" dirty="0">
+                          <a:solidFill>
+                            <a:schemeClr val="tx1">
+                              <a:lumMod val="50000"/>
+                              <a:lumOff val="50000"/>
+                            </a:schemeClr>
+                          </a:solidFill>
+                          <a:latin typeface="나눔고딕" panose="020D0604000000000000" pitchFamily="50" charset="-127"/>
+                          <a:ea typeface="나눔고딕" panose="020D0604000000000000" pitchFamily="50" charset="-127"/>
+                        </a:rPr>
+                        <a:t>3</a:t>
+                      </a:r>
+                      <a:endParaRPr lang="ko-KR" altLang="en-US" sz="700" b="0" dirty="0">
+                        <a:solidFill>
+                          <a:schemeClr val="tx1">
+                            <a:lumMod val="50000"/>
+                            <a:lumOff val="50000"/>
+                          </a:schemeClr>
+                        </a:solidFill>
+                        <a:latin typeface="나눔고딕" panose="020D0604000000000000" pitchFamily="50" charset="-127"/>
+                        <a:ea typeface="나눔고딕" panose="020D0604000000000000" pitchFamily="50" charset="-127"/>
+                      </a:endParaRPr>
+                    </a:p>
+                  </a:txBody>
+                  <a:tcPr anchor="ctr">
+                    <a:lnL w="3175" cap="flat" cmpd="sng" algn="ctr">
+                      <a:noFill/>
+                      <a:prstDash val="solid"/>
+                      <a:round/>
+                      <a:headEnd type="none" w="med" len="med"/>
+                      <a:tailEnd type="none" w="med" len="med"/>
+                    </a:lnL>
+                    <a:lnR w="3175" cap="flat" cmpd="sng" algn="ctr">
+                      <a:solidFill>
+                        <a:schemeClr val="bg1">
+                          <a:lumMod val="75000"/>
+                        </a:schemeClr>
+                      </a:solidFill>
+                      <a:prstDash val="solid"/>
+                      <a:round/>
+                      <a:headEnd type="none" w="med" len="med"/>
+                      <a:tailEnd type="none" w="med" len="med"/>
+                    </a:lnR>
+                    <a:lnT w="3175" cap="flat" cmpd="sng" algn="ctr">
+                      <a:solidFill>
+                        <a:schemeClr val="bg1">
+                          <a:lumMod val="75000"/>
+                        </a:schemeClr>
+                      </a:solidFill>
+                      <a:prstDash val="solid"/>
+                      <a:round/>
+                      <a:headEnd type="none" w="med" len="med"/>
+                      <a:tailEnd type="none" w="med" len="med"/>
+                    </a:lnT>
+                    <a:lnB w="3175" cap="flat" cmpd="sng" algn="ctr">
+                      <a:solidFill>
+                        <a:schemeClr val="bg1">
+                          <a:lumMod val="75000"/>
+                        </a:schemeClr>
+                      </a:solidFill>
+                      <a:prstDash val="solid"/>
+                      <a:round/>
+                      <a:headEnd type="none" w="med" len="med"/>
+                      <a:tailEnd type="none" w="med" len="med"/>
+                    </a:lnB>
+                    <a:lnTlToBr w="12700" cmpd="sng">
+                      <a:noFill/>
+                      <a:prstDash val="solid"/>
+                    </a:lnTlToBr>
+                    <a:lnBlToTr w="12700" cmpd="sng">
+                      <a:noFill/>
+                      <a:prstDash val="solid"/>
+                    </a:lnBlToTr>
+                    <a:noFill/>
+                  </a:tcPr>
+                </a:tc>
+                <a:tc>
+                  <a:txBody>
+                    <a:bodyPr/>
+                    <a:lstStyle/>
+                    <a:p>
+                      <a:pPr latinLnBrk="1">
+                        <a:lnSpc>
+                          <a:spcPct val="150000"/>
+                        </a:lnSpc>
+                      </a:pPr>
+                      <a:r>
+                        <a:rPr lang="ko-KR" altLang="en-US" sz="700" dirty="0">
+                          <a:solidFill>
+                            <a:schemeClr val="tx1">
+                              <a:lumMod val="50000"/>
+                              <a:lumOff val="50000"/>
+                            </a:schemeClr>
+                          </a:solidFill>
+                          <a:latin typeface="나눔고딕" panose="020D0604000000000000" pitchFamily="50" charset="-127"/>
+                          <a:ea typeface="나눔고딕" panose="020D0604000000000000" pitchFamily="50" charset="-127"/>
+                        </a:rPr>
+                        <a:t>프리랜서 페이지 이동 버튼</a:t>
+                      </a:r>
+                      <a:r>
+                        <a:rPr lang="en-US" altLang="ko-KR" sz="700" dirty="0">
+                          <a:solidFill>
+                            <a:schemeClr val="tx1">
+                              <a:lumMod val="50000"/>
+                              <a:lumOff val="50000"/>
+                            </a:schemeClr>
+                          </a:solidFill>
+                          <a:latin typeface="나눔고딕" panose="020D0604000000000000" pitchFamily="50" charset="-127"/>
+                          <a:ea typeface="나눔고딕" panose="020D0604000000000000" pitchFamily="50" charset="-127"/>
+                        </a:rPr>
+                        <a:t>(</a:t>
+                      </a:r>
+                      <a:r>
+                        <a:rPr lang="ko-KR" altLang="en-US" sz="700" dirty="0">
+                          <a:solidFill>
+                            <a:schemeClr val="tx1">
+                              <a:lumMod val="50000"/>
+                              <a:lumOff val="50000"/>
+                            </a:schemeClr>
+                          </a:solidFill>
+                          <a:latin typeface="나눔고딕" panose="020D0604000000000000" pitchFamily="50" charset="-127"/>
+                          <a:ea typeface="나눔고딕" panose="020D0604000000000000" pitchFamily="50" charset="-127"/>
+                        </a:rPr>
+                        <a:t>전체영역</a:t>
+                      </a:r>
+                      <a:r>
+                        <a:rPr lang="en-US" altLang="ko-KR" sz="700" dirty="0">
+                          <a:solidFill>
+                            <a:schemeClr val="tx1">
+                              <a:lumMod val="50000"/>
+                              <a:lumOff val="50000"/>
+                            </a:schemeClr>
+                          </a:solidFill>
+                          <a:latin typeface="나눔고딕" panose="020D0604000000000000" pitchFamily="50" charset="-127"/>
+                          <a:ea typeface="나눔고딕" panose="020D0604000000000000" pitchFamily="50" charset="-127"/>
+                        </a:rPr>
+                        <a:t>)</a:t>
+                      </a:r>
+                    </a:p>
+                    <a:p>
+                      <a:pPr latinLnBrk="1">
+                        <a:lnSpc>
+                          <a:spcPct val="150000"/>
+                        </a:lnSpc>
+                      </a:pPr>
+                      <a:r>
+                        <a:rPr lang="en-US" altLang="ko-KR" sz="700" dirty="0">
+                          <a:solidFill>
+                            <a:schemeClr val="tx1">
+                              <a:lumMod val="50000"/>
+                              <a:lumOff val="50000"/>
+                            </a:schemeClr>
+                          </a:solidFill>
+                          <a:latin typeface="나눔고딕" panose="020D0604000000000000" pitchFamily="50" charset="-127"/>
+                          <a:ea typeface="나눔고딕" panose="020D0604000000000000" pitchFamily="50" charset="-127"/>
+                        </a:rPr>
+                        <a:t>m.freemoa.net/</a:t>
+                      </a:r>
+                      <a:r>
+                        <a:rPr lang="en-US" altLang="ko-KR" sz="700" dirty="0" err="1">
+                          <a:solidFill>
+                            <a:schemeClr val="tx1">
+                              <a:lumMod val="50000"/>
+                              <a:lumOff val="50000"/>
+                            </a:schemeClr>
+                          </a:solidFill>
+                          <a:latin typeface="나눔고딕" panose="020D0604000000000000" pitchFamily="50" charset="-127"/>
+                          <a:ea typeface="나눔고딕" panose="020D0604000000000000" pitchFamily="50" charset="-127"/>
+                        </a:rPr>
+                        <a:t>fmain</a:t>
+                      </a:r>
+                      <a:endParaRPr lang="ko-KR" altLang="en-US" sz="700" dirty="0">
+                        <a:solidFill>
+                          <a:schemeClr val="tx1">
+                            <a:lumMod val="50000"/>
+                            <a:lumOff val="50000"/>
+                          </a:schemeClr>
+                        </a:solidFill>
+                        <a:latin typeface="나눔고딕" panose="020D0604000000000000" pitchFamily="50" charset="-127"/>
+                        <a:ea typeface="나눔고딕" panose="020D0604000000000000" pitchFamily="50" charset="-127"/>
+                      </a:endParaRPr>
+                    </a:p>
+                  </a:txBody>
+                  <a:tcPr anchor="ctr">
+                    <a:lnL w="3175" cap="flat" cmpd="sng" algn="ctr">
+                      <a:solidFill>
+                        <a:schemeClr val="bg1">
+                          <a:lumMod val="75000"/>
+                        </a:schemeClr>
+                      </a:solidFill>
+                      <a:prstDash val="solid"/>
+                      <a:round/>
+                      <a:headEnd type="none" w="med" len="med"/>
+                      <a:tailEnd type="none" w="med" len="med"/>
+                    </a:lnL>
+                    <a:lnR w="3175" cap="flat" cmpd="sng" algn="ctr">
+                      <a:noFill/>
+                      <a:prstDash val="solid"/>
+                      <a:round/>
+                      <a:headEnd type="none" w="med" len="med"/>
+                      <a:tailEnd type="none" w="med" len="med"/>
+                    </a:lnR>
+                    <a:lnT w="3175" cap="flat" cmpd="sng" algn="ctr">
+                      <a:solidFill>
+                        <a:schemeClr val="bg1">
+                          <a:lumMod val="75000"/>
+                        </a:schemeClr>
+                      </a:solidFill>
+                      <a:prstDash val="solid"/>
+                      <a:round/>
+                      <a:headEnd type="none" w="med" len="med"/>
+                      <a:tailEnd type="none" w="med" len="med"/>
+                    </a:lnT>
+                    <a:lnB w="3175" cap="flat" cmpd="sng" algn="ctr">
+                      <a:solidFill>
+                        <a:schemeClr val="bg1">
+                          <a:lumMod val="75000"/>
+                        </a:schemeClr>
+                      </a:solidFill>
+                      <a:prstDash val="solid"/>
+                      <a:round/>
+                      <a:headEnd type="none" w="med" len="med"/>
+                      <a:tailEnd type="none" w="med" len="med"/>
+                    </a:lnB>
+                    <a:lnTlToBr w="12700" cmpd="sng">
+                      <a:noFill/>
+                      <a:prstDash val="solid"/>
+                    </a:lnTlToBr>
+                    <a:lnBlToTr w="12700" cmpd="sng">
+                      <a:noFill/>
+                      <a:prstDash val="solid"/>
+                    </a:lnBlToTr>
+                    <a:noFill/>
+                  </a:tcPr>
+                </a:tc>
+                <a:extLst>
+                  <a:ext uri="{0D108BD9-81ED-4DB2-BD59-A6C34878D82A}">
+                    <a16:rowId xmlns:a16="http://schemas.microsoft.com/office/drawing/2014/main" val="10003"/>
+                  </a:ext>
+                </a:extLst>
+              </a:tr>
+              <a:tr h="391795">
+                <a:tc>
+                  <a:txBody>
+                    <a:bodyPr/>
+                    <a:lstStyle/>
+                    <a:p>
+                      <a:pPr algn="ctr" latinLnBrk="1">
+                        <a:lnSpc>
+                          <a:spcPct val="150000"/>
+                        </a:lnSpc>
+                      </a:pPr>
+                      <a:r>
+                        <a:rPr lang="en-US" altLang="ko-KR" sz="700" b="0" dirty="0">
+                          <a:solidFill>
+                            <a:schemeClr val="tx1">
+                              <a:lumMod val="50000"/>
+                              <a:lumOff val="50000"/>
+                            </a:schemeClr>
+                          </a:solidFill>
+                          <a:latin typeface="나눔고딕" panose="020D0604000000000000" pitchFamily="50" charset="-127"/>
+                          <a:ea typeface="나눔고딕" panose="020D0604000000000000" pitchFamily="50" charset="-127"/>
+                        </a:rPr>
+                        <a:t>4</a:t>
+                      </a:r>
+                      <a:endParaRPr lang="ko-KR" altLang="en-US" sz="700" b="0" dirty="0">
+                        <a:solidFill>
+                          <a:schemeClr val="tx1">
+                            <a:lumMod val="50000"/>
+                            <a:lumOff val="50000"/>
+                          </a:schemeClr>
+                        </a:solidFill>
+                        <a:latin typeface="나눔고딕" panose="020D0604000000000000" pitchFamily="50" charset="-127"/>
+                        <a:ea typeface="나눔고딕" panose="020D0604000000000000" pitchFamily="50" charset="-127"/>
+                      </a:endParaRPr>
+                    </a:p>
+                  </a:txBody>
+                  <a:tcPr anchor="ctr">
+                    <a:lnL w="3175" cap="flat" cmpd="sng" algn="ctr">
+                      <a:noFill/>
+                      <a:prstDash val="solid"/>
+                      <a:round/>
+                      <a:headEnd type="none" w="med" len="med"/>
+                      <a:tailEnd type="none" w="med" len="med"/>
+                    </a:lnL>
+                    <a:lnR w="3175" cap="flat" cmpd="sng" algn="ctr">
+                      <a:solidFill>
+                        <a:schemeClr val="bg1">
+                          <a:lumMod val="75000"/>
+                        </a:schemeClr>
+                      </a:solidFill>
+                      <a:prstDash val="solid"/>
+                      <a:round/>
+                      <a:headEnd type="none" w="med" len="med"/>
+                      <a:tailEnd type="none" w="med" len="med"/>
+                    </a:lnR>
+                    <a:lnT w="3175" cap="flat" cmpd="sng" algn="ctr">
+                      <a:solidFill>
+                        <a:schemeClr val="bg1">
+                          <a:lumMod val="75000"/>
+                        </a:schemeClr>
+                      </a:solidFill>
+                      <a:prstDash val="solid"/>
+                      <a:round/>
+                      <a:headEnd type="none" w="med" len="med"/>
+                      <a:tailEnd type="none" w="med" len="med"/>
+                    </a:lnT>
+                    <a:lnB w="3175" cap="flat" cmpd="sng" algn="ctr">
+                      <a:solidFill>
+                        <a:schemeClr val="bg1">
+                          <a:lumMod val="75000"/>
+                        </a:schemeClr>
+                      </a:solidFill>
+                      <a:prstDash val="solid"/>
+                      <a:round/>
+                      <a:headEnd type="none" w="med" len="med"/>
+                      <a:tailEnd type="none" w="med" len="med"/>
+                    </a:lnB>
+                    <a:lnTlToBr w="12700" cmpd="sng">
+                      <a:noFill/>
+                      <a:prstDash val="solid"/>
+                    </a:lnTlToBr>
+                    <a:lnBlToTr w="12700" cmpd="sng">
+                      <a:noFill/>
+                      <a:prstDash val="solid"/>
+                    </a:lnBlToTr>
+                    <a:noFill/>
+                  </a:tcPr>
+                </a:tc>
+                <a:tc>
+                  <a:txBody>
+                    <a:bodyPr/>
+                    <a:lstStyle/>
+                    <a:p>
+                      <a:pPr marL="0" marR="0" indent="0" algn="l" defTabSz="914400" rtl="0" eaLnBrk="1" fontAlgn="auto" latinLnBrk="1" hangingPunct="1">
+                        <a:lnSpc>
+                          <a:spcPct val="150000"/>
+                        </a:lnSpc>
+                        <a:spcBef>
+                          <a:spcPts val="0"/>
+                        </a:spcBef>
+                        <a:spcAft>
+                          <a:spcPts val="0"/>
+                        </a:spcAft>
+                        <a:buClrTx/>
+                        <a:buSzTx/>
+                        <a:buFontTx/>
+                        <a:buNone/>
+                        <a:tabLst/>
+                        <a:defRPr/>
+                      </a:pPr>
+                      <a:endParaRPr lang="en-US" altLang="ko-KR" sz="700" dirty="0">
+                        <a:solidFill>
+                          <a:schemeClr val="tx1">
+                            <a:lumMod val="50000"/>
+                            <a:lumOff val="50000"/>
+                          </a:schemeClr>
+                        </a:solidFill>
+                        <a:latin typeface="나눔고딕" panose="020D0604000000000000" pitchFamily="50" charset="-127"/>
+                        <a:ea typeface="나눔고딕" panose="020D0604000000000000" pitchFamily="50" charset="-127"/>
+                        <a:sym typeface="Wingdings" panose="05000000000000000000" pitchFamily="2" charset="2"/>
+                      </a:endParaRPr>
+                    </a:p>
+                  </a:txBody>
+                  <a:tcPr anchor="ctr">
+                    <a:lnL w="3175" cap="flat" cmpd="sng" algn="ctr">
+                      <a:solidFill>
+                        <a:schemeClr val="bg1">
+                          <a:lumMod val="75000"/>
+                        </a:schemeClr>
+                      </a:solidFill>
+                      <a:prstDash val="solid"/>
+                      <a:round/>
+                      <a:headEnd type="none" w="med" len="med"/>
+                      <a:tailEnd type="none" w="med" len="med"/>
+                    </a:lnL>
+                    <a:lnR w="3175" cap="flat" cmpd="sng" algn="ctr">
+                      <a:noFill/>
+                      <a:prstDash val="solid"/>
+                      <a:round/>
+                      <a:headEnd type="none" w="med" len="med"/>
+                      <a:tailEnd type="none" w="med" len="med"/>
+                    </a:lnR>
+                    <a:lnT w="3175" cap="flat" cmpd="sng" algn="ctr">
+                      <a:solidFill>
+                        <a:schemeClr val="bg1">
+                          <a:lumMod val="75000"/>
+                        </a:schemeClr>
+                      </a:solidFill>
+                      <a:prstDash val="solid"/>
+                      <a:round/>
+                      <a:headEnd type="none" w="med" len="med"/>
+                      <a:tailEnd type="none" w="med" len="med"/>
+                    </a:lnT>
+                    <a:lnB w="3175" cap="flat" cmpd="sng" algn="ctr">
+                      <a:solidFill>
+                        <a:schemeClr val="bg1">
+                          <a:lumMod val="75000"/>
+                        </a:schemeClr>
+                      </a:solidFill>
+                      <a:prstDash val="solid"/>
+                      <a:round/>
+                      <a:headEnd type="none" w="med" len="med"/>
+                      <a:tailEnd type="none" w="med" len="med"/>
+                    </a:lnB>
+                    <a:lnTlToBr w="12700" cmpd="sng">
+                      <a:noFill/>
+                      <a:prstDash val="solid"/>
+                    </a:lnTlToBr>
+                    <a:lnBlToTr w="12700" cmpd="sng">
+                      <a:noFill/>
+                      <a:prstDash val="solid"/>
+                    </a:lnBlToTr>
+                    <a:noFill/>
+                  </a:tcPr>
+                </a:tc>
+                <a:extLst>
+                  <a:ext uri="{0D108BD9-81ED-4DB2-BD59-A6C34878D82A}">
+                    <a16:rowId xmlns:a16="http://schemas.microsoft.com/office/drawing/2014/main" val="10004"/>
+                  </a:ext>
+                </a:extLst>
+              </a:tr>
+              <a:tr h="391795">
+                <a:tc>
+                  <a:txBody>
+                    <a:bodyPr/>
+                    <a:lstStyle/>
+                    <a:p>
+                      <a:pPr algn="ctr" latinLnBrk="1">
+                        <a:lnSpc>
+                          <a:spcPct val="150000"/>
+                        </a:lnSpc>
+                      </a:pPr>
+                      <a:r>
+                        <a:rPr lang="en-US" altLang="ko-KR" sz="700" b="0" dirty="0">
+                          <a:solidFill>
+                            <a:schemeClr val="tx1">
+                              <a:lumMod val="50000"/>
+                              <a:lumOff val="50000"/>
+                            </a:schemeClr>
+                          </a:solidFill>
+                          <a:latin typeface="나눔고딕" panose="020D0604000000000000" pitchFamily="50" charset="-127"/>
+                          <a:ea typeface="나눔고딕" panose="020D0604000000000000" pitchFamily="50" charset="-127"/>
+                        </a:rPr>
+                        <a:t>5</a:t>
+                      </a:r>
+                      <a:endParaRPr lang="ko-KR" altLang="en-US" sz="700" b="0" dirty="0">
+                        <a:solidFill>
+                          <a:schemeClr val="tx1">
+                            <a:lumMod val="50000"/>
+                            <a:lumOff val="50000"/>
+                          </a:schemeClr>
+                        </a:solidFill>
+                        <a:latin typeface="나눔고딕" panose="020D0604000000000000" pitchFamily="50" charset="-127"/>
+                        <a:ea typeface="나눔고딕" panose="020D0604000000000000" pitchFamily="50" charset="-127"/>
+                      </a:endParaRPr>
+                    </a:p>
+                  </a:txBody>
+                  <a:tcPr anchor="ctr">
+                    <a:lnL w="3175" cap="flat" cmpd="sng" algn="ctr">
+                      <a:noFill/>
+                      <a:prstDash val="solid"/>
+                      <a:round/>
+                      <a:headEnd type="none" w="med" len="med"/>
+                      <a:tailEnd type="none" w="med" len="med"/>
+                    </a:lnL>
+                    <a:lnR w="3175" cap="flat" cmpd="sng" algn="ctr">
+                      <a:solidFill>
+                        <a:schemeClr val="bg1">
+                          <a:lumMod val="75000"/>
+                        </a:schemeClr>
+                      </a:solidFill>
+                      <a:prstDash val="solid"/>
+                      <a:round/>
+                      <a:headEnd type="none" w="med" len="med"/>
+                      <a:tailEnd type="none" w="med" len="med"/>
+                    </a:lnR>
+                    <a:lnT w="3175" cap="flat" cmpd="sng" algn="ctr">
+                      <a:solidFill>
+                        <a:schemeClr val="bg1">
+                          <a:lumMod val="75000"/>
+                        </a:schemeClr>
+                      </a:solidFill>
+                      <a:prstDash val="solid"/>
+                      <a:round/>
+                      <a:headEnd type="none" w="med" len="med"/>
+                      <a:tailEnd type="none" w="med" len="med"/>
+                    </a:lnT>
+                    <a:lnB w="3175" cap="flat" cmpd="sng" algn="ctr">
+                      <a:solidFill>
+                        <a:schemeClr val="bg1">
+                          <a:lumMod val="75000"/>
+                        </a:schemeClr>
+                      </a:solidFill>
+                      <a:prstDash val="solid"/>
+                      <a:round/>
+                      <a:headEnd type="none" w="med" len="med"/>
+                      <a:tailEnd type="none" w="med" len="med"/>
+                    </a:lnB>
+                    <a:lnTlToBr w="12700" cmpd="sng">
+                      <a:noFill/>
+                      <a:prstDash val="solid"/>
+                    </a:lnTlToBr>
+                    <a:lnBlToTr w="12700" cmpd="sng">
+                      <a:noFill/>
+                      <a:prstDash val="solid"/>
+                    </a:lnBlToTr>
+                    <a:noFill/>
+                  </a:tcPr>
+                </a:tc>
+                <a:tc>
+                  <a:txBody>
+                    <a:bodyPr/>
+                    <a:lstStyle/>
+                    <a:p>
+                      <a:pPr marL="0" marR="0" indent="0" algn="l" defTabSz="914400" rtl="0" eaLnBrk="1" fontAlgn="auto" latinLnBrk="1" hangingPunct="1">
+                        <a:lnSpc>
+                          <a:spcPct val="150000"/>
+                        </a:lnSpc>
+                        <a:spcBef>
+                          <a:spcPts val="0"/>
+                        </a:spcBef>
+                        <a:spcAft>
+                          <a:spcPts val="0"/>
+                        </a:spcAft>
+                        <a:buClrTx/>
+                        <a:buSzTx/>
+                        <a:buFontTx/>
+                        <a:buNone/>
+                        <a:tabLst/>
+                        <a:defRPr/>
+                      </a:pPr>
+                      <a:endParaRPr lang="en-US" altLang="ko-KR" sz="700" dirty="0">
+                        <a:solidFill>
+                          <a:schemeClr val="tx1">
+                            <a:lumMod val="50000"/>
+                            <a:lumOff val="50000"/>
+                          </a:schemeClr>
+                        </a:solidFill>
+                        <a:latin typeface="나눔고딕" panose="020D0604000000000000" pitchFamily="50" charset="-127"/>
+                        <a:ea typeface="나눔고딕" panose="020D0604000000000000" pitchFamily="50" charset="-127"/>
+                        <a:sym typeface="Wingdings" panose="05000000000000000000" pitchFamily="2" charset="2"/>
+                      </a:endParaRPr>
+                    </a:p>
+                  </a:txBody>
+                  <a:tcPr anchor="ctr">
+                    <a:lnL w="3175" cap="flat" cmpd="sng" algn="ctr">
+                      <a:solidFill>
+                        <a:schemeClr val="bg1">
+                          <a:lumMod val="75000"/>
+                        </a:schemeClr>
+                      </a:solidFill>
+                      <a:prstDash val="solid"/>
+                      <a:round/>
+                      <a:headEnd type="none" w="med" len="med"/>
+                      <a:tailEnd type="none" w="med" len="med"/>
+                    </a:lnL>
+                    <a:lnR w="3175" cap="flat" cmpd="sng" algn="ctr">
+                      <a:noFill/>
+                      <a:prstDash val="solid"/>
+                      <a:round/>
+                      <a:headEnd type="none" w="med" len="med"/>
+                      <a:tailEnd type="none" w="med" len="med"/>
+                    </a:lnR>
+                    <a:lnT w="3175" cap="flat" cmpd="sng" algn="ctr">
+                      <a:solidFill>
+                        <a:schemeClr val="bg1">
+                          <a:lumMod val="75000"/>
+                        </a:schemeClr>
+                      </a:solidFill>
+                      <a:prstDash val="solid"/>
+                      <a:round/>
+                      <a:headEnd type="none" w="med" len="med"/>
+                      <a:tailEnd type="none" w="med" len="med"/>
+                    </a:lnT>
+                    <a:lnB w="3175" cap="flat" cmpd="sng" algn="ctr">
+                      <a:solidFill>
+                        <a:schemeClr val="bg1">
+                          <a:lumMod val="75000"/>
+                        </a:schemeClr>
+                      </a:solidFill>
+                      <a:prstDash val="solid"/>
+                      <a:round/>
+                      <a:headEnd type="none" w="med" len="med"/>
+                      <a:tailEnd type="none" w="med" len="med"/>
+                    </a:lnB>
+                    <a:lnTlToBr w="12700" cmpd="sng">
+                      <a:noFill/>
+                      <a:prstDash val="solid"/>
+                    </a:lnTlToBr>
+                    <a:lnBlToTr w="12700" cmpd="sng">
+                      <a:noFill/>
+                      <a:prstDash val="solid"/>
+                    </a:lnBlToTr>
+                    <a:noFill/>
+                  </a:tcPr>
+                </a:tc>
+                <a:extLst>
+                  <a:ext uri="{0D108BD9-81ED-4DB2-BD59-A6C34878D82A}">
+                    <a16:rowId xmlns:a16="http://schemas.microsoft.com/office/drawing/2014/main" val="10005"/>
+                  </a:ext>
+                </a:extLst>
+              </a:tr>
+              <a:tr h="391795">
+                <a:tc>
+                  <a:txBody>
+                    <a:bodyPr/>
+                    <a:lstStyle/>
+                    <a:p>
+                      <a:pPr algn="ctr" latinLnBrk="1">
+                        <a:lnSpc>
+                          <a:spcPct val="150000"/>
+                        </a:lnSpc>
+                      </a:pPr>
+                      <a:r>
+                        <a:rPr lang="en-US" altLang="ko-KR" sz="700" b="0" dirty="0">
+                          <a:solidFill>
+                            <a:schemeClr val="tx1">
+                              <a:lumMod val="50000"/>
+                              <a:lumOff val="50000"/>
+                            </a:schemeClr>
+                          </a:solidFill>
+                          <a:latin typeface="나눔고딕" panose="020D0604000000000000" pitchFamily="50" charset="-127"/>
+                          <a:ea typeface="나눔고딕" panose="020D0604000000000000" pitchFamily="50" charset="-127"/>
+                        </a:rPr>
+                        <a:t>6</a:t>
+                      </a:r>
+                      <a:endParaRPr lang="ko-KR" altLang="en-US" sz="700" b="0" dirty="0">
+                        <a:solidFill>
+                          <a:schemeClr val="tx1">
+                            <a:lumMod val="50000"/>
+                            <a:lumOff val="50000"/>
+                          </a:schemeClr>
+                        </a:solidFill>
+                        <a:latin typeface="나눔고딕" panose="020D0604000000000000" pitchFamily="50" charset="-127"/>
+                        <a:ea typeface="나눔고딕" panose="020D0604000000000000" pitchFamily="50" charset="-127"/>
+                      </a:endParaRPr>
+                    </a:p>
+                  </a:txBody>
+                  <a:tcPr anchor="ctr">
+                    <a:lnL w="3175" cap="flat" cmpd="sng" algn="ctr">
+                      <a:noFill/>
+                      <a:prstDash val="solid"/>
+                      <a:round/>
+                      <a:headEnd type="none" w="med" len="med"/>
+                      <a:tailEnd type="none" w="med" len="med"/>
+                    </a:lnL>
+                    <a:lnR w="3175" cap="flat" cmpd="sng" algn="ctr">
+                      <a:solidFill>
+                        <a:schemeClr val="bg1">
+                          <a:lumMod val="75000"/>
+                        </a:schemeClr>
+                      </a:solidFill>
+                      <a:prstDash val="solid"/>
+                      <a:round/>
+                      <a:headEnd type="none" w="med" len="med"/>
+                      <a:tailEnd type="none" w="med" len="med"/>
+                    </a:lnR>
+                    <a:lnT w="3175" cap="flat" cmpd="sng" algn="ctr">
+                      <a:solidFill>
+                        <a:schemeClr val="bg1">
+                          <a:lumMod val="75000"/>
+                        </a:schemeClr>
+                      </a:solidFill>
+                      <a:prstDash val="solid"/>
+                      <a:round/>
+                      <a:headEnd type="none" w="med" len="med"/>
+                      <a:tailEnd type="none" w="med" len="med"/>
+                    </a:lnT>
+                    <a:lnB w="3175" cap="flat" cmpd="sng" algn="ctr">
+                      <a:noFill/>
+                      <a:prstDash val="solid"/>
+                      <a:round/>
+                      <a:headEnd type="none" w="med" len="med"/>
+                      <a:tailEnd type="none" w="med" len="med"/>
+                    </a:lnB>
+                    <a:lnTlToBr w="12700" cmpd="sng">
+                      <a:noFill/>
+                      <a:prstDash val="solid"/>
+                    </a:lnTlToBr>
+                    <a:lnBlToTr w="12700" cmpd="sng">
+                      <a:noFill/>
+                      <a:prstDash val="solid"/>
+                    </a:lnBlToTr>
+                    <a:noFill/>
+                  </a:tcPr>
+                </a:tc>
+                <a:tc>
+                  <a:txBody>
+                    <a:bodyPr/>
+                    <a:lstStyle/>
+                    <a:p>
+                      <a:pPr marL="0" marR="0" indent="0" algn="l" defTabSz="914400" rtl="0" eaLnBrk="1" fontAlgn="auto" latinLnBrk="1" hangingPunct="1">
+                        <a:lnSpc>
+                          <a:spcPct val="150000"/>
+                        </a:lnSpc>
+                        <a:spcBef>
+                          <a:spcPts val="0"/>
+                        </a:spcBef>
+                        <a:spcAft>
+                          <a:spcPts val="0"/>
+                        </a:spcAft>
+                        <a:buClrTx/>
+                        <a:buSzTx/>
+                        <a:buFontTx/>
+                        <a:buNone/>
+                        <a:tabLst/>
+                        <a:defRPr/>
+                      </a:pPr>
+                      <a:endParaRPr lang="en-US" altLang="ko-KR" sz="700" dirty="0">
+                        <a:solidFill>
+                          <a:schemeClr val="tx1">
+                            <a:lumMod val="50000"/>
+                            <a:lumOff val="50000"/>
+                          </a:schemeClr>
+                        </a:solidFill>
+                        <a:latin typeface="나눔고딕" panose="020D0604000000000000" pitchFamily="50" charset="-127"/>
+                        <a:ea typeface="나눔고딕" panose="020D0604000000000000" pitchFamily="50" charset="-127"/>
+                        <a:sym typeface="Wingdings" panose="05000000000000000000" pitchFamily="2" charset="2"/>
+                      </a:endParaRPr>
+                    </a:p>
+                  </a:txBody>
+                  <a:tcPr anchor="ctr">
+                    <a:lnL w="3175" cap="flat" cmpd="sng" algn="ctr">
+                      <a:solidFill>
+                        <a:schemeClr val="bg1">
+                          <a:lumMod val="75000"/>
+                        </a:schemeClr>
+                      </a:solidFill>
+                      <a:prstDash val="solid"/>
+                      <a:round/>
+                      <a:headEnd type="none" w="med" len="med"/>
+                      <a:tailEnd type="none" w="med" len="med"/>
+                    </a:lnL>
+                    <a:lnR w="3175" cap="flat" cmpd="sng" algn="ctr">
+                      <a:noFill/>
+                      <a:prstDash val="solid"/>
+                      <a:round/>
+                      <a:headEnd type="none" w="med" len="med"/>
+                      <a:tailEnd type="none" w="med" len="med"/>
+                    </a:lnR>
+                    <a:lnT w="3175" cap="flat" cmpd="sng" algn="ctr">
+                      <a:solidFill>
+                        <a:schemeClr val="bg1">
+                          <a:lumMod val="75000"/>
+                        </a:schemeClr>
+                      </a:solidFill>
+                      <a:prstDash val="solid"/>
+                      <a:round/>
+                      <a:headEnd type="none" w="med" len="med"/>
+                      <a:tailEnd type="none" w="med" len="med"/>
+                    </a:lnT>
+                    <a:lnB w="3175" cap="flat" cmpd="sng" algn="ctr">
+                      <a:noFill/>
+                      <a:prstDash val="solid"/>
+                      <a:round/>
+                      <a:headEnd type="none" w="med" len="med"/>
+                      <a:tailEnd type="none" w="med" len="med"/>
+                    </a:lnB>
+                    <a:lnTlToBr w="12700" cmpd="sng">
+                      <a:noFill/>
+                      <a:prstDash val="solid"/>
+                    </a:lnTlToBr>
+                    <a:lnBlToTr w="12700" cmpd="sng">
+                      <a:noFill/>
+                      <a:prstDash val="solid"/>
+                    </a:lnBlToTr>
+                    <a:noFill/>
+                  </a:tcPr>
+                </a:tc>
+                <a:extLst>
+                  <a:ext uri="{0D108BD9-81ED-4DB2-BD59-A6C34878D82A}">
+                    <a16:rowId xmlns:a16="http://schemas.microsoft.com/office/drawing/2014/main" val="10006"/>
+                  </a:ext>
+                </a:extLst>
+              </a:tr>
+            </a:tbl>
+          </a:graphicData>
+        </a:graphic>
+      </p:graphicFrame>
+      <p:graphicFrame>
+        <p:nvGraphicFramePr>
+          <p:cNvPr id="60" name="표 59"/>
+          <p:cNvGraphicFramePr>
+            <a:graphicFrameLocks noGrp="1"/>
+          </p:cNvGraphicFramePr>
+          <p:nvPr>
+            <p:extLst>
+              <p:ext uri="{D42A27DB-BD31-4B8C-83A1-F6EECF244321}">
+                <p14:modId xmlns:p14="http://schemas.microsoft.com/office/powerpoint/2010/main" val="2470451987"/>
+              </p:ext>
+            </p:extLst>
+          </p:nvPr>
+        </p:nvGraphicFramePr>
+        <p:xfrm>
+          <a:off x="6979021" y="2857500"/>
+          <a:ext cx="2164979" cy="2707200"/>
+        </p:xfrm>
+        <a:graphic>
+          <a:graphicData uri="http://schemas.openxmlformats.org/drawingml/2006/table">
+            <a:tbl>
+              <a:tblPr firstRow="1" bandRow="1">
+                <a:tableStyleId>{5C22544A-7EE6-4342-B048-85BDC9FD1C3A}</a:tableStyleId>
+              </a:tblPr>
+              <a:tblGrid>
+                <a:gridCol w="241973">
+                  <a:extLst>
+                    <a:ext uri="{9D8B030D-6E8A-4147-A177-3AD203B41FA5}">
+                      <a16:colId xmlns:a16="http://schemas.microsoft.com/office/drawing/2014/main" val="20000"/>
+                    </a:ext>
+                  </a:extLst>
+                </a:gridCol>
+                <a:gridCol w="1923006">
+                  <a:extLst>
+                    <a:ext uri="{9D8B030D-6E8A-4147-A177-3AD203B41FA5}">
+                      <a16:colId xmlns:a16="http://schemas.microsoft.com/office/drawing/2014/main" val="20001"/>
+                    </a:ext>
+                  </a:extLst>
+                </a:gridCol>
+              </a:tblGrid>
+              <a:tr h="223854">
+                <a:tc gridSpan="2">
+                  <a:txBody>
+                    <a:bodyPr/>
+                    <a:lstStyle/>
+                    <a:p>
+                      <a:pPr algn="ctr" latinLnBrk="1">
+                        <a:lnSpc>
+                          <a:spcPct val="150000"/>
+                        </a:lnSpc>
+                      </a:pPr>
+                      <a:r>
+                        <a:rPr lang="en-US" altLang="ko-KR" sz="600" b="0" dirty="0">
+                          <a:solidFill>
+                            <a:schemeClr val="tx1">
+                              <a:lumMod val="50000"/>
+                              <a:lumOff val="50000"/>
+                            </a:schemeClr>
+                          </a:solidFill>
+                          <a:latin typeface="나눔고딕" panose="020D0604000000000000" pitchFamily="50" charset="-127"/>
+                          <a:ea typeface="나눔고딕" panose="020D0604000000000000" pitchFamily="50" charset="-127"/>
+                        </a:rPr>
+                        <a:t>DESIGN</a:t>
+                      </a:r>
+                      <a:r>
+                        <a:rPr lang="en-US" altLang="ko-KR" sz="600" b="0" baseline="0" dirty="0">
+                          <a:solidFill>
+                            <a:schemeClr val="tx1">
+                              <a:lumMod val="50000"/>
+                              <a:lumOff val="50000"/>
+                            </a:schemeClr>
+                          </a:solidFill>
+                          <a:latin typeface="나눔고딕" panose="020D0604000000000000" pitchFamily="50" charset="-127"/>
+                          <a:ea typeface="나눔고딕" panose="020D0604000000000000" pitchFamily="50" charset="-127"/>
+                        </a:rPr>
+                        <a:t> Description</a:t>
+                      </a:r>
+                      <a:endParaRPr lang="ko-KR" altLang="en-US" sz="600" b="0" dirty="0">
+                        <a:solidFill>
+                          <a:schemeClr val="tx1">
+                            <a:lumMod val="50000"/>
+                            <a:lumOff val="50000"/>
+                          </a:schemeClr>
+                        </a:solidFill>
+                        <a:latin typeface="나눔고딕" panose="020D0604000000000000" pitchFamily="50" charset="-127"/>
+                        <a:ea typeface="나눔고딕" panose="020D0604000000000000" pitchFamily="50" charset="-127"/>
+                      </a:endParaRPr>
+                    </a:p>
+                  </a:txBody>
+                  <a:tcPr marT="0" marB="0" anchor="ctr">
+                    <a:lnL w="3175" cap="flat" cmpd="sng" algn="ctr">
+                      <a:noFill/>
+                      <a:prstDash val="solid"/>
+                      <a:round/>
+                      <a:headEnd type="none" w="med" len="med"/>
+                      <a:tailEnd type="none" w="med" len="med"/>
+                    </a:lnL>
+                    <a:lnR w="3175" cap="flat" cmpd="sng" algn="ctr">
+                      <a:noFill/>
+                      <a:prstDash val="solid"/>
+                      <a:round/>
+                      <a:headEnd type="none" w="med" len="med"/>
+                      <a:tailEnd type="none" w="med" len="med"/>
+                    </a:lnR>
+                    <a:lnT w="3175" cap="flat" cmpd="sng" algn="ctr">
+                      <a:noFill/>
+                      <a:prstDash val="solid"/>
+                      <a:round/>
+                      <a:headEnd type="none" w="med" len="med"/>
+                      <a:tailEnd type="none" w="med" len="med"/>
+                    </a:lnT>
+                    <a:lnB w="3175" cap="flat" cmpd="sng" algn="ctr">
+                      <a:solidFill>
+                        <a:schemeClr val="bg1">
+                          <a:lumMod val="75000"/>
+                        </a:schemeClr>
+                      </a:solidFill>
+                      <a:prstDash val="solid"/>
+                      <a:round/>
+                      <a:headEnd type="none" w="med" len="med"/>
+                      <a:tailEnd type="none" w="med" len="med"/>
+                    </a:lnB>
+                    <a:lnTlToBr w="12700" cmpd="sng">
+                      <a:noFill/>
+                      <a:prstDash val="solid"/>
+                    </a:lnTlToBr>
+                    <a:lnBlToTr w="12700" cmpd="sng">
+                      <a:noFill/>
+                      <a:prstDash val="solid"/>
+                    </a:lnBlToTr>
+                    <a:solidFill>
+                      <a:srgbClr val="FFFF93"/>
+                    </a:solidFill>
+                  </a:tcPr>
+                </a:tc>
+                <a:tc hMerge="1">
+                  <a:txBody>
+                    <a:bodyPr/>
+                    <a:lstStyle/>
+                    <a:p>
+                      <a:pPr latinLnBrk="1">
+                        <a:lnSpc>
+                          <a:spcPct val="150000"/>
+                        </a:lnSpc>
+                      </a:pPr>
+                      <a:endParaRPr lang="ko-KR" altLang="en-US" sz="700" b="0" dirty="0">
+                        <a:solidFill>
+                          <a:schemeClr val="tx1">
+                            <a:lumMod val="50000"/>
+                            <a:lumOff val="50000"/>
+                          </a:schemeClr>
+                        </a:solidFill>
+                        <a:latin typeface="나눔고딕" panose="020D0604000000000000" pitchFamily="50" charset="-127"/>
+                        <a:ea typeface="나눔고딕" panose="020D0604000000000000" pitchFamily="50" charset="-127"/>
+                      </a:endParaRPr>
+                    </a:p>
+                  </a:txBody>
+                  <a:tcPr anchor="ctr">
+                    <a:lnL w="3175" cap="flat" cmpd="sng" algn="ctr">
+                      <a:solidFill>
+                        <a:schemeClr val="bg1">
+                          <a:lumMod val="50000"/>
+                        </a:schemeClr>
+                      </a:solidFill>
+                      <a:prstDash val="solid"/>
+                      <a:round/>
+                      <a:headEnd type="none" w="med" len="med"/>
+                      <a:tailEnd type="none" w="med" len="med"/>
+                    </a:lnL>
+                    <a:lnR w="3175" cap="flat" cmpd="sng" algn="ctr">
+                      <a:solidFill>
+                        <a:schemeClr val="bg1">
+                          <a:lumMod val="50000"/>
+                        </a:schemeClr>
+                      </a:solidFill>
+                      <a:prstDash val="solid"/>
+                      <a:round/>
+                      <a:headEnd type="none" w="med" len="med"/>
+                      <a:tailEnd type="none" w="med" len="med"/>
+                    </a:lnR>
+                    <a:lnT w="3175" cap="flat" cmpd="sng" algn="ctr">
+                      <a:solidFill>
+                        <a:schemeClr val="bg1">
+                          <a:lumMod val="50000"/>
+                        </a:schemeClr>
+                      </a:solidFill>
+                      <a:prstDash val="solid"/>
+                      <a:round/>
+                      <a:headEnd type="none" w="med" len="med"/>
+                      <a:tailEnd type="none" w="med" len="med"/>
+                    </a:lnT>
+                    <a:lnB w="3175" cap="flat" cmpd="sng" algn="ctr">
+                      <a:solidFill>
+                        <a:schemeClr val="bg1">
+                          <a:lumMod val="50000"/>
+                        </a:schemeClr>
+                      </a:solidFill>
+                      <a:prstDash val="solid"/>
+                      <a:round/>
+                      <a:headEnd type="none" w="med" len="med"/>
+                      <a:tailEnd type="none" w="med" len="med"/>
+                    </a:lnB>
+                    <a:lnTlToBr w="12700" cmpd="sng">
+                      <a:noFill/>
+                      <a:prstDash val="solid"/>
+                    </a:lnTlToBr>
+                    <a:lnBlToTr w="12700" cmpd="sng">
+                      <a:noFill/>
+                      <a:prstDash val="solid"/>
+                    </a:lnBlToTr>
+                    <a:solidFill>
+                      <a:srgbClr val="C7A1E3"/>
+                    </a:solidFill>
+                  </a:tcPr>
+                </a:tc>
+                <a:extLst>
+                  <a:ext uri="{0D108BD9-81ED-4DB2-BD59-A6C34878D82A}">
+                    <a16:rowId xmlns:a16="http://schemas.microsoft.com/office/drawing/2014/main" val="10000"/>
+                  </a:ext>
+                </a:extLst>
+              </a:tr>
+              <a:tr h="768786">
+                <a:tc>
+                  <a:txBody>
+                    <a:bodyPr/>
+                    <a:lstStyle/>
+                    <a:p>
+                      <a:pPr algn="ctr" latinLnBrk="1">
+                        <a:lnSpc>
+                          <a:spcPct val="150000"/>
+                        </a:lnSpc>
+                      </a:pPr>
+                      <a:r>
+                        <a:rPr lang="en-US" altLang="ko-KR" sz="700" b="0" dirty="0">
+                          <a:solidFill>
+                            <a:schemeClr val="tx1">
+                              <a:lumMod val="50000"/>
+                              <a:lumOff val="50000"/>
+                            </a:schemeClr>
+                          </a:solidFill>
+                          <a:latin typeface="나눔고딕" panose="020D0604000000000000" pitchFamily="50" charset="-127"/>
+                          <a:ea typeface="나눔고딕" panose="020D0604000000000000" pitchFamily="50" charset="-127"/>
+                        </a:rPr>
+                        <a:t>1</a:t>
+                      </a:r>
+                      <a:endParaRPr lang="ko-KR" altLang="en-US" sz="700" b="0" dirty="0">
+                        <a:solidFill>
+                          <a:schemeClr val="tx1">
+                            <a:lumMod val="50000"/>
+                            <a:lumOff val="50000"/>
+                          </a:schemeClr>
+                        </a:solidFill>
+                        <a:latin typeface="나눔고딕" panose="020D0604000000000000" pitchFamily="50" charset="-127"/>
+                        <a:ea typeface="나눔고딕" panose="020D0604000000000000" pitchFamily="50" charset="-127"/>
+                      </a:endParaRPr>
+                    </a:p>
+                  </a:txBody>
+                  <a:tcPr anchor="ctr">
+                    <a:lnL w="3175" cap="flat" cmpd="sng" algn="ctr">
+                      <a:noFill/>
+                      <a:prstDash val="solid"/>
+                      <a:round/>
+                      <a:headEnd type="none" w="med" len="med"/>
+                      <a:tailEnd type="none" w="med" len="med"/>
+                    </a:lnL>
+                    <a:lnR w="3175" cap="flat" cmpd="sng" algn="ctr">
+                      <a:solidFill>
+                        <a:schemeClr val="bg1">
+                          <a:lumMod val="75000"/>
+                        </a:schemeClr>
+                      </a:solidFill>
+                      <a:prstDash val="solid"/>
+                      <a:round/>
+                      <a:headEnd type="none" w="med" len="med"/>
+                      <a:tailEnd type="none" w="med" len="med"/>
+                    </a:lnR>
+                    <a:lnT w="3175" cap="flat" cmpd="sng" algn="ctr">
+                      <a:solidFill>
+                        <a:schemeClr val="bg1">
+                          <a:lumMod val="75000"/>
+                        </a:schemeClr>
+                      </a:solidFill>
+                      <a:prstDash val="solid"/>
+                      <a:round/>
+                      <a:headEnd type="none" w="med" len="med"/>
+                      <a:tailEnd type="none" w="med" len="med"/>
+                    </a:lnT>
+                    <a:lnB w="3175" cap="flat" cmpd="sng" algn="ctr">
+                      <a:solidFill>
+                        <a:schemeClr val="bg1">
+                          <a:lumMod val="75000"/>
+                        </a:schemeClr>
+                      </a:solidFill>
+                      <a:prstDash val="solid"/>
+                      <a:round/>
+                      <a:headEnd type="none" w="med" len="med"/>
+                      <a:tailEnd type="none" w="med" len="med"/>
+                    </a:lnB>
+                    <a:lnTlToBr w="12700" cmpd="sng">
+                      <a:noFill/>
+                      <a:prstDash val="solid"/>
+                    </a:lnTlToBr>
+                    <a:lnBlToTr w="12700" cmpd="sng">
+                      <a:noFill/>
+                      <a:prstDash val="solid"/>
+                    </a:lnBlToTr>
+                    <a:noFill/>
+                  </a:tcPr>
+                </a:tc>
+                <a:tc>
+                  <a:txBody>
+                    <a:bodyPr/>
+                    <a:lstStyle/>
+                    <a:p>
+                      <a:pPr marL="0" marR="0" indent="0" algn="l" defTabSz="914400" rtl="0" eaLnBrk="1" fontAlgn="auto" latinLnBrk="1" hangingPunct="1">
+                        <a:lnSpc>
+                          <a:spcPct val="150000"/>
+                        </a:lnSpc>
+                        <a:spcBef>
+                          <a:spcPts val="0"/>
+                        </a:spcBef>
+                        <a:spcAft>
+                          <a:spcPts val="0"/>
+                        </a:spcAft>
+                        <a:buClr>
+                          <a:srgbClr val="FF0000"/>
+                        </a:buClr>
+                        <a:buSzTx/>
+                        <a:buFont typeface="+mj-ea"/>
+                        <a:buNone/>
+                        <a:tabLst/>
+                        <a:defRPr/>
+                      </a:pPr>
+                      <a:r>
+                        <a:rPr lang="ko-KR" altLang="en-US" sz="700" dirty="0">
+                          <a:solidFill>
+                            <a:schemeClr val="tx1">
+                              <a:lumMod val="50000"/>
+                              <a:lumOff val="50000"/>
+                            </a:schemeClr>
+                          </a:solidFill>
+                          <a:latin typeface="나눔고딕" panose="020D0604000000000000" pitchFamily="50" charset="-127"/>
+                          <a:ea typeface="나눔고딕" panose="020D0604000000000000" pitchFamily="50" charset="-127"/>
+                          <a:sym typeface="Wingdings" panose="05000000000000000000" pitchFamily="2" charset="2"/>
+                        </a:rPr>
+                        <a:t>햄버거 </a:t>
+                      </a:r>
+                      <a:r>
+                        <a:rPr lang="ko-KR" altLang="en-US" sz="700" dirty="0" err="1">
+                          <a:solidFill>
+                            <a:schemeClr val="tx1">
+                              <a:lumMod val="50000"/>
+                              <a:lumOff val="50000"/>
+                            </a:schemeClr>
+                          </a:solidFill>
+                          <a:latin typeface="나눔고딕" panose="020D0604000000000000" pitchFamily="50" charset="-127"/>
+                          <a:ea typeface="나눔고딕" panose="020D0604000000000000" pitchFamily="50" charset="-127"/>
+                          <a:sym typeface="Wingdings" panose="05000000000000000000" pitchFamily="2" charset="2"/>
+                        </a:rPr>
+                        <a:t>베뉴</a:t>
+                      </a:r>
+                      <a:endParaRPr lang="en-US" altLang="ko-KR" sz="700" dirty="0">
+                        <a:solidFill>
+                          <a:schemeClr val="tx1">
+                            <a:lumMod val="50000"/>
+                            <a:lumOff val="50000"/>
+                          </a:schemeClr>
+                        </a:solidFill>
+                        <a:latin typeface="나눔고딕" panose="020D0604000000000000" pitchFamily="50" charset="-127"/>
+                        <a:ea typeface="나눔고딕" panose="020D0604000000000000" pitchFamily="50" charset="-127"/>
+                        <a:sym typeface="Wingdings" panose="05000000000000000000" pitchFamily="2" charset="2"/>
+                      </a:endParaRPr>
+                    </a:p>
+                    <a:p>
+                      <a:pPr marL="0" marR="0" indent="0" algn="l" defTabSz="914400" rtl="0" eaLnBrk="1" fontAlgn="auto" latinLnBrk="1" hangingPunct="1">
+                        <a:lnSpc>
+                          <a:spcPct val="150000"/>
+                        </a:lnSpc>
+                        <a:spcBef>
+                          <a:spcPts val="0"/>
+                        </a:spcBef>
+                        <a:spcAft>
+                          <a:spcPts val="0"/>
+                        </a:spcAft>
+                        <a:buClr>
+                          <a:srgbClr val="FF0000"/>
+                        </a:buClr>
+                        <a:buSzTx/>
+                        <a:buFont typeface="+mj-ea"/>
+                        <a:buNone/>
+                        <a:tabLst/>
+                        <a:defRPr/>
+                      </a:pPr>
+                      <a:r>
+                        <a:rPr lang="ko-KR" altLang="en-US" sz="700" dirty="0">
+                          <a:solidFill>
+                            <a:schemeClr val="tx1">
+                              <a:lumMod val="50000"/>
+                              <a:lumOff val="50000"/>
+                            </a:schemeClr>
+                          </a:solidFill>
+                          <a:latin typeface="나눔고딕" panose="020D0604000000000000" pitchFamily="50" charset="-127"/>
+                          <a:ea typeface="나눔고딕" panose="020D0604000000000000" pitchFamily="50" charset="-127"/>
+                          <a:sym typeface="Wingdings" panose="05000000000000000000" pitchFamily="2" charset="2"/>
+                        </a:rPr>
+                        <a:t>일반적인 </a:t>
+                      </a:r>
+                      <a:r>
+                        <a:rPr lang="ko-KR" altLang="en-US" sz="700" dirty="0" err="1">
+                          <a:solidFill>
+                            <a:schemeClr val="tx1">
+                              <a:lumMod val="50000"/>
+                              <a:lumOff val="50000"/>
+                            </a:schemeClr>
+                          </a:solidFill>
+                          <a:latin typeface="나눔고딕" panose="020D0604000000000000" pitchFamily="50" charset="-127"/>
+                          <a:ea typeface="나눔고딕" panose="020D0604000000000000" pitchFamily="50" charset="-127"/>
+                          <a:sym typeface="Wingdings" panose="05000000000000000000" pitchFamily="2" charset="2"/>
+                        </a:rPr>
+                        <a:t>토글메뉴</a:t>
+                      </a:r>
+                      <a:r>
+                        <a:rPr lang="ko-KR" altLang="en-US" sz="700" dirty="0">
+                          <a:solidFill>
+                            <a:schemeClr val="tx1">
+                              <a:lumMod val="50000"/>
+                              <a:lumOff val="50000"/>
+                            </a:schemeClr>
+                          </a:solidFill>
+                          <a:latin typeface="나눔고딕" panose="020D0604000000000000" pitchFamily="50" charset="-127"/>
+                          <a:ea typeface="나눔고딕" panose="020D0604000000000000" pitchFamily="50" charset="-127"/>
+                          <a:sym typeface="Wingdings" panose="05000000000000000000" pitchFamily="2" charset="2"/>
+                        </a:rPr>
+                        <a:t> 사용</a:t>
+                      </a:r>
+                      <a:endParaRPr lang="en-US" altLang="ko-KR" sz="700" dirty="0">
+                        <a:solidFill>
+                          <a:schemeClr val="tx1">
+                            <a:lumMod val="50000"/>
+                            <a:lumOff val="50000"/>
+                          </a:schemeClr>
+                        </a:solidFill>
+                        <a:latin typeface="나눔고딕" panose="020D0604000000000000" pitchFamily="50" charset="-127"/>
+                        <a:ea typeface="나눔고딕" panose="020D0604000000000000" pitchFamily="50" charset="-127"/>
+                        <a:sym typeface="Wingdings" panose="05000000000000000000" pitchFamily="2" charset="2"/>
+                      </a:endParaRPr>
+                    </a:p>
+                    <a:p>
+                      <a:pPr marL="0" marR="0" indent="0" algn="l" defTabSz="914400" rtl="0" eaLnBrk="1" fontAlgn="auto" latinLnBrk="1" hangingPunct="1">
+                        <a:lnSpc>
+                          <a:spcPct val="150000"/>
+                        </a:lnSpc>
+                        <a:spcBef>
+                          <a:spcPts val="0"/>
+                        </a:spcBef>
+                        <a:spcAft>
+                          <a:spcPts val="0"/>
+                        </a:spcAft>
+                        <a:buClr>
+                          <a:srgbClr val="FF0000"/>
+                        </a:buClr>
+                        <a:buSzTx/>
+                        <a:buFont typeface="+mj-ea"/>
+                        <a:buNone/>
+                        <a:tabLst/>
+                        <a:defRPr/>
+                      </a:pPr>
+                      <a:r>
+                        <a:rPr lang="ko-KR" altLang="en-US" sz="700" dirty="0" err="1">
+                          <a:solidFill>
+                            <a:schemeClr val="tx1">
+                              <a:lumMod val="50000"/>
+                              <a:lumOff val="50000"/>
+                            </a:schemeClr>
+                          </a:solidFill>
+                          <a:latin typeface="나눔고딕" panose="020D0604000000000000" pitchFamily="50" charset="-127"/>
+                          <a:ea typeface="나눔고딕" panose="020D0604000000000000" pitchFamily="50" charset="-127"/>
+                          <a:sym typeface="Wingdings" panose="05000000000000000000" pitchFamily="2" charset="2"/>
+                        </a:rPr>
+                        <a:t>맥그라은드는</a:t>
+                      </a:r>
+                      <a:r>
+                        <a:rPr lang="ko-KR" altLang="en-US" sz="700" dirty="0">
+                          <a:solidFill>
+                            <a:schemeClr val="tx1">
+                              <a:lumMod val="50000"/>
+                              <a:lumOff val="50000"/>
+                            </a:schemeClr>
+                          </a:solidFill>
+                          <a:latin typeface="나눔고딕" panose="020D0604000000000000" pitchFamily="50" charset="-127"/>
+                          <a:ea typeface="나눔고딕" panose="020D0604000000000000" pitchFamily="50" charset="-127"/>
+                          <a:sym typeface="Wingdings" panose="05000000000000000000" pitchFamily="2" charset="2"/>
+                        </a:rPr>
+                        <a:t> </a:t>
+                      </a:r>
+                      <a:r>
+                        <a:rPr lang="ko-KR" altLang="en-US" sz="700">
+                          <a:solidFill>
+                            <a:schemeClr val="tx1">
+                              <a:lumMod val="50000"/>
+                              <a:lumOff val="50000"/>
+                            </a:schemeClr>
+                          </a:solidFill>
+                          <a:latin typeface="나눔고딕" panose="020D0604000000000000" pitchFamily="50" charset="-127"/>
+                          <a:ea typeface="나눔고딕" panose="020D0604000000000000" pitchFamily="50" charset="-127"/>
+                          <a:sym typeface="Wingdings" panose="05000000000000000000" pitchFamily="2" charset="2"/>
+                        </a:rPr>
+                        <a:t>흰색 테두리</a:t>
+                      </a:r>
+                      <a:endParaRPr lang="en-US" altLang="ko-KR" sz="700" dirty="0">
+                        <a:solidFill>
+                          <a:schemeClr val="tx1">
+                            <a:lumMod val="50000"/>
+                            <a:lumOff val="50000"/>
+                          </a:schemeClr>
+                        </a:solidFill>
+                        <a:latin typeface="나눔고딕" panose="020D0604000000000000" pitchFamily="50" charset="-127"/>
+                        <a:ea typeface="나눔고딕" panose="020D0604000000000000" pitchFamily="50" charset="-127"/>
+                        <a:sym typeface="Wingdings" panose="05000000000000000000" pitchFamily="2" charset="2"/>
+                      </a:endParaRPr>
+                    </a:p>
+                  </a:txBody>
+                  <a:tcPr anchor="ctr">
+                    <a:lnL w="3175" cap="flat" cmpd="sng" algn="ctr">
+                      <a:solidFill>
+                        <a:schemeClr val="bg1">
+                          <a:lumMod val="75000"/>
+                        </a:schemeClr>
+                      </a:solidFill>
+                      <a:prstDash val="solid"/>
+                      <a:round/>
+                      <a:headEnd type="none" w="med" len="med"/>
+                      <a:tailEnd type="none" w="med" len="med"/>
+                    </a:lnL>
+                    <a:lnR w="3175" cap="flat" cmpd="sng" algn="ctr">
+                      <a:noFill/>
+                      <a:prstDash val="solid"/>
+                      <a:round/>
+                      <a:headEnd type="none" w="med" len="med"/>
+                      <a:tailEnd type="none" w="med" len="med"/>
+                    </a:lnR>
+                    <a:lnT w="3175" cap="flat" cmpd="sng" algn="ctr">
+                      <a:solidFill>
+                        <a:schemeClr val="bg1">
+                          <a:lumMod val="75000"/>
+                        </a:schemeClr>
+                      </a:solidFill>
+                      <a:prstDash val="solid"/>
+                      <a:round/>
+                      <a:headEnd type="none" w="med" len="med"/>
+                      <a:tailEnd type="none" w="med" len="med"/>
+                    </a:lnT>
+                    <a:lnB w="3175" cap="flat" cmpd="sng" algn="ctr">
+                      <a:solidFill>
+                        <a:schemeClr val="bg1">
+                          <a:lumMod val="75000"/>
+                        </a:schemeClr>
+                      </a:solidFill>
+                      <a:prstDash val="solid"/>
+                      <a:round/>
+                      <a:headEnd type="none" w="med" len="med"/>
+                      <a:tailEnd type="none" w="med" len="med"/>
+                    </a:lnB>
+                    <a:lnTlToBr w="12700" cmpd="sng">
+                      <a:noFill/>
+                      <a:prstDash val="solid"/>
+                    </a:lnTlToBr>
+                    <a:lnBlToTr w="12700" cmpd="sng">
+                      <a:noFill/>
+                      <a:prstDash val="solid"/>
+                    </a:lnBlToTr>
+                    <a:noFill/>
+                  </a:tcPr>
+                </a:tc>
+                <a:extLst>
+                  <a:ext uri="{0D108BD9-81ED-4DB2-BD59-A6C34878D82A}">
+                    <a16:rowId xmlns:a16="http://schemas.microsoft.com/office/drawing/2014/main" val="10001"/>
+                  </a:ext>
+                </a:extLst>
+              </a:tr>
+              <a:tr h="428640">
+                <a:tc>
+                  <a:txBody>
+                    <a:bodyPr/>
+                    <a:lstStyle/>
+                    <a:p>
+                      <a:pPr algn="ctr" latinLnBrk="1">
+                        <a:lnSpc>
+                          <a:spcPct val="150000"/>
+                        </a:lnSpc>
+                      </a:pPr>
+                      <a:r>
+                        <a:rPr lang="en-US" altLang="ko-KR" sz="700" b="0" dirty="0">
+                          <a:solidFill>
+                            <a:schemeClr val="tx1">
+                              <a:lumMod val="50000"/>
+                              <a:lumOff val="50000"/>
+                            </a:schemeClr>
+                          </a:solidFill>
+                          <a:latin typeface="나눔고딕" panose="020D0604000000000000" pitchFamily="50" charset="-127"/>
+                          <a:ea typeface="나눔고딕" panose="020D0604000000000000" pitchFamily="50" charset="-127"/>
+                        </a:rPr>
+                        <a:t>2, 3</a:t>
+                      </a:r>
+                      <a:endParaRPr lang="ko-KR" altLang="en-US" sz="700" b="0" dirty="0">
+                        <a:solidFill>
+                          <a:schemeClr val="tx1">
+                            <a:lumMod val="50000"/>
+                            <a:lumOff val="50000"/>
+                          </a:schemeClr>
+                        </a:solidFill>
+                        <a:latin typeface="나눔고딕" panose="020D0604000000000000" pitchFamily="50" charset="-127"/>
+                        <a:ea typeface="나눔고딕" panose="020D0604000000000000" pitchFamily="50" charset="-127"/>
+                      </a:endParaRPr>
+                    </a:p>
+                  </a:txBody>
+                  <a:tcPr anchor="ctr">
+                    <a:lnL w="3175" cap="flat" cmpd="sng" algn="ctr">
+                      <a:noFill/>
+                      <a:prstDash val="solid"/>
+                      <a:round/>
+                      <a:headEnd type="none" w="med" len="med"/>
+                      <a:tailEnd type="none" w="med" len="med"/>
+                    </a:lnL>
+                    <a:lnR w="3175" cap="flat" cmpd="sng" algn="ctr">
+                      <a:solidFill>
+                        <a:schemeClr val="bg1">
+                          <a:lumMod val="75000"/>
+                        </a:schemeClr>
+                      </a:solidFill>
+                      <a:prstDash val="solid"/>
+                      <a:round/>
+                      <a:headEnd type="none" w="med" len="med"/>
+                      <a:tailEnd type="none" w="med" len="med"/>
+                    </a:lnR>
+                    <a:lnT w="3175" cap="flat" cmpd="sng" algn="ctr">
+                      <a:solidFill>
+                        <a:schemeClr val="bg1">
+                          <a:lumMod val="75000"/>
+                        </a:schemeClr>
+                      </a:solidFill>
+                      <a:prstDash val="solid"/>
+                      <a:round/>
+                      <a:headEnd type="none" w="med" len="med"/>
+                      <a:tailEnd type="none" w="med" len="med"/>
+                    </a:lnT>
+                    <a:lnB w="3175" cap="flat" cmpd="sng" algn="ctr">
+                      <a:solidFill>
+                        <a:schemeClr val="bg1">
+                          <a:lumMod val="75000"/>
+                        </a:schemeClr>
+                      </a:solidFill>
+                      <a:prstDash val="solid"/>
+                      <a:round/>
+                      <a:headEnd type="none" w="med" len="med"/>
+                      <a:tailEnd type="none" w="med" len="med"/>
+                    </a:lnB>
+                    <a:lnTlToBr w="12700" cmpd="sng">
+                      <a:noFill/>
+                      <a:prstDash val="solid"/>
+                    </a:lnTlToBr>
+                    <a:lnBlToTr w="12700" cmpd="sng">
+                      <a:noFill/>
+                      <a:prstDash val="solid"/>
+                    </a:lnBlToTr>
+                    <a:noFill/>
+                  </a:tcPr>
+                </a:tc>
+                <a:tc>
+                  <a:txBody>
+                    <a:bodyPr/>
+                    <a:lstStyle/>
+                    <a:p>
+                      <a:pPr marL="0" indent="0">
+                        <a:lnSpc>
+                          <a:spcPct val="150000"/>
+                        </a:lnSpc>
+                        <a:buClr>
+                          <a:srgbClr val="FF0000"/>
+                        </a:buClr>
+                        <a:buFont typeface="+mj-ea"/>
+                        <a:buNone/>
+                      </a:pPr>
+                      <a:r>
+                        <a:rPr lang="ko-KR" altLang="en-US" sz="700" dirty="0">
+                          <a:solidFill>
+                            <a:schemeClr val="tx1">
+                              <a:lumMod val="50000"/>
+                              <a:lumOff val="50000"/>
+                            </a:schemeClr>
+                          </a:solidFill>
+                          <a:latin typeface="나눔고딕" panose="020D0604000000000000" pitchFamily="50" charset="-127"/>
+                          <a:ea typeface="나눔고딕" panose="020D0604000000000000" pitchFamily="50" charset="-127"/>
+                          <a:sym typeface="Wingdings" panose="05000000000000000000" pitchFamily="2" charset="2"/>
+                        </a:rPr>
+                        <a:t>명확히 구분되는 버튼 컬러 사용</a:t>
+                      </a:r>
+                      <a:endParaRPr lang="en-US" altLang="ko-KR" sz="700" dirty="0">
+                        <a:solidFill>
+                          <a:schemeClr val="tx1">
+                            <a:lumMod val="50000"/>
+                            <a:lumOff val="50000"/>
+                          </a:schemeClr>
+                        </a:solidFill>
+                        <a:latin typeface="나눔고딕" panose="020D0604000000000000" pitchFamily="50" charset="-127"/>
+                        <a:ea typeface="나눔고딕" panose="020D0604000000000000" pitchFamily="50" charset="-127"/>
+                        <a:sym typeface="Wingdings" panose="05000000000000000000" pitchFamily="2" charset="2"/>
+                      </a:endParaRPr>
+                    </a:p>
+                  </a:txBody>
+                  <a:tcPr anchor="ctr">
+                    <a:lnL w="3175" cap="flat" cmpd="sng" algn="ctr">
+                      <a:solidFill>
+                        <a:schemeClr val="bg1">
+                          <a:lumMod val="75000"/>
+                        </a:schemeClr>
+                      </a:solidFill>
+                      <a:prstDash val="solid"/>
+                      <a:round/>
+                      <a:headEnd type="none" w="med" len="med"/>
+                      <a:tailEnd type="none" w="med" len="med"/>
+                    </a:lnL>
+                    <a:lnR w="3175" cap="flat" cmpd="sng" algn="ctr">
+                      <a:noFill/>
+                      <a:prstDash val="solid"/>
+                      <a:round/>
+                      <a:headEnd type="none" w="med" len="med"/>
+                      <a:tailEnd type="none" w="med" len="med"/>
+                    </a:lnR>
+                    <a:lnT w="3175" cap="flat" cmpd="sng" algn="ctr">
+                      <a:solidFill>
+                        <a:schemeClr val="bg1">
+                          <a:lumMod val="75000"/>
+                        </a:schemeClr>
+                      </a:solidFill>
+                      <a:prstDash val="solid"/>
+                      <a:round/>
+                      <a:headEnd type="none" w="med" len="med"/>
+                      <a:tailEnd type="none" w="med" len="med"/>
+                    </a:lnT>
+                    <a:lnB w="3175" cap="flat" cmpd="sng" algn="ctr">
+                      <a:solidFill>
+                        <a:schemeClr val="bg1">
+                          <a:lumMod val="75000"/>
+                        </a:schemeClr>
+                      </a:solidFill>
+                      <a:prstDash val="solid"/>
+                      <a:round/>
+                      <a:headEnd type="none" w="med" len="med"/>
+                      <a:tailEnd type="none" w="med" len="med"/>
+                    </a:lnB>
+                    <a:lnTlToBr w="12700" cmpd="sng">
+                      <a:noFill/>
+                      <a:prstDash val="solid"/>
+                    </a:lnTlToBr>
+                    <a:lnBlToTr w="12700" cmpd="sng">
+                      <a:noFill/>
+                      <a:prstDash val="solid"/>
+                    </a:lnBlToTr>
+                    <a:noFill/>
+                  </a:tcPr>
+                </a:tc>
+                <a:extLst>
+                  <a:ext uri="{0D108BD9-81ED-4DB2-BD59-A6C34878D82A}">
+                    <a16:rowId xmlns:a16="http://schemas.microsoft.com/office/drawing/2014/main" val="10002"/>
+                  </a:ext>
+                </a:extLst>
+              </a:tr>
+              <a:tr h="428640">
+                <a:tc>
+                  <a:txBody>
+                    <a:bodyPr/>
+                    <a:lstStyle/>
+                    <a:p>
+                      <a:pPr algn="ctr" latinLnBrk="1">
+                        <a:lnSpc>
+                          <a:spcPct val="150000"/>
+                        </a:lnSpc>
+                      </a:pPr>
+                      <a:r>
+                        <a:rPr lang="en-US" altLang="ko-KR" sz="700" b="0" dirty="0">
+                          <a:solidFill>
+                            <a:schemeClr val="tx1">
+                              <a:lumMod val="50000"/>
+                              <a:lumOff val="50000"/>
+                            </a:schemeClr>
+                          </a:solidFill>
+                          <a:latin typeface="나눔고딕" panose="020D0604000000000000" pitchFamily="50" charset="-127"/>
+                          <a:ea typeface="나눔고딕" panose="020D0604000000000000" pitchFamily="50" charset="-127"/>
+                        </a:rPr>
+                        <a:t>4</a:t>
+                      </a:r>
+                      <a:endParaRPr lang="ko-KR" altLang="en-US" sz="700" b="0" dirty="0">
+                        <a:solidFill>
+                          <a:schemeClr val="tx1">
+                            <a:lumMod val="50000"/>
+                            <a:lumOff val="50000"/>
+                          </a:schemeClr>
+                        </a:solidFill>
+                        <a:latin typeface="나눔고딕" panose="020D0604000000000000" pitchFamily="50" charset="-127"/>
+                        <a:ea typeface="나눔고딕" panose="020D0604000000000000" pitchFamily="50" charset="-127"/>
+                      </a:endParaRPr>
+                    </a:p>
+                  </a:txBody>
+                  <a:tcPr anchor="ctr">
+                    <a:lnL w="3175" cap="flat" cmpd="sng" algn="ctr">
+                      <a:noFill/>
+                      <a:prstDash val="solid"/>
+                      <a:round/>
+                      <a:headEnd type="none" w="med" len="med"/>
+                      <a:tailEnd type="none" w="med" len="med"/>
+                    </a:lnL>
+                    <a:lnR w="3175" cap="flat" cmpd="sng" algn="ctr">
+                      <a:solidFill>
+                        <a:schemeClr val="bg1">
+                          <a:lumMod val="75000"/>
+                        </a:schemeClr>
+                      </a:solidFill>
+                      <a:prstDash val="solid"/>
+                      <a:round/>
+                      <a:headEnd type="none" w="med" len="med"/>
+                      <a:tailEnd type="none" w="med" len="med"/>
+                    </a:lnR>
+                    <a:lnT w="3175" cap="flat" cmpd="sng" algn="ctr">
+                      <a:solidFill>
+                        <a:schemeClr val="bg1">
+                          <a:lumMod val="75000"/>
+                        </a:schemeClr>
+                      </a:solidFill>
+                      <a:prstDash val="solid"/>
+                      <a:round/>
+                      <a:headEnd type="none" w="med" len="med"/>
+                      <a:tailEnd type="none" w="med" len="med"/>
+                    </a:lnT>
+                    <a:lnB w="3175" cap="flat" cmpd="sng" algn="ctr">
+                      <a:solidFill>
+                        <a:schemeClr val="bg1">
+                          <a:lumMod val="75000"/>
+                        </a:schemeClr>
+                      </a:solidFill>
+                      <a:prstDash val="solid"/>
+                      <a:round/>
+                      <a:headEnd type="none" w="med" len="med"/>
+                      <a:tailEnd type="none" w="med" len="med"/>
+                    </a:lnB>
+                    <a:lnTlToBr w="12700" cmpd="sng">
+                      <a:noFill/>
+                      <a:prstDash val="solid"/>
+                    </a:lnTlToBr>
+                    <a:lnBlToTr w="12700" cmpd="sng">
+                      <a:noFill/>
+                      <a:prstDash val="solid"/>
+                    </a:lnBlToTr>
+                    <a:noFill/>
+                  </a:tcPr>
+                </a:tc>
+                <a:tc>
+                  <a:txBody>
+                    <a:bodyPr/>
+                    <a:lstStyle/>
+                    <a:p>
+                      <a:pPr marL="0" marR="0" indent="0" algn="l" defTabSz="914400" rtl="0" eaLnBrk="1" fontAlgn="auto" latinLnBrk="1" hangingPunct="1">
+                        <a:lnSpc>
+                          <a:spcPct val="150000"/>
+                        </a:lnSpc>
+                        <a:spcBef>
+                          <a:spcPts val="0"/>
+                        </a:spcBef>
+                        <a:spcAft>
+                          <a:spcPts val="0"/>
+                        </a:spcAft>
+                        <a:buClrTx/>
+                        <a:buSzTx/>
+                        <a:buFontTx/>
+                        <a:buNone/>
+                        <a:tabLst/>
+                        <a:defRPr/>
+                      </a:pPr>
+                      <a:r>
+                        <a:rPr lang="ko-KR" altLang="en-US" sz="700" dirty="0">
+                          <a:solidFill>
+                            <a:schemeClr val="tx1">
+                              <a:lumMod val="50000"/>
+                              <a:lumOff val="50000"/>
+                            </a:schemeClr>
+                          </a:solidFill>
+                          <a:latin typeface="나눔고딕" panose="020D0604000000000000" pitchFamily="50" charset="-127"/>
+                          <a:ea typeface="나눔고딕" panose="020D0604000000000000" pitchFamily="50" charset="-127"/>
+                          <a:sym typeface="Wingdings" panose="05000000000000000000" pitchFamily="2" charset="2"/>
+                        </a:rPr>
+                        <a:t>일러스트로 이미지 삽입</a:t>
+                      </a:r>
+                      <a:endParaRPr lang="en-US" altLang="ko-KR" sz="700" dirty="0">
+                        <a:solidFill>
+                          <a:schemeClr val="tx1">
+                            <a:lumMod val="50000"/>
+                            <a:lumOff val="50000"/>
+                          </a:schemeClr>
+                        </a:solidFill>
+                        <a:latin typeface="나눔고딕" panose="020D0604000000000000" pitchFamily="50" charset="-127"/>
+                        <a:ea typeface="나눔고딕" panose="020D0604000000000000" pitchFamily="50" charset="-127"/>
+                        <a:sym typeface="Wingdings" panose="05000000000000000000" pitchFamily="2" charset="2"/>
+                      </a:endParaRPr>
+                    </a:p>
+                  </a:txBody>
+                  <a:tcPr anchor="ctr">
+                    <a:lnL w="3175" cap="flat" cmpd="sng" algn="ctr">
+                      <a:solidFill>
+                        <a:schemeClr val="bg1">
+                          <a:lumMod val="75000"/>
+                        </a:schemeClr>
+                      </a:solidFill>
+                      <a:prstDash val="solid"/>
+                      <a:round/>
+                      <a:headEnd type="none" w="med" len="med"/>
+                      <a:tailEnd type="none" w="med" len="med"/>
+                    </a:lnL>
+                    <a:lnR w="3175" cap="flat" cmpd="sng" algn="ctr">
+                      <a:noFill/>
+                      <a:prstDash val="solid"/>
+                      <a:round/>
+                      <a:headEnd type="none" w="med" len="med"/>
+                      <a:tailEnd type="none" w="med" len="med"/>
+                    </a:lnR>
+                    <a:lnT w="3175" cap="flat" cmpd="sng" algn="ctr">
+                      <a:solidFill>
+                        <a:schemeClr val="bg1">
+                          <a:lumMod val="75000"/>
+                        </a:schemeClr>
+                      </a:solidFill>
+                      <a:prstDash val="solid"/>
+                      <a:round/>
+                      <a:headEnd type="none" w="med" len="med"/>
+                      <a:tailEnd type="none" w="med" len="med"/>
+                    </a:lnT>
+                    <a:lnB w="3175" cap="flat" cmpd="sng" algn="ctr">
+                      <a:solidFill>
+                        <a:schemeClr val="bg1">
+                          <a:lumMod val="75000"/>
+                        </a:schemeClr>
+                      </a:solidFill>
+                      <a:prstDash val="solid"/>
+                      <a:round/>
+                      <a:headEnd type="none" w="med" len="med"/>
+                      <a:tailEnd type="none" w="med" len="med"/>
+                    </a:lnB>
+                    <a:lnTlToBr w="12700" cmpd="sng">
+                      <a:noFill/>
+                      <a:prstDash val="solid"/>
+                    </a:lnTlToBr>
+                    <a:lnBlToTr w="12700" cmpd="sng">
+                      <a:noFill/>
+                      <a:prstDash val="solid"/>
+                    </a:lnBlToTr>
+                    <a:noFill/>
+                  </a:tcPr>
+                </a:tc>
+                <a:extLst>
+                  <a:ext uri="{0D108BD9-81ED-4DB2-BD59-A6C34878D82A}">
+                    <a16:rowId xmlns:a16="http://schemas.microsoft.com/office/drawing/2014/main" val="10003"/>
+                  </a:ext>
+                </a:extLst>
+              </a:tr>
+              <a:tr h="428640">
+                <a:tc>
+                  <a:txBody>
+                    <a:bodyPr/>
+                    <a:lstStyle/>
+                    <a:p>
+                      <a:pPr algn="ctr" latinLnBrk="1">
+                        <a:lnSpc>
+                          <a:spcPct val="150000"/>
+                        </a:lnSpc>
+                      </a:pPr>
+                      <a:r>
+                        <a:rPr lang="en-US" altLang="ko-KR" sz="700" b="0" dirty="0">
+                          <a:solidFill>
+                            <a:schemeClr val="tx1">
+                              <a:lumMod val="50000"/>
+                              <a:lumOff val="50000"/>
+                            </a:schemeClr>
+                          </a:solidFill>
+                          <a:latin typeface="나눔고딕" panose="020D0604000000000000" pitchFamily="50" charset="-127"/>
+                          <a:ea typeface="나눔고딕" panose="020D0604000000000000" pitchFamily="50" charset="-127"/>
+                        </a:rPr>
+                        <a:t>5</a:t>
+                      </a:r>
+                      <a:endParaRPr lang="ko-KR" altLang="en-US" sz="700" b="0" dirty="0">
+                        <a:solidFill>
+                          <a:schemeClr val="tx1">
+                            <a:lumMod val="50000"/>
+                            <a:lumOff val="50000"/>
+                          </a:schemeClr>
+                        </a:solidFill>
+                        <a:latin typeface="나눔고딕" panose="020D0604000000000000" pitchFamily="50" charset="-127"/>
+                        <a:ea typeface="나눔고딕" panose="020D0604000000000000" pitchFamily="50" charset="-127"/>
+                      </a:endParaRPr>
+                    </a:p>
+                  </a:txBody>
+                  <a:tcPr anchor="ctr">
+                    <a:lnL w="3175" cap="flat" cmpd="sng" algn="ctr">
+                      <a:noFill/>
+                      <a:prstDash val="solid"/>
+                      <a:round/>
+                      <a:headEnd type="none" w="med" len="med"/>
+                      <a:tailEnd type="none" w="med" len="med"/>
+                    </a:lnL>
+                    <a:lnR w="3175" cap="flat" cmpd="sng" algn="ctr">
+                      <a:solidFill>
+                        <a:schemeClr val="bg1">
+                          <a:lumMod val="75000"/>
+                        </a:schemeClr>
+                      </a:solidFill>
+                      <a:prstDash val="solid"/>
+                      <a:round/>
+                      <a:headEnd type="none" w="med" len="med"/>
+                      <a:tailEnd type="none" w="med" len="med"/>
+                    </a:lnR>
+                    <a:lnT w="3175" cap="flat" cmpd="sng" algn="ctr">
+                      <a:solidFill>
+                        <a:schemeClr val="bg1">
+                          <a:lumMod val="75000"/>
+                        </a:schemeClr>
+                      </a:solidFill>
+                      <a:prstDash val="solid"/>
+                      <a:round/>
+                      <a:headEnd type="none" w="med" len="med"/>
+                      <a:tailEnd type="none" w="med" len="med"/>
+                    </a:lnT>
+                    <a:lnB w="3175" cap="flat" cmpd="sng" algn="ctr">
+                      <a:solidFill>
+                        <a:schemeClr val="bg1">
+                          <a:lumMod val="75000"/>
+                        </a:schemeClr>
+                      </a:solidFill>
+                      <a:prstDash val="solid"/>
+                      <a:round/>
+                      <a:headEnd type="none" w="med" len="med"/>
+                      <a:tailEnd type="none" w="med" len="med"/>
+                    </a:lnB>
+                    <a:lnTlToBr w="12700" cmpd="sng">
+                      <a:noFill/>
+                      <a:prstDash val="solid"/>
+                    </a:lnTlToBr>
+                    <a:lnBlToTr w="12700" cmpd="sng">
+                      <a:noFill/>
+                      <a:prstDash val="solid"/>
+                    </a:lnBlToTr>
+                    <a:noFill/>
+                  </a:tcPr>
+                </a:tc>
+                <a:tc>
+                  <a:txBody>
+                    <a:bodyPr/>
+                    <a:lstStyle/>
+                    <a:p>
+                      <a:pPr marL="0" marR="0" indent="0" algn="l" defTabSz="914400" rtl="0" eaLnBrk="1" fontAlgn="auto" latinLnBrk="1" hangingPunct="1">
+                        <a:lnSpc>
+                          <a:spcPct val="150000"/>
+                        </a:lnSpc>
+                        <a:spcBef>
+                          <a:spcPts val="0"/>
+                        </a:spcBef>
+                        <a:spcAft>
+                          <a:spcPts val="0"/>
+                        </a:spcAft>
+                        <a:buClrTx/>
+                        <a:buSzTx/>
+                        <a:buFontTx/>
+                        <a:buNone/>
+                        <a:tabLst/>
+                        <a:defRPr/>
+                      </a:pPr>
+                      <a:endParaRPr lang="en-US" altLang="ko-KR" sz="700" dirty="0">
+                        <a:solidFill>
+                          <a:schemeClr val="tx1">
+                            <a:lumMod val="50000"/>
+                            <a:lumOff val="50000"/>
+                          </a:schemeClr>
+                        </a:solidFill>
+                        <a:latin typeface="나눔고딕" panose="020D0604000000000000" pitchFamily="50" charset="-127"/>
+                        <a:ea typeface="나눔고딕" panose="020D0604000000000000" pitchFamily="50" charset="-127"/>
+                        <a:sym typeface="Wingdings" panose="05000000000000000000" pitchFamily="2" charset="2"/>
+                      </a:endParaRPr>
+                    </a:p>
+                  </a:txBody>
+                  <a:tcPr anchor="ctr">
+                    <a:lnL w="3175" cap="flat" cmpd="sng" algn="ctr">
+                      <a:solidFill>
+                        <a:schemeClr val="bg1">
+                          <a:lumMod val="75000"/>
+                        </a:schemeClr>
+                      </a:solidFill>
+                      <a:prstDash val="solid"/>
+                      <a:round/>
+                      <a:headEnd type="none" w="med" len="med"/>
+                      <a:tailEnd type="none" w="med" len="med"/>
+                    </a:lnL>
+                    <a:lnR w="3175" cap="flat" cmpd="sng" algn="ctr">
+                      <a:noFill/>
+                      <a:prstDash val="solid"/>
+                      <a:round/>
+                      <a:headEnd type="none" w="med" len="med"/>
+                      <a:tailEnd type="none" w="med" len="med"/>
+                    </a:lnR>
+                    <a:lnT w="3175" cap="flat" cmpd="sng" algn="ctr">
+                      <a:solidFill>
+                        <a:schemeClr val="bg1">
+                          <a:lumMod val="75000"/>
+                        </a:schemeClr>
+                      </a:solidFill>
+                      <a:prstDash val="solid"/>
+                      <a:round/>
+                      <a:headEnd type="none" w="med" len="med"/>
+                      <a:tailEnd type="none" w="med" len="med"/>
+                    </a:lnT>
+                    <a:lnB w="3175" cap="flat" cmpd="sng" algn="ctr">
+                      <a:solidFill>
+                        <a:schemeClr val="bg1">
+                          <a:lumMod val="75000"/>
+                        </a:schemeClr>
+                      </a:solidFill>
+                      <a:prstDash val="solid"/>
+                      <a:round/>
+                      <a:headEnd type="none" w="med" len="med"/>
+                      <a:tailEnd type="none" w="med" len="med"/>
+                    </a:lnB>
+                    <a:lnTlToBr w="12700" cmpd="sng">
+                      <a:noFill/>
+                      <a:prstDash val="solid"/>
+                    </a:lnTlToBr>
+                    <a:lnBlToTr w="12700" cmpd="sng">
+                      <a:noFill/>
+                      <a:prstDash val="solid"/>
+                    </a:lnBlToTr>
+                    <a:noFill/>
+                  </a:tcPr>
+                </a:tc>
+                <a:extLst>
+                  <a:ext uri="{0D108BD9-81ED-4DB2-BD59-A6C34878D82A}">
+                    <a16:rowId xmlns:a16="http://schemas.microsoft.com/office/drawing/2014/main" val="10004"/>
+                  </a:ext>
+                </a:extLst>
+              </a:tr>
+              <a:tr h="428640">
+                <a:tc>
+                  <a:txBody>
+                    <a:bodyPr/>
+                    <a:lstStyle/>
+                    <a:p>
+                      <a:pPr algn="ctr" latinLnBrk="1">
+                        <a:lnSpc>
+                          <a:spcPct val="150000"/>
+                        </a:lnSpc>
+                      </a:pPr>
+                      <a:r>
+                        <a:rPr lang="en-US" altLang="ko-KR" sz="700" b="0" dirty="0">
+                          <a:solidFill>
+                            <a:schemeClr val="tx1">
+                              <a:lumMod val="50000"/>
+                              <a:lumOff val="50000"/>
+                            </a:schemeClr>
+                          </a:solidFill>
+                          <a:latin typeface="나눔고딕" panose="020D0604000000000000" pitchFamily="50" charset="-127"/>
+                          <a:ea typeface="나눔고딕" panose="020D0604000000000000" pitchFamily="50" charset="-127"/>
+                        </a:rPr>
+                        <a:t>6</a:t>
+                      </a:r>
+                      <a:endParaRPr lang="ko-KR" altLang="en-US" sz="700" b="0" dirty="0">
+                        <a:solidFill>
+                          <a:schemeClr val="tx1">
+                            <a:lumMod val="50000"/>
+                            <a:lumOff val="50000"/>
+                          </a:schemeClr>
+                        </a:solidFill>
+                        <a:latin typeface="나눔고딕" panose="020D0604000000000000" pitchFamily="50" charset="-127"/>
+                        <a:ea typeface="나눔고딕" panose="020D0604000000000000" pitchFamily="50" charset="-127"/>
+                      </a:endParaRPr>
+                    </a:p>
+                  </a:txBody>
+                  <a:tcPr anchor="ctr">
+                    <a:lnL w="3175" cap="flat" cmpd="sng" algn="ctr">
+                      <a:noFill/>
+                      <a:prstDash val="solid"/>
+                      <a:round/>
+                      <a:headEnd type="none" w="med" len="med"/>
+                      <a:tailEnd type="none" w="med" len="med"/>
+                    </a:lnL>
+                    <a:lnR w="3175" cap="flat" cmpd="sng" algn="ctr">
+                      <a:solidFill>
+                        <a:schemeClr val="bg1">
+                          <a:lumMod val="75000"/>
+                        </a:schemeClr>
+                      </a:solidFill>
+                      <a:prstDash val="solid"/>
+                      <a:round/>
+                      <a:headEnd type="none" w="med" len="med"/>
+                      <a:tailEnd type="none" w="med" len="med"/>
+                    </a:lnR>
+                    <a:lnT w="3175" cap="flat" cmpd="sng" algn="ctr">
+                      <a:solidFill>
+                        <a:schemeClr val="bg1">
+                          <a:lumMod val="75000"/>
+                        </a:schemeClr>
+                      </a:solidFill>
+                      <a:prstDash val="solid"/>
+                      <a:round/>
+                      <a:headEnd type="none" w="med" len="med"/>
+                      <a:tailEnd type="none" w="med" len="med"/>
+                    </a:lnT>
+                    <a:lnB w="3175" cap="flat" cmpd="sng" algn="ctr">
+                      <a:noFill/>
+                      <a:prstDash val="solid"/>
+                      <a:round/>
+                      <a:headEnd type="none" w="med" len="med"/>
+                      <a:tailEnd type="none" w="med" len="med"/>
+                    </a:lnB>
+                    <a:lnTlToBr w="12700" cmpd="sng">
+                      <a:noFill/>
+                      <a:prstDash val="solid"/>
+                    </a:lnTlToBr>
+                    <a:lnBlToTr w="12700" cmpd="sng">
+                      <a:noFill/>
+                      <a:prstDash val="solid"/>
+                    </a:lnBlToTr>
+                    <a:noFill/>
+                  </a:tcPr>
+                </a:tc>
+                <a:tc>
+                  <a:txBody>
+                    <a:bodyPr/>
+                    <a:lstStyle/>
+                    <a:p>
+                      <a:pPr marL="0" marR="0" indent="0" algn="l" defTabSz="914400" rtl="0" eaLnBrk="1" fontAlgn="auto" latinLnBrk="1" hangingPunct="1">
+                        <a:lnSpc>
+                          <a:spcPct val="150000"/>
+                        </a:lnSpc>
+                        <a:spcBef>
+                          <a:spcPts val="0"/>
+                        </a:spcBef>
+                        <a:spcAft>
+                          <a:spcPts val="0"/>
+                        </a:spcAft>
+                        <a:buClrTx/>
+                        <a:buSzTx/>
+                        <a:buFontTx/>
+                        <a:buNone/>
+                        <a:tabLst/>
+                        <a:defRPr/>
+                      </a:pPr>
+                      <a:endParaRPr lang="en-US" altLang="ko-KR" sz="700" dirty="0">
+                        <a:solidFill>
+                          <a:schemeClr val="tx1">
+                            <a:lumMod val="50000"/>
+                            <a:lumOff val="50000"/>
+                          </a:schemeClr>
+                        </a:solidFill>
+                        <a:latin typeface="나눔고딕" panose="020D0604000000000000" pitchFamily="50" charset="-127"/>
+                        <a:ea typeface="나눔고딕" panose="020D0604000000000000" pitchFamily="50" charset="-127"/>
+                        <a:sym typeface="Wingdings" panose="05000000000000000000" pitchFamily="2" charset="2"/>
+                      </a:endParaRPr>
+                    </a:p>
+                  </a:txBody>
+                  <a:tcPr anchor="ctr">
+                    <a:lnL w="3175" cap="flat" cmpd="sng" algn="ctr">
+                      <a:solidFill>
+                        <a:schemeClr val="bg1">
+                          <a:lumMod val="75000"/>
+                        </a:schemeClr>
+                      </a:solidFill>
+                      <a:prstDash val="solid"/>
+                      <a:round/>
+                      <a:headEnd type="none" w="med" len="med"/>
+                      <a:tailEnd type="none" w="med" len="med"/>
+                    </a:lnL>
+                    <a:lnR w="3175" cap="flat" cmpd="sng" algn="ctr">
+                      <a:noFill/>
+                      <a:prstDash val="solid"/>
+                      <a:round/>
+                      <a:headEnd type="none" w="med" len="med"/>
+                      <a:tailEnd type="none" w="med" len="med"/>
+                    </a:lnR>
+                    <a:lnT w="3175" cap="flat" cmpd="sng" algn="ctr">
+                      <a:solidFill>
+                        <a:schemeClr val="bg1">
+                          <a:lumMod val="75000"/>
+                        </a:schemeClr>
+                      </a:solidFill>
+                      <a:prstDash val="solid"/>
+                      <a:round/>
+                      <a:headEnd type="none" w="med" len="med"/>
+                      <a:tailEnd type="none" w="med" len="med"/>
+                    </a:lnT>
+                    <a:lnB w="3175" cap="flat" cmpd="sng" algn="ctr">
+                      <a:noFill/>
+                      <a:prstDash val="solid"/>
+                      <a:round/>
+                      <a:headEnd type="none" w="med" len="med"/>
+                      <a:tailEnd type="none" w="med" len="med"/>
+                    </a:lnB>
+                    <a:lnTlToBr w="12700" cmpd="sng">
+                      <a:noFill/>
+                      <a:prstDash val="solid"/>
+                    </a:lnTlToBr>
+                    <a:lnBlToTr w="12700" cmpd="sng">
+                      <a:noFill/>
+                      <a:prstDash val="solid"/>
+                    </a:lnBlToTr>
+                    <a:noFill/>
+                  </a:tcPr>
+                </a:tc>
+                <a:extLst>
+                  <a:ext uri="{0D108BD9-81ED-4DB2-BD59-A6C34878D82A}">
+                    <a16:rowId xmlns:a16="http://schemas.microsoft.com/office/drawing/2014/main" val="10005"/>
+                  </a:ext>
+                </a:extLst>
+              </a:tr>
+            </a:tbl>
+          </a:graphicData>
+        </a:graphic>
+      </p:graphicFrame>
+      <p:sp>
+        <p:nvSpPr>
+          <p:cNvPr id="107" name="TextBox 106">
+            <a:extLst>
+              <a:ext uri="{FF2B5EF4-FFF2-40B4-BE49-F238E27FC236}">
+                <a16:creationId xmlns:a16="http://schemas.microsoft.com/office/drawing/2014/main" id="{1771AE34-32B3-4928-81B3-B37FCA5AC037}"/>
+              </a:ext>
+            </a:extLst>
+          </p:cNvPr>
+          <p:cNvSpPr txBox="1"/>
+          <p:nvPr/>
+        </p:nvSpPr>
+        <p:spPr>
+          <a:xfrm>
+            <a:off x="264479" y="4548857"/>
+            <a:ext cx="1526578" cy="307777"/>
+          </a:xfrm>
+          <a:prstGeom prst="rect">
+            <a:avLst/>
+          </a:prstGeom>
+          <a:noFill/>
+        </p:spPr>
+        <p:txBody>
+          <a:bodyPr wrap="square" rtlCol="0">
+            <a:spAutoFit/>
+          </a:bodyPr>
+          <a:lstStyle/>
+          <a:p>
+            <a:r>
+              <a:rPr lang="ko-KR" altLang="en-US" sz="1400" dirty="0">
+                <a:solidFill>
+                  <a:schemeClr val="bg1"/>
+                </a:solidFill>
+                <a:latin typeface="나눔고딕" panose="020D0604000000000000" pitchFamily="50" charset="-127"/>
+                <a:ea typeface="나눔고딕" panose="020D0604000000000000" pitchFamily="50" charset="-127"/>
+              </a:rPr>
+              <a:t>스토리보드</a:t>
+            </a:r>
+            <a:endParaRPr lang="en-US" altLang="ko-KR" sz="1400" dirty="0">
+              <a:solidFill>
+                <a:schemeClr val="bg1"/>
+              </a:solidFill>
+              <a:latin typeface="나눔고딕" panose="020D0604000000000000" pitchFamily="50" charset="-127"/>
+              <a:ea typeface="나눔고딕" panose="020D0604000000000000" pitchFamily="50" charset="-127"/>
+            </a:endParaRPr>
+          </a:p>
+        </p:txBody>
+      </p:sp>
+      <p:pic>
+        <p:nvPicPr>
+          <p:cNvPr id="3" name="그림 2">
+            <a:extLst>
+              <a:ext uri="{FF2B5EF4-FFF2-40B4-BE49-F238E27FC236}">
+                <a16:creationId xmlns:a16="http://schemas.microsoft.com/office/drawing/2014/main" id="{00820127-FA31-439A-ACE2-10DB41FCA281}"/>
+              </a:ext>
+            </a:extLst>
+          </p:cNvPr>
+          <p:cNvPicPr>
+            <a:picLocks noChangeAspect="1"/>
+          </p:cNvPicPr>
+          <p:nvPr/>
+        </p:nvPicPr>
+        <p:blipFill>
+          <a:blip r:embed="rId2"/>
+          <a:stretch>
+            <a:fillRect/>
+          </a:stretch>
+        </p:blipFill>
+        <p:spPr>
+          <a:xfrm>
+            <a:off x="395536" y="332581"/>
+            <a:ext cx="2319237" cy="5049838"/>
+          </a:xfrm>
+          <a:prstGeom prst="rect">
+            <a:avLst/>
+          </a:prstGeom>
+        </p:spPr>
+      </p:pic>
+      <p:sp>
+        <p:nvSpPr>
+          <p:cNvPr id="4" name="직사각형 3">
+            <a:extLst>
+              <a:ext uri="{FF2B5EF4-FFF2-40B4-BE49-F238E27FC236}">
+                <a16:creationId xmlns:a16="http://schemas.microsoft.com/office/drawing/2014/main" id="{36E6E174-0443-4D6E-942B-3CB8B39086F0}"/>
+              </a:ext>
+            </a:extLst>
+          </p:cNvPr>
+          <p:cNvSpPr/>
+          <p:nvPr/>
+        </p:nvSpPr>
+        <p:spPr>
+          <a:xfrm>
+            <a:off x="3131840" y="337220"/>
+            <a:ext cx="2448272" cy="4968552"/>
+          </a:xfrm>
+          <a:prstGeom prst="rect">
+            <a:avLst/>
+          </a:prstGeom>
+          <a:noFill/>
+          <a:ln w="12700">
+            <a:solidFill>
+              <a:schemeClr val="accent5">
+                <a:lumMod val="40000"/>
+                <a:lumOff val="60000"/>
+              </a:schemeClr>
+            </a:solidFill>
+          </a:ln>
+        </p:spPr>
+        <p:style>
+          <a:lnRef idx="2">
+            <a:schemeClr val="accent1">
+              <a:shade val="50000"/>
+            </a:schemeClr>
+          </a:lnRef>
+          <a:fillRef idx="1">
+            <a:schemeClr val="accent1"/>
+          </a:fillRef>
+          <a:effectRef idx="0">
+            <a:schemeClr val="accent1"/>
+          </a:effectRef>
+          <a:fontRef idx="minor">
+            <a:schemeClr val="lt1"/>
+          </a:fontRef>
+        </p:style>
+        <p:txBody>
+          <a:bodyPr wrap="none" rtlCol="0" anchor="ctr"/>
+          <a:lstStyle/>
+          <a:p>
+            <a:pPr algn="ctr"/>
+            <a:endParaRPr lang="ko-KR" altLang="en-US" sz="850" dirty="0">
+              <a:solidFill>
+                <a:srgbClr val="000000"/>
+              </a:solidFill>
+              <a:latin typeface="Segoe UI" panose="020B0502040204020203" pitchFamily="34" charset="0"/>
+              <a:cs typeface="Segoe UI" panose="020B0502040204020203" pitchFamily="34" charset="0"/>
+            </a:endParaRPr>
+          </a:p>
+        </p:txBody>
+      </p:sp>
+      <p:sp>
+        <p:nvSpPr>
+          <p:cNvPr id="47" name="직사각형 46">
+            <a:extLst>
+              <a:ext uri="{FF2B5EF4-FFF2-40B4-BE49-F238E27FC236}">
+                <a16:creationId xmlns:a16="http://schemas.microsoft.com/office/drawing/2014/main" id="{352FF2C1-B405-402D-9253-D965D9748BF1}"/>
+              </a:ext>
+            </a:extLst>
+          </p:cNvPr>
+          <p:cNvSpPr/>
+          <p:nvPr/>
+        </p:nvSpPr>
+        <p:spPr>
+          <a:xfrm>
+            <a:off x="3131840" y="1129308"/>
+            <a:ext cx="2448272" cy="1577734"/>
+          </a:xfrm>
+          <a:prstGeom prst="rect">
+            <a:avLst/>
+          </a:prstGeom>
+          <a:solidFill>
+            <a:schemeClr val="tx1"/>
+          </a:solidFill>
+          <a:ln w="12700">
+            <a:solidFill>
+              <a:schemeClr val="accent5">
+                <a:lumMod val="40000"/>
+                <a:lumOff val="60000"/>
+              </a:schemeClr>
+            </a:solidFill>
+          </a:ln>
+        </p:spPr>
+        <p:style>
+          <a:lnRef idx="2">
+            <a:schemeClr val="accent1">
+              <a:shade val="50000"/>
+            </a:schemeClr>
+          </a:lnRef>
+          <a:fillRef idx="1">
+            <a:schemeClr val="accent1"/>
+          </a:fillRef>
+          <a:effectRef idx="0">
+            <a:schemeClr val="accent1"/>
+          </a:effectRef>
+          <a:fontRef idx="minor">
+            <a:schemeClr val="lt1"/>
+          </a:fontRef>
+        </p:style>
+        <p:txBody>
+          <a:bodyPr wrap="none" rtlCol="0" anchor="ctr"/>
+          <a:lstStyle/>
+          <a:p>
+            <a:pPr algn="ctr"/>
+            <a:endParaRPr lang="ko-KR" altLang="en-US" sz="850" dirty="0">
+              <a:solidFill>
+                <a:srgbClr val="000000"/>
+              </a:solidFill>
+              <a:latin typeface="Segoe UI" panose="020B0502040204020203" pitchFamily="34" charset="0"/>
+              <a:cs typeface="Segoe UI" panose="020B0502040204020203" pitchFamily="34" charset="0"/>
+            </a:endParaRPr>
+          </a:p>
+        </p:txBody>
+      </p:sp>
+      <p:sp>
+        <p:nvSpPr>
+          <p:cNvPr id="5" name="직사각형 4">
+            <a:extLst>
+              <a:ext uri="{FF2B5EF4-FFF2-40B4-BE49-F238E27FC236}">
+                <a16:creationId xmlns:a16="http://schemas.microsoft.com/office/drawing/2014/main" id="{00EB563F-B80C-4B81-A63F-E22AAC5937AC}"/>
+              </a:ext>
+            </a:extLst>
+          </p:cNvPr>
+          <p:cNvSpPr/>
+          <p:nvPr/>
+        </p:nvSpPr>
+        <p:spPr>
+          <a:xfrm>
+            <a:off x="3203848" y="481236"/>
+            <a:ext cx="1080120" cy="216024"/>
+          </a:xfrm>
+          <a:prstGeom prst="rect">
+            <a:avLst/>
+          </a:prstGeom>
+          <a:noFill/>
+          <a:ln w="12700">
+            <a:noFill/>
+          </a:ln>
+        </p:spPr>
+        <p:style>
+          <a:lnRef idx="2">
+            <a:schemeClr val="accent1">
+              <a:shade val="50000"/>
+            </a:schemeClr>
+          </a:lnRef>
+          <a:fillRef idx="1">
+            <a:schemeClr val="accent1"/>
+          </a:fillRef>
+          <a:effectRef idx="0">
+            <a:schemeClr val="accent1"/>
+          </a:effectRef>
+          <a:fontRef idx="minor">
+            <a:schemeClr val="lt1"/>
+          </a:fontRef>
+        </p:style>
+        <p:txBody>
+          <a:bodyPr wrap="none" rtlCol="0" anchor="ctr"/>
+          <a:lstStyle/>
+          <a:p>
+            <a:r>
+              <a:rPr lang="ko-KR" altLang="en-US" sz="850" dirty="0" err="1">
+                <a:solidFill>
+                  <a:srgbClr val="000000"/>
+                </a:solidFill>
+                <a:latin typeface="Segoe UI" panose="020B0502040204020203" pitchFamily="34" charset="0"/>
+                <a:cs typeface="Segoe UI" panose="020B0502040204020203" pitchFamily="34" charset="0"/>
+              </a:rPr>
+              <a:t>그린스터디북스</a:t>
+            </a:r>
+            <a:endParaRPr lang="ko-KR" altLang="en-US" sz="850" dirty="0">
+              <a:solidFill>
+                <a:srgbClr val="000000"/>
+              </a:solidFill>
+              <a:latin typeface="Segoe UI" panose="020B0502040204020203" pitchFamily="34" charset="0"/>
+              <a:cs typeface="Segoe UI" panose="020B0502040204020203" pitchFamily="34" charset="0"/>
+            </a:endParaRPr>
+          </a:p>
+        </p:txBody>
+      </p:sp>
+      <p:sp>
+        <p:nvSpPr>
+          <p:cNvPr id="6" name="사각형: 둥근 모서리 5">
+            <a:extLst>
+              <a:ext uri="{FF2B5EF4-FFF2-40B4-BE49-F238E27FC236}">
+                <a16:creationId xmlns:a16="http://schemas.microsoft.com/office/drawing/2014/main" id="{985188AD-B54C-40C5-9EAA-59A3666756DC}"/>
+              </a:ext>
+            </a:extLst>
+          </p:cNvPr>
+          <p:cNvSpPr/>
+          <p:nvPr/>
+        </p:nvSpPr>
+        <p:spPr>
+          <a:xfrm>
+            <a:off x="4211960" y="481236"/>
+            <a:ext cx="288032" cy="216024"/>
+          </a:xfrm>
+          <a:prstGeom prst="roundRect">
+            <a:avLst/>
+          </a:prstGeom>
+          <a:noFill/>
+          <a:ln w="12700">
+            <a:solidFill>
+              <a:schemeClr val="accent5">
+                <a:lumMod val="20000"/>
+                <a:lumOff val="80000"/>
+              </a:schemeClr>
+            </a:solidFill>
+          </a:ln>
+        </p:spPr>
+        <p:style>
+          <a:lnRef idx="2">
+            <a:schemeClr val="accent1">
+              <a:shade val="50000"/>
+            </a:schemeClr>
+          </a:lnRef>
+          <a:fillRef idx="1">
+            <a:schemeClr val="accent1"/>
+          </a:fillRef>
+          <a:effectRef idx="0">
+            <a:schemeClr val="accent1"/>
+          </a:effectRef>
+          <a:fontRef idx="minor">
+            <a:schemeClr val="lt1"/>
+          </a:fontRef>
+        </p:style>
+        <p:txBody>
+          <a:bodyPr wrap="none" rtlCol="0" anchor="ctr"/>
+          <a:lstStyle/>
+          <a:p>
+            <a:pPr algn="ctr"/>
+            <a:endParaRPr lang="ko-KR" altLang="en-US" sz="850" dirty="0">
+              <a:solidFill>
+                <a:srgbClr val="000000"/>
+              </a:solidFill>
+              <a:latin typeface="Segoe UI" panose="020B0502040204020203" pitchFamily="34" charset="0"/>
+              <a:cs typeface="Segoe UI" panose="020B0502040204020203" pitchFamily="34" charset="0"/>
+            </a:endParaRPr>
+          </a:p>
+        </p:txBody>
+      </p:sp>
+      <p:grpSp>
+        <p:nvGrpSpPr>
+          <p:cNvPr id="51" name="그룹 50">
+            <a:extLst>
+              <a:ext uri="{FF2B5EF4-FFF2-40B4-BE49-F238E27FC236}">
+                <a16:creationId xmlns:a16="http://schemas.microsoft.com/office/drawing/2014/main" id="{46AB7E2A-9DE4-4CB0-AB94-32F43CFD9714}"/>
+              </a:ext>
+            </a:extLst>
+          </p:cNvPr>
+          <p:cNvGrpSpPr/>
+          <p:nvPr/>
+        </p:nvGrpSpPr>
+        <p:grpSpPr>
+          <a:xfrm>
+            <a:off x="4355976" y="409228"/>
+            <a:ext cx="388720" cy="200055"/>
+            <a:chOff x="4727047" y="5307508"/>
+            <a:chExt cx="388720" cy="200055"/>
+          </a:xfrm>
+        </p:grpSpPr>
+        <p:sp>
+          <p:nvSpPr>
+            <p:cNvPr id="52" name="타원 51">
+              <a:extLst>
+                <a:ext uri="{FF2B5EF4-FFF2-40B4-BE49-F238E27FC236}">
+                  <a16:creationId xmlns:a16="http://schemas.microsoft.com/office/drawing/2014/main" id="{1752C304-DD90-49BA-93A1-186E6E05046B}"/>
+                </a:ext>
+              </a:extLst>
+            </p:cNvPr>
+            <p:cNvSpPr/>
+            <p:nvPr/>
+          </p:nvSpPr>
+          <p:spPr>
+            <a:xfrm>
+              <a:off x="4831407" y="5317535"/>
+              <a:ext cx="180000" cy="180000"/>
+            </a:xfrm>
+            <a:prstGeom prst="ellipse">
+              <a:avLst/>
+            </a:prstGeom>
+            <a:solidFill>
+              <a:srgbClr val="FF0000"/>
+            </a:solidFill>
+            <a:ln>
+              <a:noFill/>
+            </a:ln>
+            <a:effectLst>
+              <a:glow rad="50800">
+                <a:srgbClr val="FF0000">
+                  <a:alpha val="30000"/>
+                </a:srgbClr>
+              </a:glow>
+              <a:softEdge rad="0"/>
+            </a:effectLst>
+          </p:spPr>
+          <p:style>
+            <a:lnRef idx="2">
+              <a:schemeClr val="accent1">
+                <a:shade val="50000"/>
+              </a:schemeClr>
+            </a:lnRef>
+            <a:fillRef idx="1">
+              <a:schemeClr val="accent1"/>
+            </a:fillRef>
+            <a:effectRef idx="0">
+              <a:schemeClr val="accent1"/>
+            </a:effectRef>
+            <a:fontRef idx="minor">
+              <a:schemeClr val="lt1"/>
+            </a:fontRef>
+          </p:style>
+          <p:txBody>
+            <a:bodyPr rtlCol="0" anchor="ctr"/>
+            <a:lstStyle>
+              <a:defPPr>
+                <a:defRPr lang="ko-KR"/>
+              </a:defPPr>
+              <a:lvl1pPr marL="0" algn="l" defTabSz="713232" rtl="0" eaLnBrk="1" latinLnBrk="1" hangingPunct="1">
+                <a:defRPr sz="1404" kern="1200">
+                  <a:solidFill>
+                    <a:schemeClr val="lt1"/>
+                  </a:solidFill>
+                  <a:latin typeface="+mn-lt"/>
+                  <a:ea typeface="+mn-ea"/>
+                  <a:cs typeface="+mn-cs"/>
+                </a:defRPr>
+              </a:lvl1pPr>
+              <a:lvl2pPr marL="356616" algn="l" defTabSz="713232" rtl="0" eaLnBrk="1" latinLnBrk="1" hangingPunct="1">
+                <a:defRPr sz="1404" kern="1200">
+                  <a:solidFill>
+                    <a:schemeClr val="lt1"/>
+                  </a:solidFill>
+                  <a:latin typeface="+mn-lt"/>
+                  <a:ea typeface="+mn-ea"/>
+                  <a:cs typeface="+mn-cs"/>
+                </a:defRPr>
+              </a:lvl2pPr>
+              <a:lvl3pPr marL="713232" algn="l" defTabSz="713232" rtl="0" eaLnBrk="1" latinLnBrk="1" hangingPunct="1">
+                <a:defRPr sz="1404" kern="1200">
+                  <a:solidFill>
+                    <a:schemeClr val="lt1"/>
+                  </a:solidFill>
+                  <a:latin typeface="+mn-lt"/>
+                  <a:ea typeface="+mn-ea"/>
+                  <a:cs typeface="+mn-cs"/>
+                </a:defRPr>
+              </a:lvl3pPr>
+              <a:lvl4pPr marL="1069848" algn="l" defTabSz="713232" rtl="0" eaLnBrk="1" latinLnBrk="1" hangingPunct="1">
+                <a:defRPr sz="1404" kern="1200">
+                  <a:solidFill>
+                    <a:schemeClr val="lt1"/>
+                  </a:solidFill>
+                  <a:latin typeface="+mn-lt"/>
+                  <a:ea typeface="+mn-ea"/>
+                  <a:cs typeface="+mn-cs"/>
+                </a:defRPr>
+              </a:lvl4pPr>
+              <a:lvl5pPr marL="1426464" algn="l" defTabSz="713232" rtl="0" eaLnBrk="1" latinLnBrk="1" hangingPunct="1">
+                <a:defRPr sz="1404" kern="1200">
+                  <a:solidFill>
+                    <a:schemeClr val="lt1"/>
+                  </a:solidFill>
+                  <a:latin typeface="+mn-lt"/>
+                  <a:ea typeface="+mn-ea"/>
+                  <a:cs typeface="+mn-cs"/>
+                </a:defRPr>
+              </a:lvl5pPr>
+              <a:lvl6pPr marL="1783080" algn="l" defTabSz="713232" rtl="0" eaLnBrk="1" latinLnBrk="1" hangingPunct="1">
+                <a:defRPr sz="1404" kern="1200">
+                  <a:solidFill>
+                    <a:schemeClr val="lt1"/>
+                  </a:solidFill>
+                  <a:latin typeface="+mn-lt"/>
+                  <a:ea typeface="+mn-ea"/>
+                  <a:cs typeface="+mn-cs"/>
+                </a:defRPr>
+              </a:lvl6pPr>
+              <a:lvl7pPr marL="2139696" algn="l" defTabSz="713232" rtl="0" eaLnBrk="1" latinLnBrk="1" hangingPunct="1">
+                <a:defRPr sz="1404" kern="1200">
+                  <a:solidFill>
+                    <a:schemeClr val="lt1"/>
+                  </a:solidFill>
+                  <a:latin typeface="+mn-lt"/>
+                  <a:ea typeface="+mn-ea"/>
+                  <a:cs typeface="+mn-cs"/>
+                </a:defRPr>
+              </a:lvl7pPr>
+              <a:lvl8pPr marL="2496312" algn="l" defTabSz="713232" rtl="0" eaLnBrk="1" latinLnBrk="1" hangingPunct="1">
+                <a:defRPr sz="1404" kern="1200">
+                  <a:solidFill>
+                    <a:schemeClr val="lt1"/>
+                  </a:solidFill>
+                  <a:latin typeface="+mn-lt"/>
+                  <a:ea typeface="+mn-ea"/>
+                  <a:cs typeface="+mn-cs"/>
+                </a:defRPr>
+              </a:lvl8pPr>
+              <a:lvl9pPr marL="2852928" algn="l" defTabSz="713232" rtl="0" eaLnBrk="1" latinLnBrk="1" hangingPunct="1">
+                <a:defRPr sz="1404" kern="1200">
+                  <a:solidFill>
+                    <a:schemeClr val="lt1"/>
+                  </a:solidFill>
+                  <a:latin typeface="+mn-lt"/>
+                  <a:ea typeface="+mn-ea"/>
+                  <a:cs typeface="+mn-cs"/>
+                </a:defRPr>
+              </a:lvl9pPr>
+            </a:lstStyle>
+            <a:p>
+              <a:pPr algn="ctr"/>
+              <a:endParaRPr lang="ko-KR" altLang="en-US" sz="900">
+                <a:latin typeface="나눔고딕" panose="020D0604000000000000" pitchFamily="50" charset="-127"/>
+                <a:ea typeface="나눔고딕" panose="020D0604000000000000" pitchFamily="50" charset="-127"/>
+              </a:endParaRPr>
+            </a:p>
+          </p:txBody>
+        </p:sp>
+        <p:sp>
+          <p:nvSpPr>
+            <p:cNvPr id="53" name="TextBox 27">
+              <a:extLst>
+                <a:ext uri="{FF2B5EF4-FFF2-40B4-BE49-F238E27FC236}">
+                  <a16:creationId xmlns:a16="http://schemas.microsoft.com/office/drawing/2014/main" id="{884D796F-A3E9-4C78-9423-E194A4646E83}"/>
+                </a:ext>
+              </a:extLst>
+            </p:cNvPr>
+            <p:cNvSpPr txBox="1"/>
+            <p:nvPr/>
+          </p:nvSpPr>
+          <p:spPr>
+            <a:xfrm>
+              <a:off x="4727047" y="5307508"/>
+              <a:ext cx="388720" cy="200055"/>
+            </a:xfrm>
+            <a:prstGeom prst="rect">
+              <a:avLst/>
+            </a:prstGeom>
+            <a:noFill/>
+          </p:spPr>
+          <p:txBody>
+            <a:bodyPr wrap="square" rtlCol="0">
+              <a:spAutoFit/>
+            </a:bodyPr>
+            <a:lstStyle>
+              <a:defPPr>
+                <a:defRPr lang="ko-KR"/>
+              </a:defPPr>
+              <a:lvl1pPr marL="0" algn="l" defTabSz="713232" rtl="0" eaLnBrk="1" latinLnBrk="1" hangingPunct="1">
+                <a:defRPr sz="1404" kern="1200">
+                  <a:solidFill>
+                    <a:schemeClr val="tx1"/>
+                  </a:solidFill>
+                  <a:latin typeface="+mn-lt"/>
+                  <a:ea typeface="+mn-ea"/>
+                  <a:cs typeface="+mn-cs"/>
+                </a:defRPr>
+              </a:lvl1pPr>
+              <a:lvl2pPr marL="356616" algn="l" defTabSz="713232" rtl="0" eaLnBrk="1" latinLnBrk="1" hangingPunct="1">
+                <a:defRPr sz="1404" kern="1200">
+                  <a:solidFill>
+                    <a:schemeClr val="tx1"/>
+                  </a:solidFill>
+                  <a:latin typeface="+mn-lt"/>
+                  <a:ea typeface="+mn-ea"/>
+                  <a:cs typeface="+mn-cs"/>
+                </a:defRPr>
+              </a:lvl2pPr>
+              <a:lvl3pPr marL="713232" algn="l" defTabSz="713232" rtl="0" eaLnBrk="1" latinLnBrk="1" hangingPunct="1">
+                <a:defRPr sz="1404" kern="1200">
+                  <a:solidFill>
+                    <a:schemeClr val="tx1"/>
+                  </a:solidFill>
+                  <a:latin typeface="+mn-lt"/>
+                  <a:ea typeface="+mn-ea"/>
+                  <a:cs typeface="+mn-cs"/>
+                </a:defRPr>
+              </a:lvl3pPr>
+              <a:lvl4pPr marL="1069848" algn="l" defTabSz="713232" rtl="0" eaLnBrk="1" latinLnBrk="1" hangingPunct="1">
+                <a:defRPr sz="1404" kern="1200">
+                  <a:solidFill>
+                    <a:schemeClr val="tx1"/>
+                  </a:solidFill>
+                  <a:latin typeface="+mn-lt"/>
+                  <a:ea typeface="+mn-ea"/>
+                  <a:cs typeface="+mn-cs"/>
+                </a:defRPr>
+              </a:lvl4pPr>
+              <a:lvl5pPr marL="1426464" algn="l" defTabSz="713232" rtl="0" eaLnBrk="1" latinLnBrk="1" hangingPunct="1">
+                <a:defRPr sz="1404" kern="1200">
+                  <a:solidFill>
+                    <a:schemeClr val="tx1"/>
+                  </a:solidFill>
+                  <a:latin typeface="+mn-lt"/>
+                  <a:ea typeface="+mn-ea"/>
+                  <a:cs typeface="+mn-cs"/>
+                </a:defRPr>
+              </a:lvl5pPr>
+              <a:lvl6pPr marL="1783080" algn="l" defTabSz="713232" rtl="0" eaLnBrk="1" latinLnBrk="1" hangingPunct="1">
+                <a:defRPr sz="1404" kern="1200">
+                  <a:solidFill>
+                    <a:schemeClr val="tx1"/>
+                  </a:solidFill>
+                  <a:latin typeface="+mn-lt"/>
+                  <a:ea typeface="+mn-ea"/>
+                  <a:cs typeface="+mn-cs"/>
+                </a:defRPr>
+              </a:lvl6pPr>
+              <a:lvl7pPr marL="2139696" algn="l" defTabSz="713232" rtl="0" eaLnBrk="1" latinLnBrk="1" hangingPunct="1">
+                <a:defRPr sz="1404" kern="1200">
+                  <a:solidFill>
+                    <a:schemeClr val="tx1"/>
+                  </a:solidFill>
+                  <a:latin typeface="+mn-lt"/>
+                  <a:ea typeface="+mn-ea"/>
+                  <a:cs typeface="+mn-cs"/>
+                </a:defRPr>
+              </a:lvl7pPr>
+              <a:lvl8pPr marL="2496312" algn="l" defTabSz="713232" rtl="0" eaLnBrk="1" latinLnBrk="1" hangingPunct="1">
+                <a:defRPr sz="1404" kern="1200">
+                  <a:solidFill>
+                    <a:schemeClr val="tx1"/>
+                  </a:solidFill>
+                  <a:latin typeface="+mn-lt"/>
+                  <a:ea typeface="+mn-ea"/>
+                  <a:cs typeface="+mn-cs"/>
+                </a:defRPr>
+              </a:lvl8pPr>
+              <a:lvl9pPr marL="2852928" algn="l" defTabSz="713232" rtl="0" eaLnBrk="1" latinLnBrk="1" hangingPunct="1">
+                <a:defRPr sz="1404" kern="1200">
+                  <a:solidFill>
+                    <a:schemeClr val="tx1"/>
+                  </a:solidFill>
+                  <a:latin typeface="+mn-lt"/>
+                  <a:ea typeface="+mn-ea"/>
+                  <a:cs typeface="+mn-cs"/>
+                </a:defRPr>
+              </a:lvl9pPr>
+            </a:lstStyle>
+            <a:p>
+              <a:pPr algn="ctr"/>
+              <a:r>
+                <a:rPr lang="en-US" altLang="ko-KR" sz="700" b="1" dirty="0">
+                  <a:solidFill>
+                    <a:schemeClr val="bg1"/>
+                  </a:solidFill>
+                  <a:latin typeface="나눔고딕" panose="020D0604000000000000" pitchFamily="50" charset="-127"/>
+                  <a:ea typeface="나눔고딕" panose="020D0604000000000000" pitchFamily="50" charset="-127"/>
+                </a:rPr>
+                <a:t>1</a:t>
+              </a:r>
+              <a:endParaRPr lang="ko-KR" altLang="en-US" sz="700" b="1" dirty="0">
+                <a:solidFill>
+                  <a:schemeClr val="bg1"/>
+                </a:solidFill>
+                <a:latin typeface="나눔고딕" panose="020D0604000000000000" pitchFamily="50" charset="-127"/>
+                <a:ea typeface="나눔고딕" panose="020D0604000000000000" pitchFamily="50" charset="-127"/>
+              </a:endParaRPr>
+            </a:p>
+          </p:txBody>
+        </p:sp>
+      </p:grpSp>
+      <p:grpSp>
+        <p:nvGrpSpPr>
+          <p:cNvPr id="54" name="그룹 53">
+            <a:extLst>
+              <a:ext uri="{FF2B5EF4-FFF2-40B4-BE49-F238E27FC236}">
+                <a16:creationId xmlns:a16="http://schemas.microsoft.com/office/drawing/2014/main" id="{5BCBEBE2-6F8D-4DE9-AAEA-162AFEF86819}"/>
+              </a:ext>
+            </a:extLst>
+          </p:cNvPr>
+          <p:cNvGrpSpPr/>
+          <p:nvPr/>
+        </p:nvGrpSpPr>
+        <p:grpSpPr>
+          <a:xfrm>
+            <a:off x="3219867" y="1289293"/>
+            <a:ext cx="388720" cy="200055"/>
+            <a:chOff x="4727047" y="5307508"/>
+            <a:chExt cx="388720" cy="200055"/>
+          </a:xfrm>
+        </p:grpSpPr>
+        <p:sp>
+          <p:nvSpPr>
+            <p:cNvPr id="55" name="타원 54">
+              <a:extLst>
+                <a:ext uri="{FF2B5EF4-FFF2-40B4-BE49-F238E27FC236}">
+                  <a16:creationId xmlns:a16="http://schemas.microsoft.com/office/drawing/2014/main" id="{D583FCD1-7B98-4FE1-9551-3FA8B22001AC}"/>
+                </a:ext>
+              </a:extLst>
+            </p:cNvPr>
+            <p:cNvSpPr/>
+            <p:nvPr/>
+          </p:nvSpPr>
+          <p:spPr>
+            <a:xfrm>
+              <a:off x="4831407" y="5317535"/>
+              <a:ext cx="180000" cy="180000"/>
+            </a:xfrm>
+            <a:prstGeom prst="ellipse">
+              <a:avLst/>
+            </a:prstGeom>
+            <a:solidFill>
+              <a:srgbClr val="FF0000"/>
+            </a:solidFill>
+            <a:ln>
+              <a:noFill/>
+            </a:ln>
+            <a:effectLst>
+              <a:glow rad="50800">
+                <a:srgbClr val="FF0000">
+                  <a:alpha val="30000"/>
+                </a:srgbClr>
+              </a:glow>
+              <a:softEdge rad="0"/>
+            </a:effectLst>
+          </p:spPr>
+          <p:style>
+            <a:lnRef idx="2">
+              <a:schemeClr val="accent1">
+                <a:shade val="50000"/>
+              </a:schemeClr>
+            </a:lnRef>
+            <a:fillRef idx="1">
+              <a:schemeClr val="accent1"/>
+            </a:fillRef>
+            <a:effectRef idx="0">
+              <a:schemeClr val="accent1"/>
+            </a:effectRef>
+            <a:fontRef idx="minor">
+              <a:schemeClr val="lt1"/>
+            </a:fontRef>
+          </p:style>
+          <p:txBody>
+            <a:bodyPr rtlCol="0" anchor="ctr"/>
+            <a:lstStyle>
+              <a:defPPr>
+                <a:defRPr lang="ko-KR"/>
+              </a:defPPr>
+              <a:lvl1pPr marL="0" algn="l" defTabSz="713232" rtl="0" eaLnBrk="1" latinLnBrk="1" hangingPunct="1">
+                <a:defRPr sz="1404" kern="1200">
+                  <a:solidFill>
+                    <a:schemeClr val="lt1"/>
+                  </a:solidFill>
+                  <a:latin typeface="+mn-lt"/>
+                  <a:ea typeface="+mn-ea"/>
+                  <a:cs typeface="+mn-cs"/>
+                </a:defRPr>
+              </a:lvl1pPr>
+              <a:lvl2pPr marL="356616" algn="l" defTabSz="713232" rtl="0" eaLnBrk="1" latinLnBrk="1" hangingPunct="1">
+                <a:defRPr sz="1404" kern="1200">
+                  <a:solidFill>
+                    <a:schemeClr val="lt1"/>
+                  </a:solidFill>
+                  <a:latin typeface="+mn-lt"/>
+                  <a:ea typeface="+mn-ea"/>
+                  <a:cs typeface="+mn-cs"/>
+                </a:defRPr>
+              </a:lvl2pPr>
+              <a:lvl3pPr marL="713232" algn="l" defTabSz="713232" rtl="0" eaLnBrk="1" latinLnBrk="1" hangingPunct="1">
+                <a:defRPr sz="1404" kern="1200">
+                  <a:solidFill>
+                    <a:schemeClr val="lt1"/>
+                  </a:solidFill>
+                  <a:latin typeface="+mn-lt"/>
+                  <a:ea typeface="+mn-ea"/>
+                  <a:cs typeface="+mn-cs"/>
+                </a:defRPr>
+              </a:lvl3pPr>
+              <a:lvl4pPr marL="1069848" algn="l" defTabSz="713232" rtl="0" eaLnBrk="1" latinLnBrk="1" hangingPunct="1">
+                <a:defRPr sz="1404" kern="1200">
+                  <a:solidFill>
+                    <a:schemeClr val="lt1"/>
+                  </a:solidFill>
+                  <a:latin typeface="+mn-lt"/>
+                  <a:ea typeface="+mn-ea"/>
+                  <a:cs typeface="+mn-cs"/>
+                </a:defRPr>
+              </a:lvl4pPr>
+              <a:lvl5pPr marL="1426464" algn="l" defTabSz="713232" rtl="0" eaLnBrk="1" latinLnBrk="1" hangingPunct="1">
+                <a:defRPr sz="1404" kern="1200">
+                  <a:solidFill>
+                    <a:schemeClr val="lt1"/>
+                  </a:solidFill>
+                  <a:latin typeface="+mn-lt"/>
+                  <a:ea typeface="+mn-ea"/>
+                  <a:cs typeface="+mn-cs"/>
+                </a:defRPr>
+              </a:lvl5pPr>
+              <a:lvl6pPr marL="1783080" algn="l" defTabSz="713232" rtl="0" eaLnBrk="1" latinLnBrk="1" hangingPunct="1">
+                <a:defRPr sz="1404" kern="1200">
+                  <a:solidFill>
+                    <a:schemeClr val="lt1"/>
+                  </a:solidFill>
+                  <a:latin typeface="+mn-lt"/>
+                  <a:ea typeface="+mn-ea"/>
+                  <a:cs typeface="+mn-cs"/>
+                </a:defRPr>
+              </a:lvl6pPr>
+              <a:lvl7pPr marL="2139696" algn="l" defTabSz="713232" rtl="0" eaLnBrk="1" latinLnBrk="1" hangingPunct="1">
+                <a:defRPr sz="1404" kern="1200">
+                  <a:solidFill>
+                    <a:schemeClr val="lt1"/>
+                  </a:solidFill>
+                  <a:latin typeface="+mn-lt"/>
+                  <a:ea typeface="+mn-ea"/>
+                  <a:cs typeface="+mn-cs"/>
+                </a:defRPr>
+              </a:lvl7pPr>
+              <a:lvl8pPr marL="2496312" algn="l" defTabSz="713232" rtl="0" eaLnBrk="1" latinLnBrk="1" hangingPunct="1">
+                <a:defRPr sz="1404" kern="1200">
+                  <a:solidFill>
+                    <a:schemeClr val="lt1"/>
+                  </a:solidFill>
+                  <a:latin typeface="+mn-lt"/>
+                  <a:ea typeface="+mn-ea"/>
+                  <a:cs typeface="+mn-cs"/>
+                </a:defRPr>
+              </a:lvl8pPr>
+              <a:lvl9pPr marL="2852928" algn="l" defTabSz="713232" rtl="0" eaLnBrk="1" latinLnBrk="1" hangingPunct="1">
+                <a:defRPr sz="1404" kern="1200">
+                  <a:solidFill>
+                    <a:schemeClr val="lt1"/>
+                  </a:solidFill>
+                  <a:latin typeface="+mn-lt"/>
+                  <a:ea typeface="+mn-ea"/>
+                  <a:cs typeface="+mn-cs"/>
+                </a:defRPr>
+              </a:lvl9pPr>
+            </a:lstStyle>
+            <a:p>
+              <a:pPr algn="ctr"/>
+              <a:endParaRPr lang="ko-KR" altLang="en-US" sz="900">
+                <a:latin typeface="나눔고딕" panose="020D0604000000000000" pitchFamily="50" charset="-127"/>
+                <a:ea typeface="나눔고딕" panose="020D0604000000000000" pitchFamily="50" charset="-127"/>
+              </a:endParaRPr>
+            </a:p>
+          </p:txBody>
+        </p:sp>
+        <p:sp>
+          <p:nvSpPr>
+            <p:cNvPr id="56" name="TextBox 27">
+              <a:extLst>
+                <a:ext uri="{FF2B5EF4-FFF2-40B4-BE49-F238E27FC236}">
+                  <a16:creationId xmlns:a16="http://schemas.microsoft.com/office/drawing/2014/main" id="{8F85C6AA-AAD3-4F1D-B830-97D56CDC5155}"/>
+                </a:ext>
+              </a:extLst>
+            </p:cNvPr>
+            <p:cNvSpPr txBox="1"/>
+            <p:nvPr/>
+          </p:nvSpPr>
+          <p:spPr>
+            <a:xfrm>
+              <a:off x="4727047" y="5307508"/>
+              <a:ext cx="388720" cy="200055"/>
+            </a:xfrm>
+            <a:prstGeom prst="rect">
+              <a:avLst/>
+            </a:prstGeom>
+            <a:noFill/>
+          </p:spPr>
+          <p:txBody>
+            <a:bodyPr wrap="square" rtlCol="0">
+              <a:spAutoFit/>
+            </a:bodyPr>
+            <a:lstStyle>
+              <a:defPPr>
+                <a:defRPr lang="ko-KR"/>
+              </a:defPPr>
+              <a:lvl1pPr marL="0" algn="l" defTabSz="713232" rtl="0" eaLnBrk="1" latinLnBrk="1" hangingPunct="1">
+                <a:defRPr sz="1404" kern="1200">
+                  <a:solidFill>
+                    <a:schemeClr val="tx1"/>
+                  </a:solidFill>
+                  <a:latin typeface="+mn-lt"/>
+                  <a:ea typeface="+mn-ea"/>
+                  <a:cs typeface="+mn-cs"/>
+                </a:defRPr>
+              </a:lvl1pPr>
+              <a:lvl2pPr marL="356616" algn="l" defTabSz="713232" rtl="0" eaLnBrk="1" latinLnBrk="1" hangingPunct="1">
+                <a:defRPr sz="1404" kern="1200">
+                  <a:solidFill>
+                    <a:schemeClr val="tx1"/>
+                  </a:solidFill>
+                  <a:latin typeface="+mn-lt"/>
+                  <a:ea typeface="+mn-ea"/>
+                  <a:cs typeface="+mn-cs"/>
+                </a:defRPr>
+              </a:lvl2pPr>
+              <a:lvl3pPr marL="713232" algn="l" defTabSz="713232" rtl="0" eaLnBrk="1" latinLnBrk="1" hangingPunct="1">
+                <a:defRPr sz="1404" kern="1200">
+                  <a:solidFill>
+                    <a:schemeClr val="tx1"/>
+                  </a:solidFill>
+                  <a:latin typeface="+mn-lt"/>
+                  <a:ea typeface="+mn-ea"/>
+                  <a:cs typeface="+mn-cs"/>
+                </a:defRPr>
+              </a:lvl3pPr>
+              <a:lvl4pPr marL="1069848" algn="l" defTabSz="713232" rtl="0" eaLnBrk="1" latinLnBrk="1" hangingPunct="1">
+                <a:defRPr sz="1404" kern="1200">
+                  <a:solidFill>
+                    <a:schemeClr val="tx1"/>
+                  </a:solidFill>
+                  <a:latin typeface="+mn-lt"/>
+                  <a:ea typeface="+mn-ea"/>
+                  <a:cs typeface="+mn-cs"/>
+                </a:defRPr>
+              </a:lvl4pPr>
+              <a:lvl5pPr marL="1426464" algn="l" defTabSz="713232" rtl="0" eaLnBrk="1" latinLnBrk="1" hangingPunct="1">
+                <a:defRPr sz="1404" kern="1200">
+                  <a:solidFill>
+                    <a:schemeClr val="tx1"/>
+                  </a:solidFill>
+                  <a:latin typeface="+mn-lt"/>
+                  <a:ea typeface="+mn-ea"/>
+                  <a:cs typeface="+mn-cs"/>
+                </a:defRPr>
+              </a:lvl5pPr>
+              <a:lvl6pPr marL="1783080" algn="l" defTabSz="713232" rtl="0" eaLnBrk="1" latinLnBrk="1" hangingPunct="1">
+                <a:defRPr sz="1404" kern="1200">
+                  <a:solidFill>
+                    <a:schemeClr val="tx1"/>
+                  </a:solidFill>
+                  <a:latin typeface="+mn-lt"/>
+                  <a:ea typeface="+mn-ea"/>
+                  <a:cs typeface="+mn-cs"/>
+                </a:defRPr>
+              </a:lvl6pPr>
+              <a:lvl7pPr marL="2139696" algn="l" defTabSz="713232" rtl="0" eaLnBrk="1" latinLnBrk="1" hangingPunct="1">
+                <a:defRPr sz="1404" kern="1200">
+                  <a:solidFill>
+                    <a:schemeClr val="tx1"/>
+                  </a:solidFill>
+                  <a:latin typeface="+mn-lt"/>
+                  <a:ea typeface="+mn-ea"/>
+                  <a:cs typeface="+mn-cs"/>
+                </a:defRPr>
+              </a:lvl7pPr>
+              <a:lvl8pPr marL="2496312" algn="l" defTabSz="713232" rtl="0" eaLnBrk="1" latinLnBrk="1" hangingPunct="1">
+                <a:defRPr sz="1404" kern="1200">
+                  <a:solidFill>
+                    <a:schemeClr val="tx1"/>
+                  </a:solidFill>
+                  <a:latin typeface="+mn-lt"/>
+                  <a:ea typeface="+mn-ea"/>
+                  <a:cs typeface="+mn-cs"/>
+                </a:defRPr>
+              </a:lvl8pPr>
+              <a:lvl9pPr marL="2852928" algn="l" defTabSz="713232" rtl="0" eaLnBrk="1" latinLnBrk="1" hangingPunct="1">
+                <a:defRPr sz="1404" kern="1200">
+                  <a:solidFill>
+                    <a:schemeClr val="tx1"/>
+                  </a:solidFill>
+                  <a:latin typeface="+mn-lt"/>
+                  <a:ea typeface="+mn-ea"/>
+                  <a:cs typeface="+mn-cs"/>
+                </a:defRPr>
+              </a:lvl9pPr>
+            </a:lstStyle>
+            <a:p>
+              <a:pPr algn="ctr"/>
+              <a:r>
+                <a:rPr lang="en-US" altLang="ko-KR" sz="700" b="1" dirty="0">
+                  <a:solidFill>
+                    <a:schemeClr val="bg1"/>
+                  </a:solidFill>
+                  <a:latin typeface="나눔고딕" panose="020D0604000000000000" pitchFamily="50" charset="-127"/>
+                  <a:ea typeface="나눔고딕" panose="020D0604000000000000" pitchFamily="50" charset="-127"/>
+                </a:rPr>
+                <a:t>2</a:t>
+              </a:r>
+              <a:endParaRPr lang="ko-KR" altLang="en-US" sz="700" b="1" dirty="0">
+                <a:solidFill>
+                  <a:schemeClr val="bg1"/>
+                </a:solidFill>
+                <a:latin typeface="나눔고딕" panose="020D0604000000000000" pitchFamily="50" charset="-127"/>
+                <a:ea typeface="나눔고딕" panose="020D0604000000000000" pitchFamily="50" charset="-127"/>
+              </a:endParaRPr>
+            </a:p>
+          </p:txBody>
+        </p:sp>
+      </p:grpSp>
+    </p:spTree>
+    <p:extLst>
+      <p:ext uri="{BB962C8B-B14F-4D97-AF65-F5344CB8AC3E}">
+        <p14:creationId xmlns:p14="http://schemas.microsoft.com/office/powerpoint/2010/main" val="1641588991"/>
+      </p:ext>
+    </p:extLst>
+  </p:cSld>
+  <p:clrMapOvr>
+    <a:masterClrMapping/>
+  </p:clrMapOvr>
+</p:sld>
+</file>
+
+<file path=ppt/slides/slide7.xml><?xml version="1.0" encoding="utf-8"?>
+<p:sld xmlns:a="http://schemas.openxmlformats.org/drawingml/2006/main" xmlns:r="http://schemas.openxmlformats.org/officeDocument/2006/relationships" xmlns:p="http://schemas.openxmlformats.org/presentationml/2006/main">
+  <p:cSld>
+    <p:spTree>
+      <p:nvGrpSpPr>
+        <p:cNvPr id="1" name=""/>
+        <p:cNvGrpSpPr/>
+        <p:nvPr/>
+      </p:nvGrpSpPr>
+      <p:grpSpPr>
+        <a:xfrm>
+          <a:off x="0" y="0"/>
+          <a:ext cx="0" cy="0"/>
+          <a:chOff x="0" y="0"/>
+          <a:chExt cx="0" cy="0"/>
+        </a:xfrm>
+      </p:grpSpPr>
+      <p:graphicFrame>
+        <p:nvGraphicFramePr>
           <p:cNvPr id="27" name="표 26"/>
           <p:cNvGraphicFramePr>
             <a:graphicFrameLocks noGrp="1"/>
@@ -26904,7 +30752,7 @@
         </p:blipFill>
         <p:spPr>
           <a:xfrm>
-            <a:off x="107504" y="382987"/>
+            <a:off x="83296" y="1376778"/>
             <a:ext cx="6669283" cy="5130914"/>
           </a:xfrm>
           <a:prstGeom prst="rect">
@@ -29139,327 +32987,6 @@
                 </a:solidFill>
                 <a:latin typeface="Segoe UI" panose="020B0502040204020203" pitchFamily="34" charset="0"/>
                 <a:cs typeface="Segoe UI" panose="020B0502040204020203" pitchFamily="34" charset="0"/>
-              </a:endParaRPr>
-            </a:p>
-          </p:txBody>
-        </p:sp>
-      </p:grpSp>
-      <p:grpSp>
-        <p:nvGrpSpPr>
-          <p:cNvPr id="75" name="그룹 74">
-            <a:extLst>
-              <a:ext uri="{FF2B5EF4-FFF2-40B4-BE49-F238E27FC236}">
-                <a16:creationId xmlns:a16="http://schemas.microsoft.com/office/drawing/2014/main" id="{E72C7ECF-8CF7-44B1-8166-B55C9AFC91B8}"/>
-              </a:ext>
-            </a:extLst>
-          </p:cNvPr>
-          <p:cNvGrpSpPr/>
-          <p:nvPr/>
-        </p:nvGrpSpPr>
-        <p:grpSpPr>
-          <a:xfrm>
-            <a:off x="2411760" y="646711"/>
-            <a:ext cx="388720" cy="200055"/>
-            <a:chOff x="4727047" y="5307508"/>
-            <a:chExt cx="388720" cy="200055"/>
-          </a:xfrm>
-        </p:grpSpPr>
-        <p:sp>
-          <p:nvSpPr>
-            <p:cNvPr id="76" name="타원 75">
-              <a:extLst>
-                <a:ext uri="{FF2B5EF4-FFF2-40B4-BE49-F238E27FC236}">
-                  <a16:creationId xmlns:a16="http://schemas.microsoft.com/office/drawing/2014/main" id="{FFE9A7B6-65D4-4244-A87B-7E569FE8A425}"/>
-                </a:ext>
-              </a:extLst>
-            </p:cNvPr>
-            <p:cNvSpPr/>
-            <p:nvPr/>
-          </p:nvSpPr>
-          <p:spPr>
-            <a:xfrm>
-              <a:off x="4831407" y="5317535"/>
-              <a:ext cx="180000" cy="180000"/>
-            </a:xfrm>
-            <a:prstGeom prst="ellipse">
-              <a:avLst/>
-            </a:prstGeom>
-            <a:solidFill>
-              <a:srgbClr val="FF0000"/>
-            </a:solidFill>
-            <a:ln>
-              <a:noFill/>
-            </a:ln>
-            <a:effectLst>
-              <a:glow rad="50800">
-                <a:srgbClr val="FF0000">
-                  <a:alpha val="30000"/>
-                </a:srgbClr>
-              </a:glow>
-              <a:softEdge rad="0"/>
-            </a:effectLst>
-          </p:spPr>
-          <p:style>
-            <a:lnRef idx="2">
-              <a:schemeClr val="accent1">
-                <a:shade val="50000"/>
-              </a:schemeClr>
-            </a:lnRef>
-            <a:fillRef idx="1">
-              <a:schemeClr val="accent1"/>
-            </a:fillRef>
-            <a:effectRef idx="0">
-              <a:schemeClr val="accent1"/>
-            </a:effectRef>
-            <a:fontRef idx="minor">
-              <a:schemeClr val="lt1"/>
-            </a:fontRef>
-          </p:style>
-          <p:txBody>
-            <a:bodyPr rtlCol="0" anchor="ctr"/>
-            <a:lstStyle>
-              <a:defPPr>
-                <a:defRPr lang="ko-KR"/>
-              </a:defPPr>
-              <a:lvl1pPr marL="0" algn="l" defTabSz="713232" rtl="0" eaLnBrk="1" latinLnBrk="1" hangingPunct="1">
-                <a:defRPr sz="1404" kern="1200">
-                  <a:solidFill>
-                    <a:schemeClr val="lt1"/>
-                  </a:solidFill>
-                  <a:latin typeface="+mn-lt"/>
-                  <a:ea typeface="+mn-ea"/>
-                  <a:cs typeface="+mn-cs"/>
-                </a:defRPr>
-              </a:lvl1pPr>
-              <a:lvl2pPr marL="356616" algn="l" defTabSz="713232" rtl="0" eaLnBrk="1" latinLnBrk="1" hangingPunct="1">
-                <a:defRPr sz="1404" kern="1200">
-                  <a:solidFill>
-                    <a:schemeClr val="lt1"/>
-                  </a:solidFill>
-                  <a:latin typeface="+mn-lt"/>
-                  <a:ea typeface="+mn-ea"/>
-                  <a:cs typeface="+mn-cs"/>
-                </a:defRPr>
-              </a:lvl2pPr>
-              <a:lvl3pPr marL="713232" algn="l" defTabSz="713232" rtl="0" eaLnBrk="1" latinLnBrk="1" hangingPunct="1">
-                <a:defRPr sz="1404" kern="1200">
-                  <a:solidFill>
-                    <a:schemeClr val="lt1"/>
-                  </a:solidFill>
-                  <a:latin typeface="+mn-lt"/>
-                  <a:ea typeface="+mn-ea"/>
-                  <a:cs typeface="+mn-cs"/>
-                </a:defRPr>
-              </a:lvl3pPr>
-              <a:lvl4pPr marL="1069848" algn="l" defTabSz="713232" rtl="0" eaLnBrk="1" latinLnBrk="1" hangingPunct="1">
-                <a:defRPr sz="1404" kern="1200">
-                  <a:solidFill>
-                    <a:schemeClr val="lt1"/>
-                  </a:solidFill>
-                  <a:latin typeface="+mn-lt"/>
-                  <a:ea typeface="+mn-ea"/>
-                  <a:cs typeface="+mn-cs"/>
-                </a:defRPr>
-              </a:lvl4pPr>
-              <a:lvl5pPr marL="1426464" algn="l" defTabSz="713232" rtl="0" eaLnBrk="1" latinLnBrk="1" hangingPunct="1">
-                <a:defRPr sz="1404" kern="1200">
-                  <a:solidFill>
-                    <a:schemeClr val="lt1"/>
-                  </a:solidFill>
-                  <a:latin typeface="+mn-lt"/>
-                  <a:ea typeface="+mn-ea"/>
-                  <a:cs typeface="+mn-cs"/>
-                </a:defRPr>
-              </a:lvl5pPr>
-              <a:lvl6pPr marL="1783080" algn="l" defTabSz="713232" rtl="0" eaLnBrk="1" latinLnBrk="1" hangingPunct="1">
-                <a:defRPr sz="1404" kern="1200">
-                  <a:solidFill>
-                    <a:schemeClr val="lt1"/>
-                  </a:solidFill>
-                  <a:latin typeface="+mn-lt"/>
-                  <a:ea typeface="+mn-ea"/>
-                  <a:cs typeface="+mn-cs"/>
-                </a:defRPr>
-              </a:lvl6pPr>
-              <a:lvl7pPr marL="2139696" algn="l" defTabSz="713232" rtl="0" eaLnBrk="1" latinLnBrk="1" hangingPunct="1">
-                <a:defRPr sz="1404" kern="1200">
-                  <a:solidFill>
-                    <a:schemeClr val="lt1"/>
-                  </a:solidFill>
-                  <a:latin typeface="+mn-lt"/>
-                  <a:ea typeface="+mn-ea"/>
-                  <a:cs typeface="+mn-cs"/>
-                </a:defRPr>
-              </a:lvl7pPr>
-              <a:lvl8pPr marL="2496312" algn="l" defTabSz="713232" rtl="0" eaLnBrk="1" latinLnBrk="1" hangingPunct="1">
-                <a:defRPr sz="1404" kern="1200">
-                  <a:solidFill>
-                    <a:schemeClr val="lt1"/>
-                  </a:solidFill>
-                  <a:latin typeface="+mn-lt"/>
-                  <a:ea typeface="+mn-ea"/>
-                  <a:cs typeface="+mn-cs"/>
-                </a:defRPr>
-              </a:lvl8pPr>
-              <a:lvl9pPr marL="2852928" algn="l" defTabSz="713232" rtl="0" eaLnBrk="1" latinLnBrk="1" hangingPunct="1">
-                <a:defRPr sz="1404" kern="1200">
-                  <a:solidFill>
-                    <a:schemeClr val="lt1"/>
-                  </a:solidFill>
-                  <a:latin typeface="+mn-lt"/>
-                  <a:ea typeface="+mn-ea"/>
-                  <a:cs typeface="+mn-cs"/>
-                </a:defRPr>
-              </a:lvl9pPr>
-            </a:lstStyle>
-            <a:p>
-              <a:pPr algn="ctr"/>
-              <a:endParaRPr lang="ko-KR" altLang="en-US" sz="900">
-                <a:latin typeface="나눔고딕" panose="020D0604000000000000" pitchFamily="50" charset="-127"/>
-                <a:ea typeface="나눔고딕" panose="020D0604000000000000" pitchFamily="50" charset="-127"/>
-              </a:endParaRPr>
-            </a:p>
-          </p:txBody>
-        </p:sp>
-        <p:sp>
-          <p:nvSpPr>
-            <p:cNvPr id="77" name="TextBox 27">
-              <a:extLst>
-                <a:ext uri="{FF2B5EF4-FFF2-40B4-BE49-F238E27FC236}">
-                  <a16:creationId xmlns:a16="http://schemas.microsoft.com/office/drawing/2014/main" id="{A279F73A-952D-4D91-80D6-A9A746857074}"/>
-                </a:ext>
-              </a:extLst>
-            </p:cNvPr>
-            <p:cNvSpPr txBox="1"/>
-            <p:nvPr/>
-          </p:nvSpPr>
-          <p:spPr>
-            <a:xfrm>
-              <a:off x="4727047" y="5307508"/>
-              <a:ext cx="388720" cy="200055"/>
-            </a:xfrm>
-            <a:prstGeom prst="rect">
-              <a:avLst/>
-            </a:prstGeom>
-            <a:noFill/>
-          </p:spPr>
-          <p:txBody>
-            <a:bodyPr wrap="square" rtlCol="0">
-              <a:spAutoFit/>
-            </a:bodyPr>
-            <a:lstStyle>
-              <a:defPPr>
-                <a:defRPr lang="ko-KR"/>
-              </a:defPPr>
-              <a:lvl1pPr marL="0" algn="l" defTabSz="713232" rtl="0" eaLnBrk="1" latinLnBrk="1" hangingPunct="1">
-                <a:defRPr sz="1404" kern="1200">
-                  <a:solidFill>
-                    <a:schemeClr val="tx1"/>
-                  </a:solidFill>
-                  <a:latin typeface="+mn-lt"/>
-                  <a:ea typeface="+mn-ea"/>
-                  <a:cs typeface="+mn-cs"/>
-                </a:defRPr>
-              </a:lvl1pPr>
-              <a:lvl2pPr marL="356616" algn="l" defTabSz="713232" rtl="0" eaLnBrk="1" latinLnBrk="1" hangingPunct="1">
-                <a:defRPr sz="1404" kern="1200">
-                  <a:solidFill>
-                    <a:schemeClr val="tx1"/>
-                  </a:solidFill>
-                  <a:latin typeface="+mn-lt"/>
-                  <a:ea typeface="+mn-ea"/>
-                  <a:cs typeface="+mn-cs"/>
-                </a:defRPr>
-              </a:lvl2pPr>
-              <a:lvl3pPr marL="713232" algn="l" defTabSz="713232" rtl="0" eaLnBrk="1" latinLnBrk="1" hangingPunct="1">
-                <a:defRPr sz="1404" kern="1200">
-                  <a:solidFill>
-                    <a:schemeClr val="tx1"/>
-                  </a:solidFill>
-                  <a:latin typeface="+mn-lt"/>
-                  <a:ea typeface="+mn-ea"/>
-                  <a:cs typeface="+mn-cs"/>
-                </a:defRPr>
-              </a:lvl3pPr>
-              <a:lvl4pPr marL="1069848" algn="l" defTabSz="713232" rtl="0" eaLnBrk="1" latinLnBrk="1" hangingPunct="1">
-                <a:defRPr sz="1404" kern="1200">
-                  <a:solidFill>
-                    <a:schemeClr val="tx1"/>
-                  </a:solidFill>
-                  <a:latin typeface="+mn-lt"/>
-                  <a:ea typeface="+mn-ea"/>
-                  <a:cs typeface="+mn-cs"/>
-                </a:defRPr>
-              </a:lvl4pPr>
-              <a:lvl5pPr marL="1426464" algn="l" defTabSz="713232" rtl="0" eaLnBrk="1" latinLnBrk="1" hangingPunct="1">
-                <a:defRPr sz="1404" kern="1200">
-                  <a:solidFill>
-                    <a:schemeClr val="tx1"/>
-                  </a:solidFill>
-                  <a:latin typeface="+mn-lt"/>
-                  <a:ea typeface="+mn-ea"/>
-                  <a:cs typeface="+mn-cs"/>
-                </a:defRPr>
-              </a:lvl5pPr>
-              <a:lvl6pPr marL="1783080" algn="l" defTabSz="713232" rtl="0" eaLnBrk="1" latinLnBrk="1" hangingPunct="1">
-                <a:defRPr sz="1404" kern="1200">
-                  <a:solidFill>
-                    <a:schemeClr val="tx1"/>
-                  </a:solidFill>
-                  <a:latin typeface="+mn-lt"/>
-                  <a:ea typeface="+mn-ea"/>
-                  <a:cs typeface="+mn-cs"/>
-                </a:defRPr>
-              </a:lvl6pPr>
-              <a:lvl7pPr marL="2139696" algn="l" defTabSz="713232" rtl="0" eaLnBrk="1" latinLnBrk="1" hangingPunct="1">
-                <a:defRPr sz="1404" kern="1200">
-                  <a:solidFill>
-                    <a:schemeClr val="tx1"/>
-                  </a:solidFill>
-                  <a:latin typeface="+mn-lt"/>
-                  <a:ea typeface="+mn-ea"/>
-                  <a:cs typeface="+mn-cs"/>
-                </a:defRPr>
-              </a:lvl7pPr>
-              <a:lvl8pPr marL="2496312" algn="l" defTabSz="713232" rtl="0" eaLnBrk="1" latinLnBrk="1" hangingPunct="1">
-                <a:defRPr sz="1404" kern="1200">
-                  <a:solidFill>
-                    <a:schemeClr val="tx1"/>
-                  </a:solidFill>
-                  <a:latin typeface="+mn-lt"/>
-                  <a:ea typeface="+mn-ea"/>
-                  <a:cs typeface="+mn-cs"/>
-                </a:defRPr>
-              </a:lvl8pPr>
-              <a:lvl9pPr marL="2852928" algn="l" defTabSz="713232" rtl="0" eaLnBrk="1" latinLnBrk="1" hangingPunct="1">
-                <a:defRPr sz="1404" kern="1200">
-                  <a:solidFill>
-                    <a:schemeClr val="tx1"/>
-                  </a:solidFill>
-                  <a:latin typeface="+mn-lt"/>
-                  <a:ea typeface="+mn-ea"/>
-                  <a:cs typeface="+mn-cs"/>
-                </a:defRPr>
-              </a:lvl9pPr>
-            </a:lstStyle>
-            <a:p>
-              <a:pPr algn="ctr"/>
-              <a:r>
-                <a:rPr lang="en-US" altLang="ko-KR" sz="700" b="1" dirty="0">
-                  <a:solidFill>
-                    <a:schemeClr val="bg1"/>
-                  </a:solidFill>
-                  <a:latin typeface="나눔고딕" panose="020D0604000000000000" pitchFamily="50" charset="-127"/>
-                  <a:ea typeface="나눔고딕" panose="020D0604000000000000" pitchFamily="50" charset="-127"/>
-                </a:rPr>
-                <a:t>1</a:t>
-              </a:r>
-              <a:endParaRPr lang="ko-KR" altLang="en-US" sz="700" b="1" dirty="0">
-                <a:solidFill>
-                  <a:schemeClr val="bg1"/>
-                </a:solidFill>
-                <a:latin typeface="나눔고딕" panose="020D0604000000000000" pitchFamily="50" charset="-127"/>
-                <a:ea typeface="나눔고딕" panose="020D0604000000000000" pitchFamily="50" charset="-127"/>
               </a:endParaRPr>
             </a:p>
           </p:txBody>
